--- a/public/materials/frontend/react-components.pptx
+++ b/public/materials/frontend/react-components.pptx
@@ -2,20 +2,27 @@
 <file path=ppt/presentation.xml><?xml version="1.0" encoding="utf-8"?>
 <p:presentation xmlns:p="http://schemas.openxmlformats.org/presentationml/2006/main">
   <p:sldMasterIdLst>
-    <p:sldMasterId xmlns:r="http://schemas.openxmlformats.org/officeDocument/2006/relationships" id="2147483648" r:id="R859edad4d5454466"/>
+    <p:sldMasterId xmlns:r="http://schemas.openxmlformats.org/officeDocument/2006/relationships" id="2147483648" r:id="R081287a27eed4d33"/>
   </p:sldMasterIdLst>
   <p:notesMasterIdLst>
-    <p:notesMasterId xmlns:r="http://schemas.openxmlformats.org/officeDocument/2006/relationships" r:id="R4e3e71af2f19426e"/>
+    <p:notesMasterId xmlns:r="http://schemas.openxmlformats.org/officeDocument/2006/relationships" r:id="R8f6b2cc910b1448f"/>
   </p:notesMasterIdLst>
   <p:sldIdLst>
-    <p:sldId xmlns:r="http://schemas.openxmlformats.org/officeDocument/2006/relationships" id="256" r:id="R0e915c940bf8466d"/>
-    <p:sldId xmlns:r="http://schemas.openxmlformats.org/officeDocument/2006/relationships" id="257" r:id="R29b6299fd6554144"/>
-    <p:sldId xmlns:r="http://schemas.openxmlformats.org/officeDocument/2006/relationships" id="258" r:id="R0ac4d46873144a7f"/>
-    <p:sldId xmlns:r="http://schemas.openxmlformats.org/officeDocument/2006/relationships" id="259" r:id="R2724dafa38dd49bb"/>
-    <p:sldId xmlns:r="http://schemas.openxmlformats.org/officeDocument/2006/relationships" id="260" r:id="Rf53b6d0032f44799"/>
-    <p:sldId xmlns:r="http://schemas.openxmlformats.org/officeDocument/2006/relationships" id="261" r:id="R5dd035d17ed54112"/>
-    <p:sldId xmlns:r="http://schemas.openxmlformats.org/officeDocument/2006/relationships" id="262" r:id="R0631ec1016af435c"/>
-    <p:sldId xmlns:r="http://schemas.openxmlformats.org/officeDocument/2006/relationships" id="263" r:id="Rbdd638b06b0b405e"/>
+    <p:sldId xmlns:r="http://schemas.openxmlformats.org/officeDocument/2006/relationships" id="256" r:id="Re9fd66022af440b9"/>
+    <p:sldId xmlns:r="http://schemas.openxmlformats.org/officeDocument/2006/relationships" id="257" r:id="R7f82d19b23b84bda"/>
+    <p:sldId xmlns:r="http://schemas.openxmlformats.org/officeDocument/2006/relationships" id="258" r:id="R72889748dd414a60"/>
+    <p:sldId xmlns:r="http://schemas.openxmlformats.org/officeDocument/2006/relationships" id="259" r:id="R023b7ee6ddef421a"/>
+    <p:sldId xmlns:r="http://schemas.openxmlformats.org/officeDocument/2006/relationships" id="260" r:id="R4dcf0a3a93644a36"/>
+    <p:sldId xmlns:r="http://schemas.openxmlformats.org/officeDocument/2006/relationships" id="261" r:id="Rad6001816e824e6d"/>
+    <p:sldId xmlns:r="http://schemas.openxmlformats.org/officeDocument/2006/relationships" id="262" r:id="R72a6f30c35054d9c"/>
+    <p:sldId xmlns:r="http://schemas.openxmlformats.org/officeDocument/2006/relationships" id="263" r:id="Ra888d953bae647d8"/>
+    <p:sldId xmlns:r="http://schemas.openxmlformats.org/officeDocument/2006/relationships" id="264" r:id="R3de146e010974f0e"/>
+    <p:sldId xmlns:r="http://schemas.openxmlformats.org/officeDocument/2006/relationships" id="265" r:id="R41980ea820804fa8"/>
+    <p:sldId xmlns:r="http://schemas.openxmlformats.org/officeDocument/2006/relationships" id="266" r:id="Rebc840c06d244002"/>
+    <p:sldId xmlns:r="http://schemas.openxmlformats.org/officeDocument/2006/relationships" id="267" r:id="R03321da3b90f4916"/>
+    <p:sldId xmlns:r="http://schemas.openxmlformats.org/officeDocument/2006/relationships" id="268" r:id="Rf7f3593dc5d440ee"/>
+    <p:sldId xmlns:r="http://schemas.openxmlformats.org/officeDocument/2006/relationships" id="269" r:id="R6e2aeb3a3e3c4d0c"/>
+    <p:sldId xmlns:r="http://schemas.openxmlformats.org/officeDocument/2006/relationships" id="270" r:id="Rb7d6bfa219bc4ecd"/>
   </p:sldIdLst>
   <p:sldSz cx="12192000" cy="6858000"/>
   <p:notesSz cx="6858000" cy="9144000"/>
@@ -475,6 +482,402 @@
 </p:notes>
 </file>
 
+<file path=ppt/notesSlides/notesSlide10.xml><?xml version="1.0" encoding="utf-8"?>
+<p:notes xmlns:p="http://schemas.openxmlformats.org/presentationml/2006/main">
+  <p:cSld>
+    <p:spTree>
+      <p:nvGrpSpPr>
+        <p:cNvPr id="1" name=""/>
+        <p:cNvGrpSpPr/>
+        <p:nvPr/>
+      </p:nvGrpSpPr>
+      <p:grpSpPr>
+        <a:xfrm xmlns:a="http://schemas.openxmlformats.org/drawingml/2006/main"/>
+      </p:grpSpPr>
+      <p:sp>
+        <p:nvSpPr>
+          <p:cNvPr id="2" name="Slide Image Placeholder 1"/>
+          <p:cNvSpPr>
+            <a:spLocks xmlns:a="http://schemas.openxmlformats.org/drawingml/2006/main" noGrp="1"/>
+          </p:cNvSpPr>
+          <p:nvPr>
+            <p:ph type="sldImg" idx="0"/>
+          </p:nvPr>
+        </p:nvSpPr>
+        <p:spPr/>
+      </p:sp>
+      <p:sp>
+        <p:nvSpPr>
+          <p:cNvPr id="3" name="Notes Placeholder 2"/>
+          <p:cNvSpPr>
+            <a:spLocks xmlns:a="http://schemas.openxmlformats.org/drawingml/2006/main" noGrp="1"/>
+          </p:cNvSpPr>
+          <p:nvPr>
+            <p:ph type="body" idx="1"/>
+          </p:nvPr>
+        </p:nvSpPr>
+        <p:spPr/>
+        <p:txBody>
+          <a:bodyPr xmlns:a="http://schemas.openxmlformats.org/drawingml/2006/main"/>
+          <a:lstStyle xmlns:a="http://schemas.openxmlformats.org/drawingml/2006/main"/>
+          <a:p xmlns:a="http://schemas.openxmlformats.org/drawingml/2006/main"/>
+        </p:txBody>
+      </p:sp>
+      <p:sp>
+        <p:nvSpPr>
+          <p:cNvPr id="4" name="Slide Number Placeholder 3"/>
+          <p:cNvSpPr>
+            <a:spLocks xmlns:a="http://schemas.openxmlformats.org/drawingml/2006/main" noGrp="1"/>
+          </p:cNvSpPr>
+          <p:nvPr>
+            <p:ph type="sldNum" idx="5"/>
+          </p:nvPr>
+        </p:nvSpPr>
+        <p:spPr/>
+        <p:txBody>
+          <a:bodyPr xmlns:a="http://schemas.openxmlformats.org/drawingml/2006/main"/>
+          <a:lstStyle xmlns:a="http://schemas.openxmlformats.org/drawingml/2006/main"/>
+          <a:p xmlns:a="http://schemas.openxmlformats.org/drawingml/2006/main"/>
+        </p:txBody>
+      </p:sp>
+    </p:spTree>
+  </p:cSld>
+  <p:clrMapOvr>
+    <a:masterClrMapping xmlns:a="http://schemas.openxmlformats.org/drawingml/2006/main"/>
+  </p:clrMapOvr>
+</p:notes>
+</file>
+
+<file path=ppt/notesSlides/notesSlide11.xml><?xml version="1.0" encoding="utf-8"?>
+<p:notes xmlns:p="http://schemas.openxmlformats.org/presentationml/2006/main">
+  <p:cSld>
+    <p:spTree>
+      <p:nvGrpSpPr>
+        <p:cNvPr id="1" name=""/>
+        <p:cNvGrpSpPr/>
+        <p:nvPr/>
+      </p:nvGrpSpPr>
+      <p:grpSpPr>
+        <a:xfrm xmlns:a="http://schemas.openxmlformats.org/drawingml/2006/main"/>
+      </p:grpSpPr>
+      <p:sp>
+        <p:nvSpPr>
+          <p:cNvPr id="2" name="Slide Image Placeholder 1"/>
+          <p:cNvSpPr>
+            <a:spLocks xmlns:a="http://schemas.openxmlformats.org/drawingml/2006/main" noGrp="1"/>
+          </p:cNvSpPr>
+          <p:nvPr>
+            <p:ph type="sldImg" idx="0"/>
+          </p:nvPr>
+        </p:nvSpPr>
+        <p:spPr/>
+      </p:sp>
+      <p:sp>
+        <p:nvSpPr>
+          <p:cNvPr id="3" name="Notes Placeholder 2"/>
+          <p:cNvSpPr>
+            <a:spLocks xmlns:a="http://schemas.openxmlformats.org/drawingml/2006/main" noGrp="1"/>
+          </p:cNvSpPr>
+          <p:nvPr>
+            <p:ph type="body" idx="1"/>
+          </p:nvPr>
+        </p:nvSpPr>
+        <p:spPr/>
+        <p:txBody>
+          <a:bodyPr xmlns:a="http://schemas.openxmlformats.org/drawingml/2006/main"/>
+          <a:lstStyle xmlns:a="http://schemas.openxmlformats.org/drawingml/2006/main"/>
+          <a:p xmlns:a="http://schemas.openxmlformats.org/drawingml/2006/main"/>
+        </p:txBody>
+      </p:sp>
+      <p:sp>
+        <p:nvSpPr>
+          <p:cNvPr id="4" name="Slide Number Placeholder 3"/>
+          <p:cNvSpPr>
+            <a:spLocks xmlns:a="http://schemas.openxmlformats.org/drawingml/2006/main" noGrp="1"/>
+          </p:cNvSpPr>
+          <p:nvPr>
+            <p:ph type="sldNum" idx="5"/>
+          </p:nvPr>
+        </p:nvSpPr>
+        <p:spPr/>
+        <p:txBody>
+          <a:bodyPr xmlns:a="http://schemas.openxmlformats.org/drawingml/2006/main"/>
+          <a:lstStyle xmlns:a="http://schemas.openxmlformats.org/drawingml/2006/main"/>
+          <a:p xmlns:a="http://schemas.openxmlformats.org/drawingml/2006/main"/>
+        </p:txBody>
+      </p:sp>
+    </p:spTree>
+  </p:cSld>
+  <p:clrMapOvr>
+    <a:masterClrMapping xmlns:a="http://schemas.openxmlformats.org/drawingml/2006/main"/>
+  </p:clrMapOvr>
+</p:notes>
+</file>
+
+<file path=ppt/notesSlides/notesSlide12.xml><?xml version="1.0" encoding="utf-8"?>
+<p:notes xmlns:p="http://schemas.openxmlformats.org/presentationml/2006/main">
+  <p:cSld>
+    <p:spTree>
+      <p:nvGrpSpPr>
+        <p:cNvPr id="1" name=""/>
+        <p:cNvGrpSpPr/>
+        <p:nvPr/>
+      </p:nvGrpSpPr>
+      <p:grpSpPr>
+        <a:xfrm xmlns:a="http://schemas.openxmlformats.org/drawingml/2006/main"/>
+      </p:grpSpPr>
+      <p:sp>
+        <p:nvSpPr>
+          <p:cNvPr id="2" name="Slide Image Placeholder 1"/>
+          <p:cNvSpPr>
+            <a:spLocks xmlns:a="http://schemas.openxmlformats.org/drawingml/2006/main" noGrp="1"/>
+          </p:cNvSpPr>
+          <p:nvPr>
+            <p:ph type="sldImg" idx="0"/>
+          </p:nvPr>
+        </p:nvSpPr>
+        <p:spPr/>
+      </p:sp>
+      <p:sp>
+        <p:nvSpPr>
+          <p:cNvPr id="3" name="Notes Placeholder 2"/>
+          <p:cNvSpPr>
+            <a:spLocks xmlns:a="http://schemas.openxmlformats.org/drawingml/2006/main" noGrp="1"/>
+          </p:cNvSpPr>
+          <p:nvPr>
+            <p:ph type="body" idx="1"/>
+          </p:nvPr>
+        </p:nvSpPr>
+        <p:spPr/>
+        <p:txBody>
+          <a:bodyPr xmlns:a="http://schemas.openxmlformats.org/drawingml/2006/main"/>
+          <a:lstStyle xmlns:a="http://schemas.openxmlformats.org/drawingml/2006/main"/>
+          <a:p xmlns:a="http://schemas.openxmlformats.org/drawingml/2006/main"/>
+        </p:txBody>
+      </p:sp>
+      <p:sp>
+        <p:nvSpPr>
+          <p:cNvPr id="4" name="Slide Number Placeholder 3"/>
+          <p:cNvSpPr>
+            <a:spLocks xmlns:a="http://schemas.openxmlformats.org/drawingml/2006/main" noGrp="1"/>
+          </p:cNvSpPr>
+          <p:nvPr>
+            <p:ph type="sldNum" idx="5"/>
+          </p:nvPr>
+        </p:nvSpPr>
+        <p:spPr/>
+        <p:txBody>
+          <a:bodyPr xmlns:a="http://schemas.openxmlformats.org/drawingml/2006/main"/>
+          <a:lstStyle xmlns:a="http://schemas.openxmlformats.org/drawingml/2006/main"/>
+          <a:p xmlns:a="http://schemas.openxmlformats.org/drawingml/2006/main"/>
+        </p:txBody>
+      </p:sp>
+    </p:spTree>
+  </p:cSld>
+  <p:clrMapOvr>
+    <a:masterClrMapping xmlns:a="http://schemas.openxmlformats.org/drawingml/2006/main"/>
+  </p:clrMapOvr>
+</p:notes>
+</file>
+
+<file path=ppt/notesSlides/notesSlide13.xml><?xml version="1.0" encoding="utf-8"?>
+<p:notes xmlns:p="http://schemas.openxmlformats.org/presentationml/2006/main">
+  <p:cSld>
+    <p:spTree>
+      <p:nvGrpSpPr>
+        <p:cNvPr id="1" name=""/>
+        <p:cNvGrpSpPr/>
+        <p:nvPr/>
+      </p:nvGrpSpPr>
+      <p:grpSpPr>
+        <a:xfrm xmlns:a="http://schemas.openxmlformats.org/drawingml/2006/main"/>
+      </p:grpSpPr>
+      <p:sp>
+        <p:nvSpPr>
+          <p:cNvPr id="2" name="Slide Image Placeholder 1"/>
+          <p:cNvSpPr>
+            <a:spLocks xmlns:a="http://schemas.openxmlformats.org/drawingml/2006/main" noGrp="1"/>
+          </p:cNvSpPr>
+          <p:nvPr>
+            <p:ph type="sldImg" idx="0"/>
+          </p:nvPr>
+        </p:nvSpPr>
+        <p:spPr/>
+      </p:sp>
+      <p:sp>
+        <p:nvSpPr>
+          <p:cNvPr id="3" name="Notes Placeholder 2"/>
+          <p:cNvSpPr>
+            <a:spLocks xmlns:a="http://schemas.openxmlformats.org/drawingml/2006/main" noGrp="1"/>
+          </p:cNvSpPr>
+          <p:nvPr>
+            <p:ph type="body" idx="1"/>
+          </p:nvPr>
+        </p:nvSpPr>
+        <p:spPr/>
+        <p:txBody>
+          <a:bodyPr xmlns:a="http://schemas.openxmlformats.org/drawingml/2006/main"/>
+          <a:lstStyle xmlns:a="http://schemas.openxmlformats.org/drawingml/2006/main"/>
+          <a:p xmlns:a="http://schemas.openxmlformats.org/drawingml/2006/main"/>
+        </p:txBody>
+      </p:sp>
+      <p:sp>
+        <p:nvSpPr>
+          <p:cNvPr id="4" name="Slide Number Placeholder 3"/>
+          <p:cNvSpPr>
+            <a:spLocks xmlns:a="http://schemas.openxmlformats.org/drawingml/2006/main" noGrp="1"/>
+          </p:cNvSpPr>
+          <p:nvPr>
+            <p:ph type="sldNum" idx="5"/>
+          </p:nvPr>
+        </p:nvSpPr>
+        <p:spPr/>
+        <p:txBody>
+          <a:bodyPr xmlns:a="http://schemas.openxmlformats.org/drawingml/2006/main"/>
+          <a:lstStyle xmlns:a="http://schemas.openxmlformats.org/drawingml/2006/main"/>
+          <a:p xmlns:a="http://schemas.openxmlformats.org/drawingml/2006/main"/>
+        </p:txBody>
+      </p:sp>
+    </p:spTree>
+  </p:cSld>
+  <p:clrMapOvr>
+    <a:masterClrMapping xmlns:a="http://schemas.openxmlformats.org/drawingml/2006/main"/>
+  </p:clrMapOvr>
+</p:notes>
+</file>
+
+<file path=ppt/notesSlides/notesSlide14.xml><?xml version="1.0" encoding="utf-8"?>
+<p:notes xmlns:p="http://schemas.openxmlformats.org/presentationml/2006/main">
+  <p:cSld>
+    <p:spTree>
+      <p:nvGrpSpPr>
+        <p:cNvPr id="1" name=""/>
+        <p:cNvGrpSpPr/>
+        <p:nvPr/>
+      </p:nvGrpSpPr>
+      <p:grpSpPr>
+        <a:xfrm xmlns:a="http://schemas.openxmlformats.org/drawingml/2006/main"/>
+      </p:grpSpPr>
+      <p:sp>
+        <p:nvSpPr>
+          <p:cNvPr id="2" name="Slide Image Placeholder 1"/>
+          <p:cNvSpPr>
+            <a:spLocks xmlns:a="http://schemas.openxmlformats.org/drawingml/2006/main" noGrp="1"/>
+          </p:cNvSpPr>
+          <p:nvPr>
+            <p:ph type="sldImg" idx="0"/>
+          </p:nvPr>
+        </p:nvSpPr>
+        <p:spPr/>
+      </p:sp>
+      <p:sp>
+        <p:nvSpPr>
+          <p:cNvPr id="3" name="Notes Placeholder 2"/>
+          <p:cNvSpPr>
+            <a:spLocks xmlns:a="http://schemas.openxmlformats.org/drawingml/2006/main" noGrp="1"/>
+          </p:cNvSpPr>
+          <p:nvPr>
+            <p:ph type="body" idx="1"/>
+          </p:nvPr>
+        </p:nvSpPr>
+        <p:spPr/>
+        <p:txBody>
+          <a:bodyPr xmlns:a="http://schemas.openxmlformats.org/drawingml/2006/main"/>
+          <a:lstStyle xmlns:a="http://schemas.openxmlformats.org/drawingml/2006/main"/>
+          <a:p xmlns:a="http://schemas.openxmlformats.org/drawingml/2006/main"/>
+        </p:txBody>
+      </p:sp>
+      <p:sp>
+        <p:nvSpPr>
+          <p:cNvPr id="4" name="Slide Number Placeholder 3"/>
+          <p:cNvSpPr>
+            <a:spLocks xmlns:a="http://schemas.openxmlformats.org/drawingml/2006/main" noGrp="1"/>
+          </p:cNvSpPr>
+          <p:nvPr>
+            <p:ph type="sldNum" idx="5"/>
+          </p:nvPr>
+        </p:nvSpPr>
+        <p:spPr/>
+        <p:txBody>
+          <a:bodyPr xmlns:a="http://schemas.openxmlformats.org/drawingml/2006/main"/>
+          <a:lstStyle xmlns:a="http://schemas.openxmlformats.org/drawingml/2006/main"/>
+          <a:p xmlns:a="http://schemas.openxmlformats.org/drawingml/2006/main"/>
+        </p:txBody>
+      </p:sp>
+    </p:spTree>
+  </p:cSld>
+  <p:clrMapOvr>
+    <a:masterClrMapping xmlns:a="http://schemas.openxmlformats.org/drawingml/2006/main"/>
+  </p:clrMapOvr>
+</p:notes>
+</file>
+
+<file path=ppt/notesSlides/notesSlide15.xml><?xml version="1.0" encoding="utf-8"?>
+<p:notes xmlns:p="http://schemas.openxmlformats.org/presentationml/2006/main">
+  <p:cSld>
+    <p:spTree>
+      <p:nvGrpSpPr>
+        <p:cNvPr id="1" name=""/>
+        <p:cNvGrpSpPr/>
+        <p:nvPr/>
+      </p:nvGrpSpPr>
+      <p:grpSpPr>
+        <a:xfrm xmlns:a="http://schemas.openxmlformats.org/drawingml/2006/main"/>
+      </p:grpSpPr>
+      <p:sp>
+        <p:nvSpPr>
+          <p:cNvPr id="2" name="Slide Image Placeholder 1"/>
+          <p:cNvSpPr>
+            <a:spLocks xmlns:a="http://schemas.openxmlformats.org/drawingml/2006/main" noGrp="1"/>
+          </p:cNvSpPr>
+          <p:nvPr>
+            <p:ph type="sldImg" idx="0"/>
+          </p:nvPr>
+        </p:nvSpPr>
+        <p:spPr/>
+      </p:sp>
+      <p:sp>
+        <p:nvSpPr>
+          <p:cNvPr id="3" name="Notes Placeholder 2"/>
+          <p:cNvSpPr>
+            <a:spLocks xmlns:a="http://schemas.openxmlformats.org/drawingml/2006/main" noGrp="1"/>
+          </p:cNvSpPr>
+          <p:nvPr>
+            <p:ph type="body" idx="1"/>
+          </p:nvPr>
+        </p:nvSpPr>
+        <p:spPr/>
+        <p:txBody>
+          <a:bodyPr xmlns:a="http://schemas.openxmlformats.org/drawingml/2006/main"/>
+          <a:lstStyle xmlns:a="http://schemas.openxmlformats.org/drawingml/2006/main"/>
+          <a:p xmlns:a="http://schemas.openxmlformats.org/drawingml/2006/main"/>
+        </p:txBody>
+      </p:sp>
+      <p:sp>
+        <p:nvSpPr>
+          <p:cNvPr id="4" name="Slide Number Placeholder 3"/>
+          <p:cNvSpPr>
+            <a:spLocks xmlns:a="http://schemas.openxmlformats.org/drawingml/2006/main" noGrp="1"/>
+          </p:cNvSpPr>
+          <p:nvPr>
+            <p:ph type="sldNum" idx="5"/>
+          </p:nvPr>
+        </p:nvSpPr>
+        <p:spPr/>
+        <p:txBody>
+          <a:bodyPr xmlns:a="http://schemas.openxmlformats.org/drawingml/2006/main"/>
+          <a:lstStyle xmlns:a="http://schemas.openxmlformats.org/drawingml/2006/main"/>
+          <a:p xmlns:a="http://schemas.openxmlformats.org/drawingml/2006/main"/>
+        </p:txBody>
+      </p:sp>
+    </p:spTree>
+  </p:cSld>
+  <p:clrMapOvr>
+    <a:masterClrMapping xmlns:a="http://schemas.openxmlformats.org/drawingml/2006/main"/>
+  </p:clrMapOvr>
+</p:notes>
+</file>
+
 <file path=ppt/notesSlides/notesSlide2.xml><?xml version="1.0" encoding="utf-8"?>
 <p:notes xmlns:p="http://schemas.openxmlformats.org/presentationml/2006/main">
   <p:cSld>
@@ -872,6 +1275,72 @@
 </file>
 
 <file path=ppt/notesSlides/notesSlide8.xml><?xml version="1.0" encoding="utf-8"?>
+<p:notes xmlns:p="http://schemas.openxmlformats.org/presentationml/2006/main">
+  <p:cSld>
+    <p:spTree>
+      <p:nvGrpSpPr>
+        <p:cNvPr id="1" name=""/>
+        <p:cNvGrpSpPr/>
+        <p:nvPr/>
+      </p:nvGrpSpPr>
+      <p:grpSpPr>
+        <a:xfrm xmlns:a="http://schemas.openxmlformats.org/drawingml/2006/main"/>
+      </p:grpSpPr>
+      <p:sp>
+        <p:nvSpPr>
+          <p:cNvPr id="2" name="Slide Image Placeholder 1"/>
+          <p:cNvSpPr>
+            <a:spLocks xmlns:a="http://schemas.openxmlformats.org/drawingml/2006/main" noGrp="1"/>
+          </p:cNvSpPr>
+          <p:nvPr>
+            <p:ph type="sldImg" idx="0"/>
+          </p:nvPr>
+        </p:nvSpPr>
+        <p:spPr/>
+      </p:sp>
+      <p:sp>
+        <p:nvSpPr>
+          <p:cNvPr id="3" name="Notes Placeholder 2"/>
+          <p:cNvSpPr>
+            <a:spLocks xmlns:a="http://schemas.openxmlformats.org/drawingml/2006/main" noGrp="1"/>
+          </p:cNvSpPr>
+          <p:nvPr>
+            <p:ph type="body" idx="1"/>
+          </p:nvPr>
+        </p:nvSpPr>
+        <p:spPr/>
+        <p:txBody>
+          <a:bodyPr xmlns:a="http://schemas.openxmlformats.org/drawingml/2006/main"/>
+          <a:lstStyle xmlns:a="http://schemas.openxmlformats.org/drawingml/2006/main"/>
+          <a:p xmlns:a="http://schemas.openxmlformats.org/drawingml/2006/main"/>
+        </p:txBody>
+      </p:sp>
+      <p:sp>
+        <p:nvSpPr>
+          <p:cNvPr id="4" name="Slide Number Placeholder 3"/>
+          <p:cNvSpPr>
+            <a:spLocks xmlns:a="http://schemas.openxmlformats.org/drawingml/2006/main" noGrp="1"/>
+          </p:cNvSpPr>
+          <p:nvPr>
+            <p:ph type="sldNum" idx="5"/>
+          </p:nvPr>
+        </p:nvSpPr>
+        <p:spPr/>
+        <p:txBody>
+          <a:bodyPr xmlns:a="http://schemas.openxmlformats.org/drawingml/2006/main"/>
+          <a:lstStyle xmlns:a="http://schemas.openxmlformats.org/drawingml/2006/main"/>
+          <a:p xmlns:a="http://schemas.openxmlformats.org/drawingml/2006/main"/>
+        </p:txBody>
+      </p:sp>
+    </p:spTree>
+  </p:cSld>
+  <p:clrMapOvr>
+    <a:masterClrMapping xmlns:a="http://schemas.openxmlformats.org/drawingml/2006/main"/>
+  </p:clrMapOvr>
+</p:notes>
+</file>
+
+<file path=ppt/notesSlides/notesSlide9.xml><?xml version="1.0" encoding="utf-8"?>
 <p:notes xmlns:p="http://schemas.openxmlformats.org/presentationml/2006/main">
   <p:cSld>
     <p:spTree>
@@ -975,7 +1444,7 @@
   </p:cSld>
   <p:clrMap bg1="lt1" tx1="dk1" bg2="lt2" tx2="dk2" accent1="accent1" accent2="accent2" accent3="accent3" accent4="accent4" accent5="accent5" accent6="accent6" hlink="hlink" folHlink="folHlink"/>
   <p:sldLayoutIdLst>
-    <p:sldLayoutId xmlns:r="http://schemas.openxmlformats.org/officeDocument/2006/relationships" id="2147483649" r:id="Raa4df9c1d4d443e4"/>
+    <p:sldLayoutId xmlns:r="http://schemas.openxmlformats.org/officeDocument/2006/relationships" id="2147483649" r:id="Rb8839f3eb0ab4dc5"/>
   </p:sldLayoutIdLst>
   <p:txStyles>
     <p:titleStyle>
@@ -1526,7 +1995,7 @@
           <p:cNvPr id="9" name="">
             <a:extLst xmlns:a="http://schemas.openxmlformats.org/drawingml/2006/main">
               <a:ext uri="{FF2B5EF4-FFF2-40B4-BE49-F238E27FC236}">
-                <a16:creationId xmlns:a16="http://schemas.microsoft.com/office/drawing/2014/main" id="{B2CC1C26-9131-4966-AD76-22D475E332BF}"/>
+                <a16:creationId xmlns:a16="http://schemas.microsoft.com/office/drawing/2014/main" id="{5B805503-9F89-44A6-B2A6-30571236EEEC}"/>
               </a:ext>
             </a:extLst>
           </p:cNvPr>
@@ -1557,7 +2026,7 @@
           <p:cNvPr id="2" name="">
             <a:extLst xmlns:a="http://schemas.openxmlformats.org/drawingml/2006/main">
               <a:ext uri="{FF2B5EF4-FFF2-40B4-BE49-F238E27FC236}">
-                <a16:creationId xmlns:a16="http://schemas.microsoft.com/office/drawing/2014/main" id="{6E40B62C-0420-4265-A1EB-88155D7E0E64}"/>
+                <a16:creationId xmlns:a16="http://schemas.microsoft.com/office/drawing/2014/main" id="{176C0C4E-5212-4BBD-833C-BF483E78416E}"/>
               </a:ext>
             </a:extLst>
           </p:cNvPr>
@@ -1607,7 +2076,7 @@
           <p:cNvPr id="3" name="">
             <a:extLst xmlns:a="http://schemas.openxmlformats.org/drawingml/2006/main">
               <a:ext uri="{FF2B5EF4-FFF2-40B4-BE49-F238E27FC236}">
-                <a16:creationId xmlns:a16="http://schemas.microsoft.com/office/drawing/2014/main" id="{1A153CF5-BF01-4E0E-9580-BB52D0E7553B}"/>
+                <a16:creationId xmlns:a16="http://schemas.microsoft.com/office/drawing/2014/main" id="{436704E6-20C0-4DE2-8809-6FA598FD9837}"/>
               </a:ext>
             </a:extLst>
           </p:cNvPr>
@@ -1657,7 +2126,7 @@
           <p:cNvPr id="4" name="">
             <a:extLst xmlns:a="http://schemas.openxmlformats.org/drawingml/2006/main">
               <a:ext uri="{FF2B5EF4-FFF2-40B4-BE49-F238E27FC236}">
-                <a16:creationId xmlns:a16="http://schemas.microsoft.com/office/drawing/2014/main" id="{063E39AD-C66B-4480-8B9F-6054F91DD8A2}"/>
+                <a16:creationId xmlns:a16="http://schemas.microsoft.com/office/drawing/2014/main" id="{F80F9A4B-6D72-4204-8DC5-D7230A840C00}"/>
               </a:ext>
             </a:extLst>
           </p:cNvPr>
@@ -1707,7 +2176,7 @@
           <p:cNvPr id="5" name="">
             <a:extLst xmlns:a="http://schemas.openxmlformats.org/drawingml/2006/main">
               <a:ext uri="{FF2B5EF4-FFF2-40B4-BE49-F238E27FC236}">
-                <a16:creationId xmlns:a16="http://schemas.microsoft.com/office/drawing/2014/main" id="{3BB640C1-9580-46A6-BB4B-7FE4F84FF631}"/>
+                <a16:creationId xmlns:a16="http://schemas.microsoft.com/office/drawing/2014/main" id="{FBD079BA-24F2-4CD6-90F2-A01E21964392}"/>
               </a:ext>
             </a:extLst>
           </p:cNvPr>
@@ -1740,7 +2209,7 @@
           <p:cNvPr id="6" name="">
             <a:extLst xmlns:a="http://schemas.openxmlformats.org/drawingml/2006/main">
               <a:ext uri="{FF2B5EF4-FFF2-40B4-BE49-F238E27FC236}">
-                <a16:creationId xmlns:a16="http://schemas.microsoft.com/office/drawing/2014/main" id="{1C4B44AA-CC76-46B0-A5DA-3D9619F9528F}"/>
+                <a16:creationId xmlns:a16="http://schemas.microsoft.com/office/drawing/2014/main" id="{81CDB938-BBE8-4061-97C2-4C1EC9D3CC4F}"/>
               </a:ext>
             </a:extLst>
           </p:cNvPr>
@@ -1794,7 +2263,7 @@
           <p:nvPr/>
         </p:nvPicPr>
         <p:blipFill>
-          <a:blip xmlns:r="http://schemas.openxmlformats.org/officeDocument/2006/relationships" xmlns:a="http://schemas.openxmlformats.org/drawingml/2006/main" r:embed="R41ac5604bf1a44cc"/>
+          <a:blip xmlns:r="http://schemas.openxmlformats.org/officeDocument/2006/relationships" xmlns:a="http://schemas.openxmlformats.org/drawingml/2006/main" r:embed="R84177c4dfb7f4216"/>
           <a:srcRect xmlns:a="http://schemas.openxmlformats.org/drawingml/2006/main" l="17949" t="0" r="17949" b="0"/>
           <a:stretch xmlns:a="http://schemas.openxmlformats.org/drawingml/2006/main">
             <a:fillRect l="0" t="0" r="0" b="0"/>
@@ -1817,7 +2286,7 @@
           <p:cNvPr id="8" name="">
             <a:extLst xmlns:a="http://schemas.openxmlformats.org/drawingml/2006/main">
               <a:ext uri="{FF2B5EF4-FFF2-40B4-BE49-F238E27FC236}">
-                <a16:creationId xmlns:a16="http://schemas.microsoft.com/office/drawing/2014/main" id="{2B6787DF-17BC-4C1C-81D7-E2D86A5D7984}"/>
+                <a16:creationId xmlns:a16="http://schemas.microsoft.com/office/drawing/2014/main" id="{95B252EC-EA82-48DE-B696-7120497380A2}"/>
               </a:ext>
             </a:extLst>
           </p:cNvPr>
@@ -1865,7 +2334,2897 @@
     </p:spTree>
     <p:extLst>
       <p:ext uri="{BB962C8B-B14F-4D97-AF65-F5344CB8AC3E}">
-        <p14:creationId xmlns:p14="http://schemas.microsoft.com/office/powerpoint/2010/main" val="1537080375"/>
+        <p14:creationId xmlns:p14="http://schemas.microsoft.com/office/powerpoint/2010/main" val="1111055714"/>
+      </p:ext>
+    </p:extLst>
+  </p:cSld>
+</p:sld>
+</file>
+
+<file path=ppt/slides/slide10.xml><?xml version="1.0" encoding="utf-8"?>
+<p:sld xmlns:p="http://schemas.openxmlformats.org/presentationml/2006/main">
+  <p:cSld>
+    <p:bg>
+      <p:bgPr>
+        <a:solidFill xmlns:a="http://schemas.openxmlformats.org/drawingml/2006/main">
+          <a:srgbClr val="FFFCF8"/>
+        </a:solidFill>
+      </p:bgPr>
+    </p:bg>
+    <p:spTree>
+      <p:nvGrpSpPr>
+        <p:cNvPr id="1" name=""/>
+        <p:cNvGrpSpPr/>
+        <p:nvPr/>
+      </p:nvGrpSpPr>
+      <p:grpSpPr>
+        <a:xfrm xmlns:a="http://schemas.openxmlformats.org/drawingml/2006/main"/>
+      </p:grpSpPr>
+      <p:sp>
+        <p:nvSpPr>
+          <p:cNvPr id="13" name="">
+            <a:extLst xmlns:a="http://schemas.openxmlformats.org/drawingml/2006/main">
+              <a:ext uri="{FF2B5EF4-FFF2-40B4-BE49-F238E27FC236}">
+                <a16:creationId xmlns:a16="http://schemas.microsoft.com/office/drawing/2014/main" id="{C8C31EF1-F123-4383-993B-9202CB286C02}"/>
+              </a:ext>
+            </a:extLst>
+          </p:cNvPr>
+          <p:cNvSpPr>
+            <a:spLocks xmlns:a="http://schemas.openxmlformats.org/drawingml/2006/main" noGrp="1"/>
+          </p:cNvSpPr>
+          <p:nvPr/>
+        </p:nvSpPr>
+        <p:spPr>
+          <a:xfrm xmlns:a="http://schemas.openxmlformats.org/drawingml/2006/main">
+            <a:off x="0" y="0"/>
+            <a:ext cx="171450" cy="6858000"/>
+          </a:xfrm>
+          <a:prstGeom xmlns:a="http://schemas.openxmlformats.org/drawingml/2006/main" prst="rect">
+            <a:avLst/>
+          </a:prstGeom>
+          <a:solidFill xmlns:a="http://schemas.openxmlformats.org/drawingml/2006/main">
+            <a:srgbClr val="6657E8"/>
+          </a:solidFill>
+          <a:ln xmlns:a="http://schemas.openxmlformats.org/drawingml/2006/main" w="0">
+            <a:noFill/>
+            <a:prstDash val="solid"/>
+          </a:ln>
+        </p:spPr>
+      </p:sp>
+      <p:sp>
+        <p:nvSpPr>
+          <p:cNvPr id="2" name="">
+            <a:extLst xmlns:a="http://schemas.openxmlformats.org/drawingml/2006/main">
+              <a:ext uri="{FF2B5EF4-FFF2-40B4-BE49-F238E27FC236}">
+                <a16:creationId xmlns:a16="http://schemas.microsoft.com/office/drawing/2014/main" id="{4CFBB793-A5A7-4428-A8B7-67EE291B5035}"/>
+              </a:ext>
+            </a:extLst>
+          </p:cNvPr>
+          <p:cNvSpPr>
+            <a:spLocks xmlns:a="http://schemas.openxmlformats.org/drawingml/2006/main" noGrp="1"/>
+          </p:cNvSpPr>
+          <p:nvPr/>
+        </p:nvSpPr>
+        <p:spPr>
+          <a:xfrm xmlns:a="http://schemas.openxmlformats.org/drawingml/2006/main">
+            <a:off x="647700" y="457200"/>
+            <a:ext cx="10096500" cy="552450"/>
+          </a:xfrm>
+          <a:prstGeom xmlns:a="http://schemas.openxmlformats.org/drawingml/2006/main" prst="rect">
+            <a:avLst/>
+          </a:prstGeom>
+          <a:noFill xmlns:a="http://schemas.openxmlformats.org/drawingml/2006/main"/>
+          <a:ln xmlns:a="http://schemas.openxmlformats.org/drawingml/2006/main" w="0">
+            <a:noFill/>
+            <a:prstDash val="solid"/>
+          </a:ln>
+        </p:spPr>
+        <p:txBody>
+          <a:bodyPr xmlns:a="http://schemas.openxmlformats.org/drawingml/2006/main"/>
+          <a:lstStyle xmlns:a="http://schemas.openxmlformats.org/drawingml/2006/main"/>
+          <a:p xmlns:a="http://schemas.openxmlformats.org/drawingml/2006/main">
+            <a:pPr>
+              <a:defRPr sz="2700" b="1">
+                <a:solidFill>
+                  <a:srgbClr val="182235"/>
+                </a:solidFill>
+              </a:defRPr>
+            </a:pPr>
+            <a:r>
+              <a:rPr sz="2700" b="1">
+                <a:solidFill>
+                  <a:srgbClr val="182235"/>
+                </a:solidFill>
+              </a:rPr>
+              <a:t>준비가 끝나면 실습이 훨씬 편해집니다</a:t>
+            </a:r>
+          </a:p>
+        </p:txBody>
+      </p:sp>
+      <p:sp>
+        <p:nvSpPr>
+          <p:cNvPr id="3" name="">
+            <a:extLst xmlns:a="http://schemas.openxmlformats.org/drawingml/2006/main">
+              <a:ext uri="{FF2B5EF4-FFF2-40B4-BE49-F238E27FC236}">
+                <a16:creationId xmlns:a16="http://schemas.microsoft.com/office/drawing/2014/main" id="{B8D2384B-4AB5-4AE7-9CD9-999B0CD5F499}"/>
+              </a:ext>
+            </a:extLst>
+          </p:cNvPr>
+          <p:cNvSpPr>
+            <a:spLocks xmlns:a="http://schemas.openxmlformats.org/drawingml/2006/main" noGrp="1"/>
+          </p:cNvSpPr>
+          <p:nvPr/>
+        </p:nvSpPr>
+        <p:spPr>
+          <a:xfrm xmlns:a="http://schemas.openxmlformats.org/drawingml/2006/main">
+            <a:off x="666750" y="6419850"/>
+            <a:ext cx="10096500" cy="209550"/>
+          </a:xfrm>
+          <a:prstGeom xmlns:a="http://schemas.openxmlformats.org/drawingml/2006/main" prst="rect">
+            <a:avLst/>
+          </a:prstGeom>
+          <a:noFill xmlns:a="http://schemas.openxmlformats.org/drawingml/2006/main"/>
+          <a:ln xmlns:a="http://schemas.openxmlformats.org/drawingml/2006/main" w="0">
+            <a:noFill/>
+            <a:prstDash val="solid"/>
+          </a:ln>
+        </p:spPr>
+        <p:txBody>
+          <a:bodyPr xmlns:a="http://schemas.openxmlformats.org/drawingml/2006/main"/>
+          <a:lstStyle xmlns:a="http://schemas.openxmlformats.org/drawingml/2006/main"/>
+          <a:p xmlns:a="http://schemas.openxmlformats.org/drawingml/2006/main">
+            <a:pPr>
+              <a:defRPr sz="975">
+                <a:solidFill>
+                  <a:srgbClr val="657083"/>
+                </a:solidFill>
+              </a:defRPr>
+            </a:pPr>
+            <a:r>
+              <a:rPr sz="975">
+                <a:solidFill>
+                  <a:srgbClr val="657083"/>
+                </a:solidFill>
+              </a:rPr>
+              <a:t>EDU 웹개발 교육 플랫폼  ·  10</a:t>
+            </a:r>
+          </a:p>
+        </p:txBody>
+      </p:sp>
+      <p:sp>
+        <p:nvSpPr>
+          <p:cNvPr id="4" name="">
+            <a:extLst xmlns:a="http://schemas.openxmlformats.org/drawingml/2006/main">
+              <a:ext uri="{FF2B5EF4-FFF2-40B4-BE49-F238E27FC236}">
+                <a16:creationId xmlns:a16="http://schemas.microsoft.com/office/drawing/2014/main" id="{3B560F96-50B9-4A4D-8471-ADFD36758BF9}"/>
+              </a:ext>
+            </a:extLst>
+          </p:cNvPr>
+          <p:cNvSpPr>
+            <a:spLocks xmlns:a="http://schemas.openxmlformats.org/drawingml/2006/main" noGrp="1"/>
+          </p:cNvSpPr>
+          <p:nvPr/>
+        </p:nvSpPr>
+        <p:spPr>
+          <a:xfrm xmlns:a="http://schemas.openxmlformats.org/drawingml/2006/main">
+            <a:off x="742950" y="1428750"/>
+            <a:ext cx="514350" cy="514350"/>
+          </a:xfrm>
+          <a:prstGeom xmlns:a="http://schemas.openxmlformats.org/drawingml/2006/main" prst="roundRect">
+            <a:avLst>
+              <a:gd name="adj" fmla="val 22222"/>
+            </a:avLst>
+          </a:prstGeom>
+          <a:solidFill xmlns:a="http://schemas.openxmlformats.org/drawingml/2006/main">
+            <a:srgbClr val="EEEAFE"/>
+          </a:solidFill>
+          <a:ln xmlns:a="http://schemas.openxmlformats.org/drawingml/2006/main" w="0">
+            <a:noFill/>
+            <a:prstDash val="solid"/>
+          </a:ln>
+        </p:spPr>
+      </p:sp>
+      <p:sp>
+        <p:nvSpPr>
+          <p:cNvPr id="5" name="">
+            <a:extLst xmlns:a="http://schemas.openxmlformats.org/drawingml/2006/main">
+              <a:ext uri="{FF2B5EF4-FFF2-40B4-BE49-F238E27FC236}">
+                <a16:creationId xmlns:a16="http://schemas.microsoft.com/office/drawing/2014/main" id="{AEF4B015-FC76-45EA-82FC-2DBC867A8BD8}"/>
+              </a:ext>
+            </a:extLst>
+          </p:cNvPr>
+          <p:cNvSpPr>
+            <a:spLocks xmlns:a="http://schemas.openxmlformats.org/drawingml/2006/main" noGrp="1"/>
+          </p:cNvSpPr>
+          <p:nvPr/>
+        </p:nvSpPr>
+        <p:spPr>
+          <a:xfrm xmlns:a="http://schemas.openxmlformats.org/drawingml/2006/main">
+            <a:off x="742950" y="1524000"/>
+            <a:ext cx="514350" cy="304800"/>
+          </a:xfrm>
+          <a:prstGeom xmlns:a="http://schemas.openxmlformats.org/drawingml/2006/main" prst="rect">
+            <a:avLst/>
+          </a:prstGeom>
+          <a:noFill xmlns:a="http://schemas.openxmlformats.org/drawingml/2006/main"/>
+          <a:ln xmlns:a="http://schemas.openxmlformats.org/drawingml/2006/main" w="0">
+            <a:noFill/>
+            <a:prstDash val="solid"/>
+          </a:ln>
+        </p:spPr>
+        <p:txBody>
+          <a:bodyPr xmlns:a="http://schemas.openxmlformats.org/drawingml/2006/main"/>
+          <a:lstStyle xmlns:a="http://schemas.openxmlformats.org/drawingml/2006/main"/>
+          <a:p xmlns:a="http://schemas.openxmlformats.org/drawingml/2006/main">
+            <a:pPr algn="ctr">
+              <a:defRPr sz="1500" b="1">
+                <a:solidFill>
+                  <a:srgbClr val="57C7A5"/>
+                </a:solidFill>
+              </a:defRPr>
+            </a:pPr>
+            <a:r>
+              <a:rPr sz="1500" b="1">
+                <a:solidFill>
+                  <a:srgbClr val="57C7A5"/>
+                </a:solidFill>
+              </a:rPr>
+              <a:t>1</a:t>
+            </a:r>
+          </a:p>
+        </p:txBody>
+      </p:sp>
+      <p:sp>
+        <p:nvSpPr>
+          <p:cNvPr id="6" name="">
+            <a:extLst xmlns:a="http://schemas.openxmlformats.org/drawingml/2006/main">
+              <a:ext uri="{FF2B5EF4-FFF2-40B4-BE49-F238E27FC236}">
+                <a16:creationId xmlns:a16="http://schemas.microsoft.com/office/drawing/2014/main" id="{21994CBE-322B-4439-AF1B-6B00B0554E11}"/>
+              </a:ext>
+            </a:extLst>
+          </p:cNvPr>
+          <p:cNvSpPr>
+            <a:spLocks xmlns:a="http://schemas.openxmlformats.org/drawingml/2006/main" noGrp="1"/>
+          </p:cNvSpPr>
+          <p:nvPr/>
+        </p:nvSpPr>
+        <p:spPr>
+          <a:xfrm xmlns:a="http://schemas.openxmlformats.org/drawingml/2006/main">
+            <a:off x="1485900" y="1466850"/>
+            <a:ext cx="9239250" cy="619125"/>
+          </a:xfrm>
+          <a:prstGeom xmlns:a="http://schemas.openxmlformats.org/drawingml/2006/main" prst="rect">
+            <a:avLst/>
+          </a:prstGeom>
+          <a:noFill xmlns:a="http://schemas.openxmlformats.org/drawingml/2006/main"/>
+          <a:ln xmlns:a="http://schemas.openxmlformats.org/drawingml/2006/main" w="0">
+            <a:noFill/>
+            <a:prstDash val="solid"/>
+          </a:ln>
+        </p:spPr>
+        <p:txBody>
+          <a:bodyPr xmlns:a="http://schemas.openxmlformats.org/drawingml/2006/main"/>
+          <a:lstStyle xmlns:a="http://schemas.openxmlformats.org/drawingml/2006/main"/>
+          <a:p xmlns:a="http://schemas.openxmlformats.org/drawingml/2006/main">
+            <a:pPr>
+              <a:defRPr sz="1800">
+                <a:solidFill>
+                  <a:srgbClr val="182235"/>
+                </a:solidFill>
+              </a:defRPr>
+            </a:pPr>
+            <a:r>
+              <a:rPr sz="1800">
+                <a:solidFill>
+                  <a:srgbClr val="182235"/>
+                </a:solidFill>
+              </a:rPr>
+              <a:t>Node.js와 npm</a:t>
+            </a:r>
+          </a:p>
+        </p:txBody>
+      </p:sp>
+      <p:sp>
+        <p:nvSpPr>
+          <p:cNvPr id="7" name="">
+            <a:extLst xmlns:a="http://schemas.openxmlformats.org/drawingml/2006/main">
+              <a:ext uri="{FF2B5EF4-FFF2-40B4-BE49-F238E27FC236}">
+                <a16:creationId xmlns:a16="http://schemas.microsoft.com/office/drawing/2014/main" id="{D0793B6C-B687-44AC-B870-DA4ADF6BADC7}"/>
+              </a:ext>
+            </a:extLst>
+          </p:cNvPr>
+          <p:cNvSpPr>
+            <a:spLocks xmlns:a="http://schemas.openxmlformats.org/drawingml/2006/main" noGrp="1"/>
+          </p:cNvSpPr>
+          <p:nvPr/>
+        </p:nvSpPr>
+        <p:spPr>
+          <a:xfrm xmlns:a="http://schemas.openxmlformats.org/drawingml/2006/main">
+            <a:off x="742950" y="2400300"/>
+            <a:ext cx="514350" cy="514350"/>
+          </a:xfrm>
+          <a:prstGeom xmlns:a="http://schemas.openxmlformats.org/drawingml/2006/main" prst="roundRect">
+            <a:avLst>
+              <a:gd name="adj" fmla="val 22222"/>
+            </a:avLst>
+          </a:prstGeom>
+          <a:solidFill xmlns:a="http://schemas.openxmlformats.org/drawingml/2006/main">
+            <a:srgbClr val="EAF8F3"/>
+          </a:solidFill>
+          <a:ln xmlns:a="http://schemas.openxmlformats.org/drawingml/2006/main" w="0">
+            <a:noFill/>
+            <a:prstDash val="solid"/>
+          </a:ln>
+        </p:spPr>
+      </p:sp>
+      <p:sp>
+        <p:nvSpPr>
+          <p:cNvPr id="8" name="">
+            <a:extLst xmlns:a="http://schemas.openxmlformats.org/drawingml/2006/main">
+              <a:ext uri="{FF2B5EF4-FFF2-40B4-BE49-F238E27FC236}">
+                <a16:creationId xmlns:a16="http://schemas.microsoft.com/office/drawing/2014/main" id="{5FCB88C9-E0D7-482E-83B5-AA3B821E9FCC}"/>
+              </a:ext>
+            </a:extLst>
+          </p:cNvPr>
+          <p:cNvSpPr>
+            <a:spLocks xmlns:a="http://schemas.openxmlformats.org/drawingml/2006/main" noGrp="1"/>
+          </p:cNvSpPr>
+          <p:nvPr/>
+        </p:nvSpPr>
+        <p:spPr>
+          <a:xfrm xmlns:a="http://schemas.openxmlformats.org/drawingml/2006/main">
+            <a:off x="742950" y="2495550"/>
+            <a:ext cx="514350" cy="304800"/>
+          </a:xfrm>
+          <a:prstGeom xmlns:a="http://schemas.openxmlformats.org/drawingml/2006/main" prst="rect">
+            <a:avLst/>
+          </a:prstGeom>
+          <a:noFill xmlns:a="http://schemas.openxmlformats.org/drawingml/2006/main"/>
+          <a:ln xmlns:a="http://schemas.openxmlformats.org/drawingml/2006/main" w="0">
+            <a:noFill/>
+            <a:prstDash val="solid"/>
+          </a:ln>
+        </p:spPr>
+        <p:txBody>
+          <a:bodyPr xmlns:a="http://schemas.openxmlformats.org/drawingml/2006/main"/>
+          <a:lstStyle xmlns:a="http://schemas.openxmlformats.org/drawingml/2006/main"/>
+          <a:p xmlns:a="http://schemas.openxmlformats.org/drawingml/2006/main">
+            <a:pPr algn="ctr">
+              <a:defRPr sz="1500" b="1">
+                <a:solidFill>
+                  <a:srgbClr val="57C7A5"/>
+                </a:solidFill>
+              </a:defRPr>
+            </a:pPr>
+            <a:r>
+              <a:rPr sz="1500" b="1">
+                <a:solidFill>
+                  <a:srgbClr val="57C7A5"/>
+                </a:solidFill>
+              </a:rPr>
+              <a:t>2</a:t>
+            </a:r>
+          </a:p>
+        </p:txBody>
+      </p:sp>
+      <p:sp>
+        <p:nvSpPr>
+          <p:cNvPr id="9" name="">
+            <a:extLst xmlns:a="http://schemas.openxmlformats.org/drawingml/2006/main">
+              <a:ext uri="{FF2B5EF4-FFF2-40B4-BE49-F238E27FC236}">
+                <a16:creationId xmlns:a16="http://schemas.microsoft.com/office/drawing/2014/main" id="{A6505D8C-9093-4DC1-A2BA-3335559F1427}"/>
+              </a:ext>
+            </a:extLst>
+          </p:cNvPr>
+          <p:cNvSpPr>
+            <a:spLocks xmlns:a="http://schemas.openxmlformats.org/drawingml/2006/main" noGrp="1"/>
+          </p:cNvSpPr>
+          <p:nvPr/>
+        </p:nvSpPr>
+        <p:spPr>
+          <a:xfrm xmlns:a="http://schemas.openxmlformats.org/drawingml/2006/main">
+            <a:off x="1485900" y="2438400"/>
+            <a:ext cx="9239250" cy="619125"/>
+          </a:xfrm>
+          <a:prstGeom xmlns:a="http://schemas.openxmlformats.org/drawingml/2006/main" prst="rect">
+            <a:avLst/>
+          </a:prstGeom>
+          <a:noFill xmlns:a="http://schemas.openxmlformats.org/drawingml/2006/main"/>
+          <a:ln xmlns:a="http://schemas.openxmlformats.org/drawingml/2006/main" w="0">
+            <a:noFill/>
+            <a:prstDash val="solid"/>
+          </a:ln>
+        </p:spPr>
+        <p:txBody>
+          <a:bodyPr xmlns:a="http://schemas.openxmlformats.org/drawingml/2006/main"/>
+          <a:lstStyle xmlns:a="http://schemas.openxmlformats.org/drawingml/2006/main"/>
+          <a:p xmlns:a="http://schemas.openxmlformats.org/drawingml/2006/main">
+            <a:pPr>
+              <a:defRPr sz="1800">
+                <a:solidFill>
+                  <a:srgbClr val="182235"/>
+                </a:solidFill>
+              </a:defRPr>
+            </a:pPr>
+            <a:r>
+              <a:rPr sz="1800">
+                <a:solidFill>
+                  <a:srgbClr val="182235"/>
+                </a:solidFill>
+              </a:rPr>
+              <a:t>실행 가능한 React/Vite 프로젝트</a:t>
+            </a:r>
+          </a:p>
+        </p:txBody>
+      </p:sp>
+      <p:sp>
+        <p:nvSpPr>
+          <p:cNvPr id="10" name="">
+            <a:extLst xmlns:a="http://schemas.openxmlformats.org/drawingml/2006/main">
+              <a:ext uri="{FF2B5EF4-FFF2-40B4-BE49-F238E27FC236}">
+                <a16:creationId xmlns:a16="http://schemas.microsoft.com/office/drawing/2014/main" id="{1BDFDFA8-D837-48AD-8BAB-D31B7D298755}"/>
+              </a:ext>
+            </a:extLst>
+          </p:cNvPr>
+          <p:cNvSpPr>
+            <a:spLocks xmlns:a="http://schemas.openxmlformats.org/drawingml/2006/main" noGrp="1"/>
+          </p:cNvSpPr>
+          <p:nvPr/>
+        </p:nvSpPr>
+        <p:spPr>
+          <a:xfrm xmlns:a="http://schemas.openxmlformats.org/drawingml/2006/main">
+            <a:off x="742950" y="3371850"/>
+            <a:ext cx="514350" cy="514350"/>
+          </a:xfrm>
+          <a:prstGeom xmlns:a="http://schemas.openxmlformats.org/drawingml/2006/main" prst="roundRect">
+            <a:avLst>
+              <a:gd name="adj" fmla="val 22222"/>
+            </a:avLst>
+          </a:prstGeom>
+          <a:solidFill xmlns:a="http://schemas.openxmlformats.org/drawingml/2006/main">
+            <a:srgbClr val="EEEAFE"/>
+          </a:solidFill>
+          <a:ln xmlns:a="http://schemas.openxmlformats.org/drawingml/2006/main" w="0">
+            <a:noFill/>
+            <a:prstDash val="solid"/>
+          </a:ln>
+        </p:spPr>
+      </p:sp>
+      <p:sp>
+        <p:nvSpPr>
+          <p:cNvPr id="11" name="">
+            <a:extLst xmlns:a="http://schemas.openxmlformats.org/drawingml/2006/main">
+              <a:ext uri="{FF2B5EF4-FFF2-40B4-BE49-F238E27FC236}">
+                <a16:creationId xmlns:a16="http://schemas.microsoft.com/office/drawing/2014/main" id="{F1F15A37-9880-4700-AD31-045EC75A6549}"/>
+              </a:ext>
+            </a:extLst>
+          </p:cNvPr>
+          <p:cNvSpPr>
+            <a:spLocks xmlns:a="http://schemas.openxmlformats.org/drawingml/2006/main" noGrp="1"/>
+          </p:cNvSpPr>
+          <p:nvPr/>
+        </p:nvSpPr>
+        <p:spPr>
+          <a:xfrm xmlns:a="http://schemas.openxmlformats.org/drawingml/2006/main">
+            <a:off x="742950" y="3467100"/>
+            <a:ext cx="514350" cy="304800"/>
+          </a:xfrm>
+          <a:prstGeom xmlns:a="http://schemas.openxmlformats.org/drawingml/2006/main" prst="rect">
+            <a:avLst/>
+          </a:prstGeom>
+          <a:noFill xmlns:a="http://schemas.openxmlformats.org/drawingml/2006/main"/>
+          <a:ln xmlns:a="http://schemas.openxmlformats.org/drawingml/2006/main" w="0">
+            <a:noFill/>
+            <a:prstDash val="solid"/>
+          </a:ln>
+        </p:spPr>
+        <p:txBody>
+          <a:bodyPr xmlns:a="http://schemas.openxmlformats.org/drawingml/2006/main"/>
+          <a:lstStyle xmlns:a="http://schemas.openxmlformats.org/drawingml/2006/main"/>
+          <a:p xmlns:a="http://schemas.openxmlformats.org/drawingml/2006/main">
+            <a:pPr algn="ctr">
+              <a:defRPr sz="1500" b="1">
+                <a:solidFill>
+                  <a:srgbClr val="57C7A5"/>
+                </a:solidFill>
+              </a:defRPr>
+            </a:pPr>
+            <a:r>
+              <a:rPr sz="1500" b="1">
+                <a:solidFill>
+                  <a:srgbClr val="57C7A5"/>
+                </a:solidFill>
+              </a:rPr>
+              <a:t>3</a:t>
+            </a:r>
+          </a:p>
+        </p:txBody>
+      </p:sp>
+      <p:sp>
+        <p:nvSpPr>
+          <p:cNvPr id="12" name="">
+            <a:extLst xmlns:a="http://schemas.openxmlformats.org/drawingml/2006/main">
+              <a:ext uri="{FF2B5EF4-FFF2-40B4-BE49-F238E27FC236}">
+                <a16:creationId xmlns:a16="http://schemas.microsoft.com/office/drawing/2014/main" id="{0120443B-D277-452B-A612-D7A5D2197C11}"/>
+              </a:ext>
+            </a:extLst>
+          </p:cNvPr>
+          <p:cNvSpPr>
+            <a:spLocks xmlns:a="http://schemas.openxmlformats.org/drawingml/2006/main" noGrp="1"/>
+          </p:cNvSpPr>
+          <p:nvPr/>
+        </p:nvSpPr>
+        <p:spPr>
+          <a:xfrm xmlns:a="http://schemas.openxmlformats.org/drawingml/2006/main">
+            <a:off x="1485900" y="3409950"/>
+            <a:ext cx="9239250" cy="619125"/>
+          </a:xfrm>
+          <a:prstGeom xmlns:a="http://schemas.openxmlformats.org/drawingml/2006/main" prst="rect">
+            <a:avLst/>
+          </a:prstGeom>
+          <a:noFill xmlns:a="http://schemas.openxmlformats.org/drawingml/2006/main"/>
+          <a:ln xmlns:a="http://schemas.openxmlformats.org/drawingml/2006/main" w="0">
+            <a:noFill/>
+            <a:prstDash val="solid"/>
+          </a:ln>
+        </p:spPr>
+        <p:txBody>
+          <a:bodyPr xmlns:a="http://schemas.openxmlformats.org/drawingml/2006/main"/>
+          <a:lstStyle xmlns:a="http://schemas.openxmlformats.org/drawingml/2006/main"/>
+          <a:p xmlns:a="http://schemas.openxmlformats.org/drawingml/2006/main">
+            <a:pPr>
+              <a:defRPr sz="1800">
+                <a:solidFill>
+                  <a:srgbClr val="182235"/>
+                </a:solidFill>
+              </a:defRPr>
+            </a:pPr>
+            <a:r>
+              <a:rPr sz="1800">
+                <a:solidFill>
+                  <a:srgbClr val="182235"/>
+                </a:solidFill>
+              </a:rPr>
+              <a:t>브라우저 개발자 도구</a:t>
+            </a:r>
+          </a:p>
+        </p:txBody>
+      </p:sp>
+    </p:spTree>
+    <p:extLst>
+      <p:ext uri="{BB962C8B-B14F-4D97-AF65-F5344CB8AC3E}">
+        <p14:creationId xmlns:p14="http://schemas.microsoft.com/office/powerpoint/2010/main" val="2058956467"/>
+      </p:ext>
+    </p:extLst>
+  </p:cSld>
+</p:sld>
+</file>
+
+<file path=ppt/slides/slide11.xml><?xml version="1.0" encoding="utf-8"?>
+<p:sld xmlns:p="http://schemas.openxmlformats.org/presentationml/2006/main">
+  <p:cSld>
+    <p:bg>
+      <p:bgPr>
+        <a:solidFill xmlns:a="http://schemas.openxmlformats.org/drawingml/2006/main">
+          <a:srgbClr val="FFFCF8"/>
+        </a:solidFill>
+      </p:bgPr>
+    </p:bg>
+    <p:spTree>
+      <p:nvGrpSpPr>
+        <p:cNvPr id="1" name=""/>
+        <p:cNvGrpSpPr/>
+        <p:nvPr/>
+      </p:nvGrpSpPr>
+      <p:grpSpPr>
+        <a:xfrm xmlns:a="http://schemas.openxmlformats.org/drawingml/2006/main"/>
+      </p:grpSpPr>
+      <p:sp>
+        <p:nvSpPr>
+          <p:cNvPr id="10" name="">
+            <a:extLst xmlns:a="http://schemas.openxmlformats.org/drawingml/2006/main">
+              <a:ext uri="{FF2B5EF4-FFF2-40B4-BE49-F238E27FC236}">
+                <a16:creationId xmlns:a16="http://schemas.microsoft.com/office/drawing/2014/main" id="{F0E0ACB8-7C21-4E74-AA40-B0057BE6AEC9}"/>
+              </a:ext>
+            </a:extLst>
+          </p:cNvPr>
+          <p:cNvSpPr>
+            <a:spLocks xmlns:a="http://schemas.openxmlformats.org/drawingml/2006/main" noGrp="1"/>
+          </p:cNvSpPr>
+          <p:nvPr/>
+        </p:nvSpPr>
+        <p:spPr>
+          <a:xfrm xmlns:a="http://schemas.openxmlformats.org/drawingml/2006/main">
+            <a:off x="0" y="0"/>
+            <a:ext cx="171450" cy="6858000"/>
+          </a:xfrm>
+          <a:prstGeom xmlns:a="http://schemas.openxmlformats.org/drawingml/2006/main" prst="rect">
+            <a:avLst/>
+          </a:prstGeom>
+          <a:solidFill xmlns:a="http://schemas.openxmlformats.org/drawingml/2006/main">
+            <a:srgbClr val="6657E8"/>
+          </a:solidFill>
+          <a:ln xmlns:a="http://schemas.openxmlformats.org/drawingml/2006/main" w="0">
+            <a:noFill/>
+            <a:prstDash val="solid"/>
+          </a:ln>
+        </p:spPr>
+      </p:sp>
+      <p:sp>
+        <p:nvSpPr>
+          <p:cNvPr id="2" name="">
+            <a:extLst xmlns:a="http://schemas.openxmlformats.org/drawingml/2006/main">
+              <a:ext uri="{FF2B5EF4-FFF2-40B4-BE49-F238E27FC236}">
+                <a16:creationId xmlns:a16="http://schemas.microsoft.com/office/drawing/2014/main" id="{C368D5B4-078C-4DA5-A8EA-477CC3144F65}"/>
+              </a:ext>
+            </a:extLst>
+          </p:cNvPr>
+          <p:cNvSpPr>
+            <a:spLocks xmlns:a="http://schemas.openxmlformats.org/drawingml/2006/main" noGrp="1"/>
+          </p:cNvSpPr>
+          <p:nvPr/>
+        </p:nvSpPr>
+        <p:spPr>
+          <a:xfrm xmlns:a="http://schemas.openxmlformats.org/drawingml/2006/main">
+            <a:off x="647700" y="457200"/>
+            <a:ext cx="10096500" cy="552450"/>
+          </a:xfrm>
+          <a:prstGeom xmlns:a="http://schemas.openxmlformats.org/drawingml/2006/main" prst="rect">
+            <a:avLst/>
+          </a:prstGeom>
+          <a:noFill xmlns:a="http://schemas.openxmlformats.org/drawingml/2006/main"/>
+          <a:ln xmlns:a="http://schemas.openxmlformats.org/drawingml/2006/main" w="0">
+            <a:noFill/>
+            <a:prstDash val="solid"/>
+          </a:ln>
+        </p:spPr>
+        <p:txBody>
+          <a:bodyPr xmlns:a="http://schemas.openxmlformats.org/drawingml/2006/main"/>
+          <a:lstStyle xmlns:a="http://schemas.openxmlformats.org/drawingml/2006/main"/>
+          <a:p xmlns:a="http://schemas.openxmlformats.org/drawingml/2006/main">
+            <a:pPr>
+              <a:defRPr sz="2700" b="1">
+                <a:solidFill>
+                  <a:srgbClr val="182235"/>
+                </a:solidFill>
+              </a:defRPr>
+            </a:pPr>
+            <a:r>
+              <a:rPr sz="2700" b="1">
+                <a:solidFill>
+                  <a:srgbClr val="182235"/>
+                </a:solidFill>
+              </a:rPr>
+              <a:t>코드의 역할을 하나씩 연결해 보세요</a:t>
+            </a:r>
+          </a:p>
+        </p:txBody>
+      </p:sp>
+      <p:sp>
+        <p:nvSpPr>
+          <p:cNvPr id="3" name="">
+            <a:extLst xmlns:a="http://schemas.openxmlformats.org/drawingml/2006/main">
+              <a:ext uri="{FF2B5EF4-FFF2-40B4-BE49-F238E27FC236}">
+                <a16:creationId xmlns:a16="http://schemas.microsoft.com/office/drawing/2014/main" id="{69F0260A-AE4A-4693-8D36-7F9E748C651C}"/>
+              </a:ext>
+            </a:extLst>
+          </p:cNvPr>
+          <p:cNvSpPr>
+            <a:spLocks xmlns:a="http://schemas.openxmlformats.org/drawingml/2006/main" noGrp="1"/>
+          </p:cNvSpPr>
+          <p:nvPr/>
+        </p:nvSpPr>
+        <p:spPr>
+          <a:xfrm xmlns:a="http://schemas.openxmlformats.org/drawingml/2006/main">
+            <a:off x="666750" y="6419850"/>
+            <a:ext cx="10096500" cy="209550"/>
+          </a:xfrm>
+          <a:prstGeom xmlns:a="http://schemas.openxmlformats.org/drawingml/2006/main" prst="rect">
+            <a:avLst/>
+          </a:prstGeom>
+          <a:noFill xmlns:a="http://schemas.openxmlformats.org/drawingml/2006/main"/>
+          <a:ln xmlns:a="http://schemas.openxmlformats.org/drawingml/2006/main" w="0">
+            <a:noFill/>
+            <a:prstDash val="solid"/>
+          </a:ln>
+        </p:spPr>
+        <p:txBody>
+          <a:bodyPr xmlns:a="http://schemas.openxmlformats.org/drawingml/2006/main"/>
+          <a:lstStyle xmlns:a="http://schemas.openxmlformats.org/drawingml/2006/main"/>
+          <a:p xmlns:a="http://schemas.openxmlformats.org/drawingml/2006/main">
+            <a:pPr>
+              <a:defRPr sz="975">
+                <a:solidFill>
+                  <a:srgbClr val="657083"/>
+                </a:solidFill>
+              </a:defRPr>
+            </a:pPr>
+            <a:r>
+              <a:rPr sz="975">
+                <a:solidFill>
+                  <a:srgbClr val="657083"/>
+                </a:solidFill>
+              </a:rPr>
+              <a:t>EDU 웹개발 교육 플랫폼  ·  11</a:t>
+            </a:r>
+          </a:p>
+        </p:txBody>
+      </p:sp>
+      <p:sp>
+        <p:nvSpPr>
+          <p:cNvPr id="4" name="">
+            <a:extLst xmlns:a="http://schemas.openxmlformats.org/drawingml/2006/main">
+              <a:ext uri="{FF2B5EF4-FFF2-40B4-BE49-F238E27FC236}">
+                <a16:creationId xmlns:a16="http://schemas.microsoft.com/office/drawing/2014/main" id="{6DF276F0-2E94-4635-B65A-E3E0E6463837}"/>
+              </a:ext>
+            </a:extLst>
+          </p:cNvPr>
+          <p:cNvSpPr>
+            <a:spLocks xmlns:a="http://schemas.openxmlformats.org/drawingml/2006/main" noGrp="1"/>
+          </p:cNvSpPr>
+          <p:nvPr/>
+        </p:nvSpPr>
+        <p:spPr>
+          <a:xfrm xmlns:a="http://schemas.openxmlformats.org/drawingml/2006/main">
+            <a:off x="857250" y="1428750"/>
+            <a:ext cx="2381250" cy="400050"/>
+          </a:xfrm>
+          <a:prstGeom xmlns:a="http://schemas.openxmlformats.org/drawingml/2006/main" prst="rect">
+            <a:avLst/>
+          </a:prstGeom>
+          <a:noFill xmlns:a="http://schemas.openxmlformats.org/drawingml/2006/main"/>
+          <a:ln xmlns:a="http://schemas.openxmlformats.org/drawingml/2006/main" w="0">
+            <a:noFill/>
+            <a:prstDash val="solid"/>
+          </a:ln>
+        </p:spPr>
+        <p:txBody>
+          <a:bodyPr xmlns:a="http://schemas.openxmlformats.org/drawingml/2006/main"/>
+          <a:lstStyle xmlns:a="http://schemas.openxmlformats.org/drawingml/2006/main"/>
+          <a:p xmlns:a="http://schemas.openxmlformats.org/drawingml/2006/main">
+            <a:pPr>
+              <a:defRPr sz="1725" b="1">
+                <a:solidFill>
+                  <a:srgbClr val="6657E8"/>
+                </a:solidFill>
+              </a:defRPr>
+            </a:pPr>
+            <a:r>
+              <a:rPr sz="1725" b="1">
+                <a:solidFill>
+                  <a:srgbClr val="6657E8"/>
+                </a:solidFill>
+              </a:rPr>
+              <a:t>function LessonCard</a:t>
+            </a:r>
+          </a:p>
+        </p:txBody>
+      </p:sp>
+      <p:sp>
+        <p:nvSpPr>
+          <p:cNvPr id="5" name="">
+            <a:extLst xmlns:a="http://schemas.openxmlformats.org/drawingml/2006/main">
+              <a:ext uri="{FF2B5EF4-FFF2-40B4-BE49-F238E27FC236}">
+                <a16:creationId xmlns:a16="http://schemas.microsoft.com/office/drawing/2014/main" id="{072D2F03-47E1-4764-9E43-F6CBB9B1441C}"/>
+              </a:ext>
+            </a:extLst>
+          </p:cNvPr>
+          <p:cNvSpPr>
+            <a:spLocks xmlns:a="http://schemas.openxmlformats.org/drawingml/2006/main" noGrp="1"/>
+          </p:cNvSpPr>
+          <p:nvPr/>
+        </p:nvSpPr>
+        <p:spPr>
+          <a:xfrm xmlns:a="http://schemas.openxmlformats.org/drawingml/2006/main">
+            <a:off x="3429000" y="1428750"/>
+            <a:ext cx="7429500" cy="666750"/>
+          </a:xfrm>
+          <a:prstGeom xmlns:a="http://schemas.openxmlformats.org/drawingml/2006/main" prst="rect">
+            <a:avLst/>
+          </a:prstGeom>
+          <a:noFill xmlns:a="http://schemas.openxmlformats.org/drawingml/2006/main"/>
+          <a:ln xmlns:a="http://schemas.openxmlformats.org/drawingml/2006/main" w="0">
+            <a:noFill/>
+            <a:prstDash val="solid"/>
+          </a:ln>
+        </p:spPr>
+        <p:txBody>
+          <a:bodyPr xmlns:a="http://schemas.openxmlformats.org/drawingml/2006/main"/>
+          <a:lstStyle xmlns:a="http://schemas.openxmlformats.org/drawingml/2006/main"/>
+          <a:p xmlns:a="http://schemas.openxmlformats.org/drawingml/2006/main">
+            <a:pPr>
+              <a:defRPr sz="1650">
+                <a:solidFill>
+                  <a:srgbClr val="182235"/>
+                </a:solidFill>
+              </a:defRPr>
+            </a:pPr>
+            <a:r>
+              <a:rPr sz="1650">
+                <a:solidFill>
+                  <a:srgbClr val="182235"/>
+                </a:solidFill>
+              </a:rPr>
+              <a:t>반복해서 사용할 카드 부품을 선언합니다.</a:t>
+            </a:r>
+          </a:p>
+        </p:txBody>
+      </p:sp>
+      <p:sp>
+        <p:nvSpPr>
+          <p:cNvPr id="6" name="">
+            <a:extLst xmlns:a="http://schemas.openxmlformats.org/drawingml/2006/main">
+              <a:ext uri="{FF2B5EF4-FFF2-40B4-BE49-F238E27FC236}">
+                <a16:creationId xmlns:a16="http://schemas.microsoft.com/office/drawing/2014/main" id="{3AFA6B40-1391-4BBF-8646-C949D540B41D}"/>
+              </a:ext>
+            </a:extLst>
+          </p:cNvPr>
+          <p:cNvSpPr>
+            <a:spLocks xmlns:a="http://schemas.openxmlformats.org/drawingml/2006/main" noGrp="1"/>
+          </p:cNvSpPr>
+          <p:nvPr/>
+        </p:nvSpPr>
+        <p:spPr>
+          <a:xfrm xmlns:a="http://schemas.openxmlformats.org/drawingml/2006/main">
+            <a:off x="857250" y="2524125"/>
+            <a:ext cx="2381250" cy="400050"/>
+          </a:xfrm>
+          <a:prstGeom xmlns:a="http://schemas.openxmlformats.org/drawingml/2006/main" prst="rect">
+            <a:avLst/>
+          </a:prstGeom>
+          <a:noFill xmlns:a="http://schemas.openxmlformats.org/drawingml/2006/main"/>
+          <a:ln xmlns:a="http://schemas.openxmlformats.org/drawingml/2006/main" w="0">
+            <a:noFill/>
+            <a:prstDash val="solid"/>
+          </a:ln>
+        </p:spPr>
+        <p:txBody>
+          <a:bodyPr xmlns:a="http://schemas.openxmlformats.org/drawingml/2006/main"/>
+          <a:lstStyle xmlns:a="http://schemas.openxmlformats.org/drawingml/2006/main"/>
+          <a:p xmlns:a="http://schemas.openxmlformats.org/drawingml/2006/main">
+            <a:pPr>
+              <a:defRPr sz="1725" b="1">
+                <a:solidFill>
+                  <a:srgbClr val="6657E8"/>
+                </a:solidFill>
+              </a:defRPr>
+            </a:pPr>
+            <a:r>
+              <a:rPr sz="1725" b="1">
+                <a:solidFill>
+                  <a:srgbClr val="6657E8"/>
+                </a:solidFill>
+              </a:rPr>
+              <a:t>props</a:t>
+            </a:r>
+          </a:p>
+        </p:txBody>
+      </p:sp>
+      <p:sp>
+        <p:nvSpPr>
+          <p:cNvPr id="7" name="">
+            <a:extLst xmlns:a="http://schemas.openxmlformats.org/drawingml/2006/main">
+              <a:ext uri="{FF2B5EF4-FFF2-40B4-BE49-F238E27FC236}">
+                <a16:creationId xmlns:a16="http://schemas.microsoft.com/office/drawing/2014/main" id="{738D2F24-5055-4D3A-8B02-CD51774A53CD}"/>
+              </a:ext>
+            </a:extLst>
+          </p:cNvPr>
+          <p:cNvSpPr>
+            <a:spLocks xmlns:a="http://schemas.openxmlformats.org/drawingml/2006/main" noGrp="1"/>
+          </p:cNvSpPr>
+          <p:nvPr/>
+        </p:nvSpPr>
+        <p:spPr>
+          <a:xfrm xmlns:a="http://schemas.openxmlformats.org/drawingml/2006/main">
+            <a:off x="3429000" y="2524125"/>
+            <a:ext cx="7429500" cy="666750"/>
+          </a:xfrm>
+          <a:prstGeom xmlns:a="http://schemas.openxmlformats.org/drawingml/2006/main" prst="rect">
+            <a:avLst/>
+          </a:prstGeom>
+          <a:noFill xmlns:a="http://schemas.openxmlformats.org/drawingml/2006/main"/>
+          <a:ln xmlns:a="http://schemas.openxmlformats.org/drawingml/2006/main" w="0">
+            <a:noFill/>
+            <a:prstDash val="solid"/>
+          </a:ln>
+        </p:spPr>
+        <p:txBody>
+          <a:bodyPr xmlns:a="http://schemas.openxmlformats.org/drawingml/2006/main"/>
+          <a:lstStyle xmlns:a="http://schemas.openxmlformats.org/drawingml/2006/main"/>
+          <a:p xmlns:a="http://schemas.openxmlformats.org/drawingml/2006/main">
+            <a:pPr>
+              <a:defRPr sz="1650">
+                <a:solidFill>
+                  <a:srgbClr val="182235"/>
+                </a:solidFill>
+              </a:defRPr>
+            </a:pPr>
+            <a:r>
+              <a:rPr sz="1650">
+                <a:solidFill>
+                  <a:srgbClr val="182235"/>
+                </a:solidFill>
+              </a:rPr>
+              <a:t>부품마다 달라질 제목과 설명을 전달합니다.</a:t>
+            </a:r>
+          </a:p>
+        </p:txBody>
+      </p:sp>
+      <p:sp>
+        <p:nvSpPr>
+          <p:cNvPr id="8" name="">
+            <a:extLst xmlns:a="http://schemas.openxmlformats.org/drawingml/2006/main">
+              <a:ext uri="{FF2B5EF4-FFF2-40B4-BE49-F238E27FC236}">
+                <a16:creationId xmlns:a16="http://schemas.microsoft.com/office/drawing/2014/main" id="{4E13B07D-03DE-495A-80EA-3463DAB7B8A9}"/>
+              </a:ext>
+            </a:extLst>
+          </p:cNvPr>
+          <p:cNvSpPr>
+            <a:spLocks xmlns:a="http://schemas.openxmlformats.org/drawingml/2006/main" noGrp="1"/>
+          </p:cNvSpPr>
+          <p:nvPr/>
+        </p:nvSpPr>
+        <p:spPr>
+          <a:xfrm xmlns:a="http://schemas.openxmlformats.org/drawingml/2006/main">
+            <a:off x="857250" y="3619500"/>
+            <a:ext cx="2381250" cy="400050"/>
+          </a:xfrm>
+          <a:prstGeom xmlns:a="http://schemas.openxmlformats.org/drawingml/2006/main" prst="rect">
+            <a:avLst/>
+          </a:prstGeom>
+          <a:noFill xmlns:a="http://schemas.openxmlformats.org/drawingml/2006/main"/>
+          <a:ln xmlns:a="http://schemas.openxmlformats.org/drawingml/2006/main" w="0">
+            <a:noFill/>
+            <a:prstDash val="solid"/>
+          </a:ln>
+        </p:spPr>
+        <p:txBody>
+          <a:bodyPr xmlns:a="http://schemas.openxmlformats.org/drawingml/2006/main"/>
+          <a:lstStyle xmlns:a="http://schemas.openxmlformats.org/drawingml/2006/main"/>
+          <a:p xmlns:a="http://schemas.openxmlformats.org/drawingml/2006/main">
+            <a:pPr>
+              <a:defRPr sz="1725" b="1">
+                <a:solidFill>
+                  <a:srgbClr val="6657E8"/>
+                </a:solidFill>
+              </a:defRPr>
+            </a:pPr>
+            <a:r>
+              <a:rPr sz="1725" b="1">
+                <a:solidFill>
+                  <a:srgbClr val="6657E8"/>
+                </a:solidFill>
+              </a:rPr>
+              <a:t>return</a:t>
+            </a:r>
+          </a:p>
+        </p:txBody>
+      </p:sp>
+      <p:sp>
+        <p:nvSpPr>
+          <p:cNvPr id="9" name="">
+            <a:extLst xmlns:a="http://schemas.openxmlformats.org/drawingml/2006/main">
+              <a:ext uri="{FF2B5EF4-FFF2-40B4-BE49-F238E27FC236}">
+                <a16:creationId xmlns:a16="http://schemas.microsoft.com/office/drawing/2014/main" id="{DEE8BAB8-DBCE-448F-852E-A50BEB29C730}"/>
+              </a:ext>
+            </a:extLst>
+          </p:cNvPr>
+          <p:cNvSpPr>
+            <a:spLocks xmlns:a="http://schemas.openxmlformats.org/drawingml/2006/main" noGrp="1"/>
+          </p:cNvSpPr>
+          <p:nvPr/>
+        </p:nvSpPr>
+        <p:spPr>
+          <a:xfrm xmlns:a="http://schemas.openxmlformats.org/drawingml/2006/main">
+            <a:off x="3429000" y="3619500"/>
+            <a:ext cx="7429500" cy="666750"/>
+          </a:xfrm>
+          <a:prstGeom xmlns:a="http://schemas.openxmlformats.org/drawingml/2006/main" prst="rect">
+            <a:avLst/>
+          </a:prstGeom>
+          <a:noFill xmlns:a="http://schemas.openxmlformats.org/drawingml/2006/main"/>
+          <a:ln xmlns:a="http://schemas.openxmlformats.org/drawingml/2006/main" w="0">
+            <a:noFill/>
+            <a:prstDash val="solid"/>
+          </a:ln>
+        </p:spPr>
+        <p:txBody>
+          <a:bodyPr xmlns:a="http://schemas.openxmlformats.org/drawingml/2006/main"/>
+          <a:lstStyle xmlns:a="http://schemas.openxmlformats.org/drawingml/2006/main"/>
+          <a:p xmlns:a="http://schemas.openxmlformats.org/drawingml/2006/main">
+            <a:pPr>
+              <a:defRPr sz="1650">
+                <a:solidFill>
+                  <a:srgbClr val="182235"/>
+                </a:solidFill>
+              </a:defRPr>
+            </a:pPr>
+            <a:r>
+              <a:rPr sz="1650">
+                <a:solidFill>
+                  <a:srgbClr val="182235"/>
+                </a:solidFill>
+              </a:rPr>
+              <a:t>화면에 그릴 JSX 구조를 돌려줍니다.</a:t>
+            </a:r>
+          </a:p>
+        </p:txBody>
+      </p:sp>
+    </p:spTree>
+    <p:extLst>
+      <p:ext uri="{BB962C8B-B14F-4D97-AF65-F5344CB8AC3E}">
+        <p14:creationId xmlns:p14="http://schemas.microsoft.com/office/powerpoint/2010/main" val="1804956105"/>
+      </p:ext>
+    </p:extLst>
+  </p:cSld>
+</p:sld>
+</file>
+
+<file path=ppt/slides/slide12.xml><?xml version="1.0" encoding="utf-8"?>
+<p:sld xmlns:p="http://schemas.openxmlformats.org/presentationml/2006/main">
+  <p:cSld>
+    <p:bg>
+      <p:bgPr>
+        <a:solidFill xmlns:a="http://schemas.openxmlformats.org/drawingml/2006/main">
+          <a:srgbClr val="FFFCF8"/>
+        </a:solidFill>
+      </p:bgPr>
+    </p:bg>
+    <p:spTree>
+      <p:nvGrpSpPr>
+        <p:cNvPr id="1" name=""/>
+        <p:cNvGrpSpPr/>
+        <p:nvPr/>
+      </p:nvGrpSpPr>
+      <p:grpSpPr>
+        <a:xfrm xmlns:a="http://schemas.openxmlformats.org/drawingml/2006/main"/>
+      </p:grpSpPr>
+      <p:sp>
+        <p:nvSpPr>
+          <p:cNvPr id="13" name="">
+            <a:extLst xmlns:a="http://schemas.openxmlformats.org/drawingml/2006/main">
+              <a:ext uri="{FF2B5EF4-FFF2-40B4-BE49-F238E27FC236}">
+                <a16:creationId xmlns:a16="http://schemas.microsoft.com/office/drawing/2014/main" id="{6305311D-655E-404F-9AED-5D9A9065939F}"/>
+              </a:ext>
+            </a:extLst>
+          </p:cNvPr>
+          <p:cNvSpPr>
+            <a:spLocks xmlns:a="http://schemas.openxmlformats.org/drawingml/2006/main" noGrp="1"/>
+          </p:cNvSpPr>
+          <p:nvPr/>
+        </p:nvSpPr>
+        <p:spPr>
+          <a:xfrm xmlns:a="http://schemas.openxmlformats.org/drawingml/2006/main">
+            <a:off x="0" y="0"/>
+            <a:ext cx="171450" cy="6858000"/>
+          </a:xfrm>
+          <a:prstGeom xmlns:a="http://schemas.openxmlformats.org/drawingml/2006/main" prst="rect">
+            <a:avLst/>
+          </a:prstGeom>
+          <a:solidFill xmlns:a="http://schemas.openxmlformats.org/drawingml/2006/main">
+            <a:srgbClr val="6657E8"/>
+          </a:solidFill>
+          <a:ln xmlns:a="http://schemas.openxmlformats.org/drawingml/2006/main" w="0">
+            <a:noFill/>
+            <a:prstDash val="solid"/>
+          </a:ln>
+        </p:spPr>
+      </p:sp>
+      <p:sp>
+        <p:nvSpPr>
+          <p:cNvPr id="2" name="">
+            <a:extLst xmlns:a="http://schemas.openxmlformats.org/drawingml/2006/main">
+              <a:ext uri="{FF2B5EF4-FFF2-40B4-BE49-F238E27FC236}">
+                <a16:creationId xmlns:a16="http://schemas.microsoft.com/office/drawing/2014/main" id="{ED1CE480-E58C-4E8A-B478-1B67630302FD}"/>
+              </a:ext>
+            </a:extLst>
+          </p:cNvPr>
+          <p:cNvSpPr>
+            <a:spLocks xmlns:a="http://schemas.openxmlformats.org/drawingml/2006/main" noGrp="1"/>
+          </p:cNvSpPr>
+          <p:nvPr/>
+        </p:nvSpPr>
+        <p:spPr>
+          <a:xfrm xmlns:a="http://schemas.openxmlformats.org/drawingml/2006/main">
+            <a:off x="647700" y="457200"/>
+            <a:ext cx="10096500" cy="552450"/>
+          </a:xfrm>
+          <a:prstGeom xmlns:a="http://schemas.openxmlformats.org/drawingml/2006/main" prst="rect">
+            <a:avLst/>
+          </a:prstGeom>
+          <a:noFill xmlns:a="http://schemas.openxmlformats.org/drawingml/2006/main"/>
+          <a:ln xmlns:a="http://schemas.openxmlformats.org/drawingml/2006/main" w="0">
+            <a:noFill/>
+            <a:prstDash val="solid"/>
+          </a:ln>
+        </p:spPr>
+        <p:txBody>
+          <a:bodyPr xmlns:a="http://schemas.openxmlformats.org/drawingml/2006/main"/>
+          <a:lstStyle xmlns:a="http://schemas.openxmlformats.org/drawingml/2006/main"/>
+          <a:p xmlns:a="http://schemas.openxmlformats.org/drawingml/2006/main">
+            <a:pPr>
+              <a:defRPr sz="2700" b="1">
+                <a:solidFill>
+                  <a:srgbClr val="182235"/>
+                </a:solidFill>
+              </a:defRPr>
+            </a:pPr>
+            <a:r>
+              <a:rPr sz="2700" b="1">
+                <a:solidFill>
+                  <a:srgbClr val="182235"/>
+                </a:solidFill>
+              </a:rPr>
+              <a:t>오류는 첫 문장부터 차례로 해결합니다</a:t>
+            </a:r>
+          </a:p>
+        </p:txBody>
+      </p:sp>
+      <p:sp>
+        <p:nvSpPr>
+          <p:cNvPr id="3" name="">
+            <a:extLst xmlns:a="http://schemas.openxmlformats.org/drawingml/2006/main">
+              <a:ext uri="{FF2B5EF4-FFF2-40B4-BE49-F238E27FC236}">
+                <a16:creationId xmlns:a16="http://schemas.microsoft.com/office/drawing/2014/main" id="{13D5DCD5-6882-4B6F-87A4-C8A5E9681686}"/>
+              </a:ext>
+            </a:extLst>
+          </p:cNvPr>
+          <p:cNvSpPr>
+            <a:spLocks xmlns:a="http://schemas.openxmlformats.org/drawingml/2006/main" noGrp="1"/>
+          </p:cNvSpPr>
+          <p:nvPr/>
+        </p:nvSpPr>
+        <p:spPr>
+          <a:xfrm xmlns:a="http://schemas.openxmlformats.org/drawingml/2006/main">
+            <a:off x="666750" y="6419850"/>
+            <a:ext cx="10096500" cy="209550"/>
+          </a:xfrm>
+          <a:prstGeom xmlns:a="http://schemas.openxmlformats.org/drawingml/2006/main" prst="rect">
+            <a:avLst/>
+          </a:prstGeom>
+          <a:noFill xmlns:a="http://schemas.openxmlformats.org/drawingml/2006/main"/>
+          <a:ln xmlns:a="http://schemas.openxmlformats.org/drawingml/2006/main" w="0">
+            <a:noFill/>
+            <a:prstDash val="solid"/>
+          </a:ln>
+        </p:spPr>
+        <p:txBody>
+          <a:bodyPr xmlns:a="http://schemas.openxmlformats.org/drawingml/2006/main"/>
+          <a:lstStyle xmlns:a="http://schemas.openxmlformats.org/drawingml/2006/main"/>
+          <a:p xmlns:a="http://schemas.openxmlformats.org/drawingml/2006/main">
+            <a:pPr>
+              <a:defRPr sz="975">
+                <a:solidFill>
+                  <a:srgbClr val="657083"/>
+                </a:solidFill>
+              </a:defRPr>
+            </a:pPr>
+            <a:r>
+              <a:rPr sz="975">
+                <a:solidFill>
+                  <a:srgbClr val="657083"/>
+                </a:solidFill>
+              </a:rPr>
+              <a:t>EDU 웹개발 교육 플랫폼  ·  12</a:t>
+            </a:r>
+          </a:p>
+        </p:txBody>
+      </p:sp>
+      <p:sp>
+        <p:nvSpPr>
+          <p:cNvPr id="4" name="">
+            <a:extLst xmlns:a="http://schemas.openxmlformats.org/drawingml/2006/main">
+              <a:ext uri="{FF2B5EF4-FFF2-40B4-BE49-F238E27FC236}">
+                <a16:creationId xmlns:a16="http://schemas.microsoft.com/office/drawing/2014/main" id="{02323EA5-DCD2-44DD-92B2-79904AEB6AF5}"/>
+              </a:ext>
+            </a:extLst>
+          </p:cNvPr>
+          <p:cNvSpPr>
+            <a:spLocks xmlns:a="http://schemas.openxmlformats.org/drawingml/2006/main" noGrp="1"/>
+          </p:cNvSpPr>
+          <p:nvPr/>
+        </p:nvSpPr>
+        <p:spPr>
+          <a:xfrm xmlns:a="http://schemas.openxmlformats.org/drawingml/2006/main">
+            <a:off x="723900" y="1333500"/>
+            <a:ext cx="10744200" cy="1123950"/>
+          </a:xfrm>
+          <a:prstGeom xmlns:a="http://schemas.openxmlformats.org/drawingml/2006/main" prst="roundRect">
+            <a:avLst>
+              <a:gd name="adj" fmla="val 10169"/>
+            </a:avLst>
+          </a:prstGeom>
+          <a:solidFill xmlns:a="http://schemas.openxmlformats.org/drawingml/2006/main">
+            <a:srgbClr val="FFF0ED"/>
+          </a:solidFill>
+          <a:ln xmlns:a="http://schemas.openxmlformats.org/drawingml/2006/main" w="0">
+            <a:noFill/>
+            <a:prstDash val="solid"/>
+          </a:ln>
+        </p:spPr>
+      </p:sp>
+      <p:sp>
+        <p:nvSpPr>
+          <p:cNvPr id="5" name="">
+            <a:extLst xmlns:a="http://schemas.openxmlformats.org/drawingml/2006/main">
+              <a:ext uri="{FF2B5EF4-FFF2-40B4-BE49-F238E27FC236}">
+                <a16:creationId xmlns:a16="http://schemas.microsoft.com/office/drawing/2014/main" id="{452803FB-E1EB-47F6-9D26-5CFA2414E12D}"/>
+              </a:ext>
+            </a:extLst>
+          </p:cNvPr>
+          <p:cNvSpPr>
+            <a:spLocks xmlns:a="http://schemas.openxmlformats.org/drawingml/2006/main" noGrp="1"/>
+          </p:cNvSpPr>
+          <p:nvPr/>
+        </p:nvSpPr>
+        <p:spPr>
+          <a:xfrm xmlns:a="http://schemas.openxmlformats.org/drawingml/2006/main">
+            <a:off x="1000125" y="1562100"/>
+            <a:ext cx="2857500" cy="361950"/>
+          </a:xfrm>
+          <a:prstGeom xmlns:a="http://schemas.openxmlformats.org/drawingml/2006/main" prst="rect">
+            <a:avLst/>
+          </a:prstGeom>
+          <a:noFill xmlns:a="http://schemas.openxmlformats.org/drawingml/2006/main"/>
+          <a:ln xmlns:a="http://schemas.openxmlformats.org/drawingml/2006/main" w="0">
+            <a:noFill/>
+            <a:prstDash val="solid"/>
+          </a:ln>
+        </p:spPr>
+        <p:txBody>
+          <a:bodyPr xmlns:a="http://schemas.openxmlformats.org/drawingml/2006/main"/>
+          <a:lstStyle xmlns:a="http://schemas.openxmlformats.org/drawingml/2006/main"/>
+          <a:p xmlns:a="http://schemas.openxmlformats.org/drawingml/2006/main">
+            <a:pPr>
+              <a:defRPr sz="1650" b="1">
+                <a:solidFill>
+                  <a:srgbClr val="A8493B"/>
+                </a:solidFill>
+              </a:defRPr>
+            </a:pPr>
+            <a:r>
+              <a:rPr sz="1650" b="1">
+                <a:solidFill>
+                  <a:srgbClr val="A8493B"/>
+                </a:solidFill>
+              </a:rPr>
+              <a:t>화면이 백지예요</a:t>
+            </a:r>
+          </a:p>
+        </p:txBody>
+      </p:sp>
+      <p:sp>
+        <p:nvSpPr>
+          <p:cNvPr id="6" name="">
+            <a:extLst xmlns:a="http://schemas.openxmlformats.org/drawingml/2006/main">
+              <a:ext uri="{FF2B5EF4-FFF2-40B4-BE49-F238E27FC236}">
+                <a16:creationId xmlns:a16="http://schemas.microsoft.com/office/drawing/2014/main" id="{4E9D87E1-49B3-45F7-9A94-6332720F7FE2}"/>
+              </a:ext>
+            </a:extLst>
+          </p:cNvPr>
+          <p:cNvSpPr>
+            <a:spLocks xmlns:a="http://schemas.openxmlformats.org/drawingml/2006/main" noGrp="1"/>
+          </p:cNvSpPr>
+          <p:nvPr/>
+        </p:nvSpPr>
+        <p:spPr>
+          <a:xfrm xmlns:a="http://schemas.openxmlformats.org/drawingml/2006/main">
+            <a:off x="4000500" y="1495425"/>
+            <a:ext cx="6953250" cy="619125"/>
+          </a:xfrm>
+          <a:prstGeom xmlns:a="http://schemas.openxmlformats.org/drawingml/2006/main" prst="rect">
+            <a:avLst/>
+          </a:prstGeom>
+          <a:noFill xmlns:a="http://schemas.openxmlformats.org/drawingml/2006/main"/>
+          <a:ln xmlns:a="http://schemas.openxmlformats.org/drawingml/2006/main" w="0">
+            <a:noFill/>
+            <a:prstDash val="solid"/>
+          </a:ln>
+        </p:spPr>
+        <p:txBody>
+          <a:bodyPr xmlns:a="http://schemas.openxmlformats.org/drawingml/2006/main"/>
+          <a:lstStyle xmlns:a="http://schemas.openxmlformats.org/drawingml/2006/main"/>
+          <a:p xmlns:a="http://schemas.openxmlformats.org/drawingml/2006/main">
+            <a:pPr>
+              <a:defRPr sz="1575">
+                <a:solidFill>
+                  <a:srgbClr val="182235"/>
+                </a:solidFill>
+              </a:defRPr>
+            </a:pPr>
+            <a:r>
+              <a:rPr sz="1575">
+                <a:solidFill>
+                  <a:srgbClr val="182235"/>
+                </a:solidFill>
+              </a:rPr>
+              <a:t>터미널과 브라우저 콘솔의 첫 오류를 확인합니다.</a:t>
+            </a:r>
+          </a:p>
+        </p:txBody>
+      </p:sp>
+      <p:sp>
+        <p:nvSpPr>
+          <p:cNvPr id="7" name="">
+            <a:extLst xmlns:a="http://schemas.openxmlformats.org/drawingml/2006/main">
+              <a:ext uri="{FF2B5EF4-FFF2-40B4-BE49-F238E27FC236}">
+                <a16:creationId xmlns:a16="http://schemas.microsoft.com/office/drawing/2014/main" id="{B9794E03-53EF-4513-BDEC-4F62FE484313}"/>
+              </a:ext>
+            </a:extLst>
+          </p:cNvPr>
+          <p:cNvSpPr>
+            <a:spLocks xmlns:a="http://schemas.openxmlformats.org/drawingml/2006/main" noGrp="1"/>
+          </p:cNvSpPr>
+          <p:nvPr/>
+        </p:nvSpPr>
+        <p:spPr>
+          <a:xfrm xmlns:a="http://schemas.openxmlformats.org/drawingml/2006/main">
+            <a:off x="723900" y="2762250"/>
+            <a:ext cx="10744200" cy="1123950"/>
+          </a:xfrm>
+          <a:prstGeom xmlns:a="http://schemas.openxmlformats.org/drawingml/2006/main" prst="roundRect">
+            <a:avLst>
+              <a:gd name="adj" fmla="val 10169"/>
+            </a:avLst>
+          </a:prstGeom>
+          <a:solidFill xmlns:a="http://schemas.openxmlformats.org/drawingml/2006/main">
+            <a:srgbClr val="EAF8F3"/>
+          </a:solidFill>
+          <a:ln xmlns:a="http://schemas.openxmlformats.org/drawingml/2006/main" w="0">
+            <a:noFill/>
+            <a:prstDash val="solid"/>
+          </a:ln>
+        </p:spPr>
+      </p:sp>
+      <p:sp>
+        <p:nvSpPr>
+          <p:cNvPr id="8" name="">
+            <a:extLst xmlns:a="http://schemas.openxmlformats.org/drawingml/2006/main">
+              <a:ext uri="{FF2B5EF4-FFF2-40B4-BE49-F238E27FC236}">
+                <a16:creationId xmlns:a16="http://schemas.microsoft.com/office/drawing/2014/main" id="{5E6F3E8A-9EB8-48BB-8521-FC6CE89FFAA0}"/>
+              </a:ext>
+            </a:extLst>
+          </p:cNvPr>
+          <p:cNvSpPr>
+            <a:spLocks xmlns:a="http://schemas.openxmlformats.org/drawingml/2006/main" noGrp="1"/>
+          </p:cNvSpPr>
+          <p:nvPr/>
+        </p:nvSpPr>
+        <p:spPr>
+          <a:xfrm xmlns:a="http://schemas.openxmlformats.org/drawingml/2006/main">
+            <a:off x="1000125" y="2990850"/>
+            <a:ext cx="2857500" cy="361950"/>
+          </a:xfrm>
+          <a:prstGeom xmlns:a="http://schemas.openxmlformats.org/drawingml/2006/main" prst="rect">
+            <a:avLst/>
+          </a:prstGeom>
+          <a:noFill xmlns:a="http://schemas.openxmlformats.org/drawingml/2006/main"/>
+          <a:ln xmlns:a="http://schemas.openxmlformats.org/drawingml/2006/main" w="0">
+            <a:noFill/>
+            <a:prstDash val="solid"/>
+          </a:ln>
+        </p:spPr>
+        <p:txBody>
+          <a:bodyPr xmlns:a="http://schemas.openxmlformats.org/drawingml/2006/main"/>
+          <a:lstStyle xmlns:a="http://schemas.openxmlformats.org/drawingml/2006/main"/>
+          <a:p xmlns:a="http://schemas.openxmlformats.org/drawingml/2006/main">
+            <a:pPr>
+              <a:defRPr sz="1650" b="1">
+                <a:solidFill>
+                  <a:srgbClr val="26755F"/>
+                </a:solidFill>
+              </a:defRPr>
+            </a:pPr>
+            <a:r>
+              <a:rPr sz="1650" b="1">
+                <a:solidFill>
+                  <a:srgbClr val="26755F"/>
+                </a:solidFill>
+              </a:rPr>
+              <a:t>카드 제목이 안 보여요</a:t>
+            </a:r>
+          </a:p>
+        </p:txBody>
+      </p:sp>
+      <p:sp>
+        <p:nvSpPr>
+          <p:cNvPr id="9" name="">
+            <a:extLst xmlns:a="http://schemas.openxmlformats.org/drawingml/2006/main">
+              <a:ext uri="{FF2B5EF4-FFF2-40B4-BE49-F238E27FC236}">
+                <a16:creationId xmlns:a16="http://schemas.microsoft.com/office/drawing/2014/main" id="{608696BE-31C5-45A0-BF33-955ED27B4DE9}"/>
+              </a:ext>
+            </a:extLst>
+          </p:cNvPr>
+          <p:cNvSpPr>
+            <a:spLocks xmlns:a="http://schemas.openxmlformats.org/drawingml/2006/main" noGrp="1"/>
+          </p:cNvSpPr>
+          <p:nvPr/>
+        </p:nvSpPr>
+        <p:spPr>
+          <a:xfrm xmlns:a="http://schemas.openxmlformats.org/drawingml/2006/main">
+            <a:off x="4000500" y="2924175"/>
+            <a:ext cx="6953250" cy="619125"/>
+          </a:xfrm>
+          <a:prstGeom xmlns:a="http://schemas.openxmlformats.org/drawingml/2006/main" prst="rect">
+            <a:avLst/>
+          </a:prstGeom>
+          <a:noFill xmlns:a="http://schemas.openxmlformats.org/drawingml/2006/main"/>
+          <a:ln xmlns:a="http://schemas.openxmlformats.org/drawingml/2006/main" w="0">
+            <a:noFill/>
+            <a:prstDash val="solid"/>
+          </a:ln>
+        </p:spPr>
+        <p:txBody>
+          <a:bodyPr xmlns:a="http://schemas.openxmlformats.org/drawingml/2006/main"/>
+          <a:lstStyle xmlns:a="http://schemas.openxmlformats.org/drawingml/2006/main"/>
+          <a:p xmlns:a="http://schemas.openxmlformats.org/drawingml/2006/main">
+            <a:pPr>
+              <a:defRPr sz="1575">
+                <a:solidFill>
+                  <a:srgbClr val="182235"/>
+                </a:solidFill>
+              </a:defRPr>
+            </a:pPr>
+            <a:r>
+              <a:rPr sz="1575">
+                <a:solidFill>
+                  <a:srgbClr val="182235"/>
+                </a:solidFill>
+              </a:rPr>
+              <a:t>props 이름과 전달한 속성 이름이 같은지 봅니다.</a:t>
+            </a:r>
+          </a:p>
+        </p:txBody>
+      </p:sp>
+      <p:sp>
+        <p:nvSpPr>
+          <p:cNvPr id="10" name="">
+            <a:extLst xmlns:a="http://schemas.openxmlformats.org/drawingml/2006/main">
+              <a:ext uri="{FF2B5EF4-FFF2-40B4-BE49-F238E27FC236}">
+                <a16:creationId xmlns:a16="http://schemas.microsoft.com/office/drawing/2014/main" id="{D4411237-6EE8-43EB-B2A9-A85D7D7DA181}"/>
+              </a:ext>
+            </a:extLst>
+          </p:cNvPr>
+          <p:cNvSpPr>
+            <a:spLocks xmlns:a="http://schemas.openxmlformats.org/drawingml/2006/main" noGrp="1"/>
+          </p:cNvSpPr>
+          <p:nvPr/>
+        </p:nvSpPr>
+        <p:spPr>
+          <a:xfrm xmlns:a="http://schemas.openxmlformats.org/drawingml/2006/main">
+            <a:off x="723900" y="4191000"/>
+            <a:ext cx="10744200" cy="1123950"/>
+          </a:xfrm>
+          <a:prstGeom xmlns:a="http://schemas.openxmlformats.org/drawingml/2006/main" prst="roundRect">
+            <a:avLst>
+              <a:gd name="adj" fmla="val 10169"/>
+            </a:avLst>
+          </a:prstGeom>
+          <a:solidFill xmlns:a="http://schemas.openxmlformats.org/drawingml/2006/main">
+            <a:srgbClr val="FFF0ED"/>
+          </a:solidFill>
+          <a:ln xmlns:a="http://schemas.openxmlformats.org/drawingml/2006/main" w="0">
+            <a:noFill/>
+            <a:prstDash val="solid"/>
+          </a:ln>
+        </p:spPr>
+      </p:sp>
+      <p:sp>
+        <p:nvSpPr>
+          <p:cNvPr id="11" name="">
+            <a:extLst xmlns:a="http://schemas.openxmlformats.org/drawingml/2006/main">
+              <a:ext uri="{FF2B5EF4-FFF2-40B4-BE49-F238E27FC236}">
+                <a16:creationId xmlns:a16="http://schemas.microsoft.com/office/drawing/2014/main" id="{F209D087-16C3-416D-9138-A28CABBDFEC4}"/>
+              </a:ext>
+            </a:extLst>
+          </p:cNvPr>
+          <p:cNvSpPr>
+            <a:spLocks xmlns:a="http://schemas.openxmlformats.org/drawingml/2006/main" noGrp="1"/>
+          </p:cNvSpPr>
+          <p:nvPr/>
+        </p:nvSpPr>
+        <p:spPr>
+          <a:xfrm xmlns:a="http://schemas.openxmlformats.org/drawingml/2006/main">
+            <a:off x="1000125" y="4419600"/>
+            <a:ext cx="2857500" cy="361950"/>
+          </a:xfrm>
+          <a:prstGeom xmlns:a="http://schemas.openxmlformats.org/drawingml/2006/main" prst="rect">
+            <a:avLst/>
+          </a:prstGeom>
+          <a:noFill xmlns:a="http://schemas.openxmlformats.org/drawingml/2006/main"/>
+          <a:ln xmlns:a="http://schemas.openxmlformats.org/drawingml/2006/main" w="0">
+            <a:noFill/>
+            <a:prstDash val="solid"/>
+          </a:ln>
+        </p:spPr>
+        <p:txBody>
+          <a:bodyPr xmlns:a="http://schemas.openxmlformats.org/drawingml/2006/main"/>
+          <a:lstStyle xmlns:a="http://schemas.openxmlformats.org/drawingml/2006/main"/>
+          <a:p xmlns:a="http://schemas.openxmlformats.org/drawingml/2006/main">
+            <a:pPr>
+              <a:defRPr sz="1650" b="1">
+                <a:solidFill>
+                  <a:srgbClr val="A8493B"/>
+                </a:solidFill>
+              </a:defRPr>
+            </a:pPr>
+            <a:r>
+              <a:rPr sz="1650" b="1">
+                <a:solidFill>
+                  <a:srgbClr val="A8493B"/>
+                </a:solidFill>
+              </a:rPr>
+              <a:t>목록 경고가 나와요</a:t>
+            </a:r>
+          </a:p>
+        </p:txBody>
+      </p:sp>
+      <p:sp>
+        <p:nvSpPr>
+          <p:cNvPr id="12" name="">
+            <a:extLst xmlns:a="http://schemas.openxmlformats.org/drawingml/2006/main">
+              <a:ext uri="{FF2B5EF4-FFF2-40B4-BE49-F238E27FC236}">
+                <a16:creationId xmlns:a16="http://schemas.microsoft.com/office/drawing/2014/main" id="{EDFB862C-72BC-4186-8467-DFDF27D18BE2}"/>
+              </a:ext>
+            </a:extLst>
+          </p:cNvPr>
+          <p:cNvSpPr>
+            <a:spLocks xmlns:a="http://schemas.openxmlformats.org/drawingml/2006/main" noGrp="1"/>
+          </p:cNvSpPr>
+          <p:nvPr/>
+        </p:nvSpPr>
+        <p:spPr>
+          <a:xfrm xmlns:a="http://schemas.openxmlformats.org/drawingml/2006/main">
+            <a:off x="4000500" y="4352925"/>
+            <a:ext cx="6953250" cy="619125"/>
+          </a:xfrm>
+          <a:prstGeom xmlns:a="http://schemas.openxmlformats.org/drawingml/2006/main" prst="rect">
+            <a:avLst/>
+          </a:prstGeom>
+          <a:noFill xmlns:a="http://schemas.openxmlformats.org/drawingml/2006/main"/>
+          <a:ln xmlns:a="http://schemas.openxmlformats.org/drawingml/2006/main" w="0">
+            <a:noFill/>
+            <a:prstDash val="solid"/>
+          </a:ln>
+        </p:spPr>
+        <p:txBody>
+          <a:bodyPr xmlns:a="http://schemas.openxmlformats.org/drawingml/2006/main"/>
+          <a:lstStyle xmlns:a="http://schemas.openxmlformats.org/drawingml/2006/main"/>
+          <a:p xmlns:a="http://schemas.openxmlformats.org/drawingml/2006/main">
+            <a:pPr>
+              <a:defRPr sz="1575">
+                <a:solidFill>
+                  <a:srgbClr val="182235"/>
+                </a:solidFill>
+              </a:defRPr>
+            </a:pPr>
+            <a:r>
+              <a:rPr sz="1575">
+                <a:solidFill>
+                  <a:srgbClr val="182235"/>
+                </a:solidFill>
+              </a:rPr>
+              <a:t>map으로 반복할 때 고유한 key를 넣습니다.</a:t>
+            </a:r>
+          </a:p>
+        </p:txBody>
+      </p:sp>
+    </p:spTree>
+    <p:extLst>
+      <p:ext uri="{BB962C8B-B14F-4D97-AF65-F5344CB8AC3E}">
+        <p14:creationId xmlns:p14="http://schemas.microsoft.com/office/powerpoint/2010/main" val="1198388395"/>
+      </p:ext>
+    </p:extLst>
+  </p:cSld>
+</p:sld>
+</file>
+
+<file path=ppt/slides/slide13.xml><?xml version="1.0" encoding="utf-8"?>
+<p:sld xmlns:p="http://schemas.openxmlformats.org/presentationml/2006/main">
+  <p:cSld>
+    <p:bg>
+      <p:bgPr>
+        <a:solidFill xmlns:a="http://schemas.openxmlformats.org/drawingml/2006/main">
+          <a:srgbClr val="FFFCF8"/>
+        </a:solidFill>
+      </p:bgPr>
+    </p:bg>
+    <p:spTree>
+      <p:nvGrpSpPr>
+        <p:cNvPr id="1" name=""/>
+        <p:cNvGrpSpPr/>
+        <p:nvPr/>
+      </p:nvGrpSpPr>
+      <p:grpSpPr>
+        <a:xfrm xmlns:a="http://schemas.openxmlformats.org/drawingml/2006/main"/>
+      </p:grpSpPr>
+      <p:sp>
+        <p:nvSpPr>
+          <p:cNvPr id="13" name="">
+            <a:extLst xmlns:a="http://schemas.openxmlformats.org/drawingml/2006/main">
+              <a:ext uri="{FF2B5EF4-FFF2-40B4-BE49-F238E27FC236}">
+                <a16:creationId xmlns:a16="http://schemas.microsoft.com/office/drawing/2014/main" id="{2A630CFC-9F99-428E-9620-503C00AA4676}"/>
+              </a:ext>
+            </a:extLst>
+          </p:cNvPr>
+          <p:cNvSpPr>
+            <a:spLocks xmlns:a="http://schemas.openxmlformats.org/drawingml/2006/main" noGrp="1"/>
+          </p:cNvSpPr>
+          <p:nvPr/>
+        </p:nvSpPr>
+        <p:spPr>
+          <a:xfrm xmlns:a="http://schemas.openxmlformats.org/drawingml/2006/main">
+            <a:off x="0" y="0"/>
+            <a:ext cx="171450" cy="6858000"/>
+          </a:xfrm>
+          <a:prstGeom xmlns:a="http://schemas.openxmlformats.org/drawingml/2006/main" prst="rect">
+            <a:avLst/>
+          </a:prstGeom>
+          <a:solidFill xmlns:a="http://schemas.openxmlformats.org/drawingml/2006/main">
+            <a:srgbClr val="6657E8"/>
+          </a:solidFill>
+          <a:ln xmlns:a="http://schemas.openxmlformats.org/drawingml/2006/main" w="0">
+            <a:noFill/>
+            <a:prstDash val="solid"/>
+          </a:ln>
+        </p:spPr>
+      </p:sp>
+      <p:sp>
+        <p:nvSpPr>
+          <p:cNvPr id="2" name="">
+            <a:extLst xmlns:a="http://schemas.openxmlformats.org/drawingml/2006/main">
+              <a:ext uri="{FF2B5EF4-FFF2-40B4-BE49-F238E27FC236}">
+                <a16:creationId xmlns:a16="http://schemas.microsoft.com/office/drawing/2014/main" id="{36FA2E01-4EB9-4C7E-B7CB-2B048AB9589D}"/>
+              </a:ext>
+            </a:extLst>
+          </p:cNvPr>
+          <p:cNvSpPr>
+            <a:spLocks xmlns:a="http://schemas.openxmlformats.org/drawingml/2006/main" noGrp="1"/>
+          </p:cNvSpPr>
+          <p:nvPr/>
+        </p:nvSpPr>
+        <p:spPr>
+          <a:xfrm xmlns:a="http://schemas.openxmlformats.org/drawingml/2006/main">
+            <a:off x="647700" y="457200"/>
+            <a:ext cx="10096500" cy="552450"/>
+          </a:xfrm>
+          <a:prstGeom xmlns:a="http://schemas.openxmlformats.org/drawingml/2006/main" prst="rect">
+            <a:avLst/>
+          </a:prstGeom>
+          <a:noFill xmlns:a="http://schemas.openxmlformats.org/drawingml/2006/main"/>
+          <a:ln xmlns:a="http://schemas.openxmlformats.org/drawingml/2006/main" w="0">
+            <a:noFill/>
+            <a:prstDash val="solid"/>
+          </a:ln>
+        </p:spPr>
+        <p:txBody>
+          <a:bodyPr xmlns:a="http://schemas.openxmlformats.org/drawingml/2006/main"/>
+          <a:lstStyle xmlns:a="http://schemas.openxmlformats.org/drawingml/2006/main"/>
+          <a:p xmlns:a="http://schemas.openxmlformats.org/drawingml/2006/main">
+            <a:pPr>
+              <a:defRPr sz="2700" b="1">
+                <a:solidFill>
+                  <a:srgbClr val="182235"/>
+                </a:solidFill>
+              </a:defRPr>
+            </a:pPr>
+            <a:r>
+              <a:rPr sz="2700" b="1">
+                <a:solidFill>
+                  <a:srgbClr val="182235"/>
+                </a:solidFill>
+              </a:rPr>
+              <a:t>상황에 맞는 Codex 요청문을 골라 쓰세요</a:t>
+            </a:r>
+          </a:p>
+        </p:txBody>
+      </p:sp>
+      <p:sp>
+        <p:nvSpPr>
+          <p:cNvPr id="3" name="">
+            <a:extLst xmlns:a="http://schemas.openxmlformats.org/drawingml/2006/main">
+              <a:ext uri="{FF2B5EF4-FFF2-40B4-BE49-F238E27FC236}">
+                <a16:creationId xmlns:a16="http://schemas.microsoft.com/office/drawing/2014/main" id="{35A197FF-8944-4B86-A696-0F35AAE6859C}"/>
+              </a:ext>
+            </a:extLst>
+          </p:cNvPr>
+          <p:cNvSpPr>
+            <a:spLocks xmlns:a="http://schemas.openxmlformats.org/drawingml/2006/main" noGrp="1"/>
+          </p:cNvSpPr>
+          <p:nvPr/>
+        </p:nvSpPr>
+        <p:spPr>
+          <a:xfrm xmlns:a="http://schemas.openxmlformats.org/drawingml/2006/main">
+            <a:off x="666750" y="6419850"/>
+            <a:ext cx="10096500" cy="209550"/>
+          </a:xfrm>
+          <a:prstGeom xmlns:a="http://schemas.openxmlformats.org/drawingml/2006/main" prst="rect">
+            <a:avLst/>
+          </a:prstGeom>
+          <a:noFill xmlns:a="http://schemas.openxmlformats.org/drawingml/2006/main"/>
+          <a:ln xmlns:a="http://schemas.openxmlformats.org/drawingml/2006/main" w="0">
+            <a:noFill/>
+            <a:prstDash val="solid"/>
+          </a:ln>
+        </p:spPr>
+        <p:txBody>
+          <a:bodyPr xmlns:a="http://schemas.openxmlformats.org/drawingml/2006/main"/>
+          <a:lstStyle xmlns:a="http://schemas.openxmlformats.org/drawingml/2006/main"/>
+          <a:p xmlns:a="http://schemas.openxmlformats.org/drawingml/2006/main">
+            <a:pPr>
+              <a:defRPr sz="975">
+                <a:solidFill>
+                  <a:srgbClr val="657083"/>
+                </a:solidFill>
+              </a:defRPr>
+            </a:pPr>
+            <a:r>
+              <a:rPr sz="975">
+                <a:solidFill>
+                  <a:srgbClr val="657083"/>
+                </a:solidFill>
+              </a:rPr>
+              <a:t>EDU 웹개발 교육 플랫폼  ·  13</a:t>
+            </a:r>
+          </a:p>
+        </p:txBody>
+      </p:sp>
+      <p:sp>
+        <p:nvSpPr>
+          <p:cNvPr id="4" name="">
+            <a:extLst xmlns:a="http://schemas.openxmlformats.org/drawingml/2006/main">
+              <a:ext uri="{FF2B5EF4-FFF2-40B4-BE49-F238E27FC236}">
+                <a16:creationId xmlns:a16="http://schemas.microsoft.com/office/drawing/2014/main" id="{E4FB04BD-342D-4748-8DCF-865734B6776D}"/>
+              </a:ext>
+            </a:extLst>
+          </p:cNvPr>
+          <p:cNvSpPr>
+            <a:spLocks xmlns:a="http://schemas.openxmlformats.org/drawingml/2006/main" noGrp="1"/>
+          </p:cNvSpPr>
+          <p:nvPr/>
+        </p:nvSpPr>
+        <p:spPr>
+          <a:xfrm xmlns:a="http://schemas.openxmlformats.org/drawingml/2006/main">
+            <a:off x="742950" y="1381125"/>
+            <a:ext cx="514350" cy="514350"/>
+          </a:xfrm>
+          <a:prstGeom xmlns:a="http://schemas.openxmlformats.org/drawingml/2006/main" prst="roundRect">
+            <a:avLst>
+              <a:gd name="adj" fmla="val 22222"/>
+            </a:avLst>
+          </a:prstGeom>
+          <a:solidFill xmlns:a="http://schemas.openxmlformats.org/drawingml/2006/main">
+            <a:srgbClr val="EEEAFE"/>
+          </a:solidFill>
+          <a:ln xmlns:a="http://schemas.openxmlformats.org/drawingml/2006/main" w="0">
+            <a:noFill/>
+            <a:prstDash val="solid"/>
+          </a:ln>
+        </p:spPr>
+      </p:sp>
+      <p:sp>
+        <p:nvSpPr>
+          <p:cNvPr id="5" name="">
+            <a:extLst xmlns:a="http://schemas.openxmlformats.org/drawingml/2006/main">
+              <a:ext uri="{FF2B5EF4-FFF2-40B4-BE49-F238E27FC236}">
+                <a16:creationId xmlns:a16="http://schemas.microsoft.com/office/drawing/2014/main" id="{7B008518-FE2E-4E72-9ED5-802C236D53F3}"/>
+              </a:ext>
+            </a:extLst>
+          </p:cNvPr>
+          <p:cNvSpPr>
+            <a:spLocks xmlns:a="http://schemas.openxmlformats.org/drawingml/2006/main" noGrp="1"/>
+          </p:cNvSpPr>
+          <p:nvPr/>
+        </p:nvSpPr>
+        <p:spPr>
+          <a:xfrm xmlns:a="http://schemas.openxmlformats.org/drawingml/2006/main">
+            <a:off x="742950" y="1476375"/>
+            <a:ext cx="514350" cy="304800"/>
+          </a:xfrm>
+          <a:prstGeom xmlns:a="http://schemas.openxmlformats.org/drawingml/2006/main" prst="rect">
+            <a:avLst/>
+          </a:prstGeom>
+          <a:noFill xmlns:a="http://schemas.openxmlformats.org/drawingml/2006/main"/>
+          <a:ln xmlns:a="http://schemas.openxmlformats.org/drawingml/2006/main" w="0">
+            <a:noFill/>
+            <a:prstDash val="solid"/>
+          </a:ln>
+        </p:spPr>
+        <p:txBody>
+          <a:bodyPr xmlns:a="http://schemas.openxmlformats.org/drawingml/2006/main"/>
+          <a:lstStyle xmlns:a="http://schemas.openxmlformats.org/drawingml/2006/main"/>
+          <a:p xmlns:a="http://schemas.openxmlformats.org/drawingml/2006/main">
+            <a:pPr algn="ctr">
+              <a:defRPr sz="1500" b="1">
+                <a:solidFill>
+                  <a:srgbClr val="6657E8"/>
+                </a:solidFill>
+              </a:defRPr>
+            </a:pPr>
+            <a:r>
+              <a:rPr sz="1500" b="1">
+                <a:solidFill>
+                  <a:srgbClr val="6657E8"/>
+                </a:solidFill>
+              </a:rPr>
+              <a:t>1</a:t>
+            </a:r>
+          </a:p>
+        </p:txBody>
+      </p:sp>
+      <p:sp>
+        <p:nvSpPr>
+          <p:cNvPr id="6" name="">
+            <a:extLst xmlns:a="http://schemas.openxmlformats.org/drawingml/2006/main">
+              <a:ext uri="{FF2B5EF4-FFF2-40B4-BE49-F238E27FC236}">
+                <a16:creationId xmlns:a16="http://schemas.microsoft.com/office/drawing/2014/main" id="{DDD06D58-AD0D-4EC9-90CB-F5C421417948}"/>
+              </a:ext>
+            </a:extLst>
+          </p:cNvPr>
+          <p:cNvSpPr>
+            <a:spLocks xmlns:a="http://schemas.openxmlformats.org/drawingml/2006/main" noGrp="1"/>
+          </p:cNvSpPr>
+          <p:nvPr/>
+        </p:nvSpPr>
+        <p:spPr>
+          <a:xfrm xmlns:a="http://schemas.openxmlformats.org/drawingml/2006/main">
+            <a:off x="1485900" y="1419225"/>
+            <a:ext cx="9239250" cy="619125"/>
+          </a:xfrm>
+          <a:prstGeom xmlns:a="http://schemas.openxmlformats.org/drawingml/2006/main" prst="rect">
+            <a:avLst/>
+          </a:prstGeom>
+          <a:noFill xmlns:a="http://schemas.openxmlformats.org/drawingml/2006/main"/>
+          <a:ln xmlns:a="http://schemas.openxmlformats.org/drawingml/2006/main" w="0">
+            <a:noFill/>
+            <a:prstDash val="solid"/>
+          </a:ln>
+        </p:spPr>
+        <p:txBody>
+          <a:bodyPr xmlns:a="http://schemas.openxmlformats.org/drawingml/2006/main"/>
+          <a:lstStyle xmlns:a="http://schemas.openxmlformats.org/drawingml/2006/main"/>
+          <a:p xmlns:a="http://schemas.openxmlformats.org/drawingml/2006/main">
+            <a:pPr>
+              <a:defRPr sz="1800">
+                <a:solidFill>
+                  <a:srgbClr val="182235"/>
+                </a:solidFill>
+              </a:defRPr>
+            </a:pPr>
+            <a:r>
+              <a:rPr sz="1800">
+                <a:solidFill>
+                  <a:srgbClr val="182235"/>
+                </a:solidFill>
+              </a:rPr>
+              <a:t>현재 App.jsx를 컴포넌트 단위로 나눌 위치를 알려줘.</a:t>
+            </a:r>
+          </a:p>
+        </p:txBody>
+      </p:sp>
+      <p:sp>
+        <p:nvSpPr>
+          <p:cNvPr id="7" name="">
+            <a:extLst xmlns:a="http://schemas.openxmlformats.org/drawingml/2006/main">
+              <a:ext uri="{FF2B5EF4-FFF2-40B4-BE49-F238E27FC236}">
+                <a16:creationId xmlns:a16="http://schemas.microsoft.com/office/drawing/2014/main" id="{BBB799EB-EF40-4955-ABBD-4D421A0C4814}"/>
+              </a:ext>
+            </a:extLst>
+          </p:cNvPr>
+          <p:cNvSpPr>
+            <a:spLocks xmlns:a="http://schemas.openxmlformats.org/drawingml/2006/main" noGrp="1"/>
+          </p:cNvSpPr>
+          <p:nvPr/>
+        </p:nvSpPr>
+        <p:spPr>
+          <a:xfrm xmlns:a="http://schemas.openxmlformats.org/drawingml/2006/main">
+            <a:off x="742950" y="2352675"/>
+            <a:ext cx="514350" cy="514350"/>
+          </a:xfrm>
+          <a:prstGeom xmlns:a="http://schemas.openxmlformats.org/drawingml/2006/main" prst="roundRect">
+            <a:avLst>
+              <a:gd name="adj" fmla="val 22222"/>
+            </a:avLst>
+          </a:prstGeom>
+          <a:solidFill xmlns:a="http://schemas.openxmlformats.org/drawingml/2006/main">
+            <a:srgbClr val="EAF8F3"/>
+          </a:solidFill>
+          <a:ln xmlns:a="http://schemas.openxmlformats.org/drawingml/2006/main" w="0">
+            <a:noFill/>
+            <a:prstDash val="solid"/>
+          </a:ln>
+        </p:spPr>
+      </p:sp>
+      <p:sp>
+        <p:nvSpPr>
+          <p:cNvPr id="8" name="">
+            <a:extLst xmlns:a="http://schemas.openxmlformats.org/drawingml/2006/main">
+              <a:ext uri="{FF2B5EF4-FFF2-40B4-BE49-F238E27FC236}">
+                <a16:creationId xmlns:a16="http://schemas.microsoft.com/office/drawing/2014/main" id="{AF271142-6CB7-417E-AEA6-A8EA6678B86A}"/>
+              </a:ext>
+            </a:extLst>
+          </p:cNvPr>
+          <p:cNvSpPr>
+            <a:spLocks xmlns:a="http://schemas.openxmlformats.org/drawingml/2006/main" noGrp="1"/>
+          </p:cNvSpPr>
+          <p:nvPr/>
+        </p:nvSpPr>
+        <p:spPr>
+          <a:xfrm xmlns:a="http://schemas.openxmlformats.org/drawingml/2006/main">
+            <a:off x="742950" y="2447925"/>
+            <a:ext cx="514350" cy="304800"/>
+          </a:xfrm>
+          <a:prstGeom xmlns:a="http://schemas.openxmlformats.org/drawingml/2006/main" prst="rect">
+            <a:avLst/>
+          </a:prstGeom>
+          <a:noFill xmlns:a="http://schemas.openxmlformats.org/drawingml/2006/main"/>
+          <a:ln xmlns:a="http://schemas.openxmlformats.org/drawingml/2006/main" w="0">
+            <a:noFill/>
+            <a:prstDash val="solid"/>
+          </a:ln>
+        </p:spPr>
+        <p:txBody>
+          <a:bodyPr xmlns:a="http://schemas.openxmlformats.org/drawingml/2006/main"/>
+          <a:lstStyle xmlns:a="http://schemas.openxmlformats.org/drawingml/2006/main"/>
+          <a:p xmlns:a="http://schemas.openxmlformats.org/drawingml/2006/main">
+            <a:pPr algn="ctr">
+              <a:defRPr sz="1500" b="1">
+                <a:solidFill>
+                  <a:srgbClr val="6657E8"/>
+                </a:solidFill>
+              </a:defRPr>
+            </a:pPr>
+            <a:r>
+              <a:rPr sz="1500" b="1">
+                <a:solidFill>
+                  <a:srgbClr val="6657E8"/>
+                </a:solidFill>
+              </a:rPr>
+              <a:t>2</a:t>
+            </a:r>
+          </a:p>
+        </p:txBody>
+      </p:sp>
+      <p:sp>
+        <p:nvSpPr>
+          <p:cNvPr id="9" name="">
+            <a:extLst xmlns:a="http://schemas.openxmlformats.org/drawingml/2006/main">
+              <a:ext uri="{FF2B5EF4-FFF2-40B4-BE49-F238E27FC236}">
+                <a16:creationId xmlns:a16="http://schemas.microsoft.com/office/drawing/2014/main" id="{DD83E2BC-E35B-4E7C-AC8A-5CCFDFC0EE78}"/>
+              </a:ext>
+            </a:extLst>
+          </p:cNvPr>
+          <p:cNvSpPr>
+            <a:spLocks xmlns:a="http://schemas.openxmlformats.org/drawingml/2006/main" noGrp="1"/>
+          </p:cNvSpPr>
+          <p:nvPr/>
+        </p:nvSpPr>
+        <p:spPr>
+          <a:xfrm xmlns:a="http://schemas.openxmlformats.org/drawingml/2006/main">
+            <a:off x="1485900" y="2390775"/>
+            <a:ext cx="9239250" cy="619125"/>
+          </a:xfrm>
+          <a:prstGeom xmlns:a="http://schemas.openxmlformats.org/drawingml/2006/main" prst="rect">
+            <a:avLst/>
+          </a:prstGeom>
+          <a:noFill xmlns:a="http://schemas.openxmlformats.org/drawingml/2006/main"/>
+          <a:ln xmlns:a="http://schemas.openxmlformats.org/drawingml/2006/main" w="0">
+            <a:noFill/>
+            <a:prstDash val="solid"/>
+          </a:ln>
+        </p:spPr>
+        <p:txBody>
+          <a:bodyPr xmlns:a="http://schemas.openxmlformats.org/drawingml/2006/main"/>
+          <a:lstStyle xmlns:a="http://schemas.openxmlformats.org/drawingml/2006/main"/>
+          <a:p xmlns:a="http://schemas.openxmlformats.org/drawingml/2006/main">
+            <a:pPr>
+              <a:defRPr sz="1800">
+                <a:solidFill>
+                  <a:srgbClr val="182235"/>
+                </a:solidFill>
+              </a:defRPr>
+            </a:pPr>
+            <a:r>
+              <a:rPr sz="1800">
+                <a:solidFill>
+                  <a:srgbClr val="182235"/>
+                </a:solidFill>
+              </a:rPr>
+              <a:t>title과 description을 받는 LessonCard를 만들어줘.</a:t>
+            </a:r>
+          </a:p>
+        </p:txBody>
+      </p:sp>
+      <p:sp>
+        <p:nvSpPr>
+          <p:cNvPr id="10" name="">
+            <a:extLst xmlns:a="http://schemas.openxmlformats.org/drawingml/2006/main">
+              <a:ext uri="{FF2B5EF4-FFF2-40B4-BE49-F238E27FC236}">
+                <a16:creationId xmlns:a16="http://schemas.microsoft.com/office/drawing/2014/main" id="{990F4ABC-C293-49C3-A8F0-3429DF472B87}"/>
+              </a:ext>
+            </a:extLst>
+          </p:cNvPr>
+          <p:cNvSpPr>
+            <a:spLocks xmlns:a="http://schemas.openxmlformats.org/drawingml/2006/main" noGrp="1"/>
+          </p:cNvSpPr>
+          <p:nvPr/>
+        </p:nvSpPr>
+        <p:spPr>
+          <a:xfrm xmlns:a="http://schemas.openxmlformats.org/drawingml/2006/main">
+            <a:off x="742950" y="3324225"/>
+            <a:ext cx="514350" cy="514350"/>
+          </a:xfrm>
+          <a:prstGeom xmlns:a="http://schemas.openxmlformats.org/drawingml/2006/main" prst="roundRect">
+            <a:avLst>
+              <a:gd name="adj" fmla="val 22222"/>
+            </a:avLst>
+          </a:prstGeom>
+          <a:solidFill xmlns:a="http://schemas.openxmlformats.org/drawingml/2006/main">
+            <a:srgbClr val="EEEAFE"/>
+          </a:solidFill>
+          <a:ln xmlns:a="http://schemas.openxmlformats.org/drawingml/2006/main" w="0">
+            <a:noFill/>
+            <a:prstDash val="solid"/>
+          </a:ln>
+        </p:spPr>
+      </p:sp>
+      <p:sp>
+        <p:nvSpPr>
+          <p:cNvPr id="11" name="">
+            <a:extLst xmlns:a="http://schemas.openxmlformats.org/drawingml/2006/main">
+              <a:ext uri="{FF2B5EF4-FFF2-40B4-BE49-F238E27FC236}">
+                <a16:creationId xmlns:a16="http://schemas.microsoft.com/office/drawing/2014/main" id="{1AADAB24-7DFD-440D-8FAE-C86F69B95C05}"/>
+              </a:ext>
+            </a:extLst>
+          </p:cNvPr>
+          <p:cNvSpPr>
+            <a:spLocks xmlns:a="http://schemas.openxmlformats.org/drawingml/2006/main" noGrp="1"/>
+          </p:cNvSpPr>
+          <p:nvPr/>
+        </p:nvSpPr>
+        <p:spPr>
+          <a:xfrm xmlns:a="http://schemas.openxmlformats.org/drawingml/2006/main">
+            <a:off x="742950" y="3419475"/>
+            <a:ext cx="514350" cy="304800"/>
+          </a:xfrm>
+          <a:prstGeom xmlns:a="http://schemas.openxmlformats.org/drawingml/2006/main" prst="rect">
+            <a:avLst/>
+          </a:prstGeom>
+          <a:noFill xmlns:a="http://schemas.openxmlformats.org/drawingml/2006/main"/>
+          <a:ln xmlns:a="http://schemas.openxmlformats.org/drawingml/2006/main" w="0">
+            <a:noFill/>
+            <a:prstDash val="solid"/>
+          </a:ln>
+        </p:spPr>
+        <p:txBody>
+          <a:bodyPr xmlns:a="http://schemas.openxmlformats.org/drawingml/2006/main"/>
+          <a:lstStyle xmlns:a="http://schemas.openxmlformats.org/drawingml/2006/main"/>
+          <a:p xmlns:a="http://schemas.openxmlformats.org/drawingml/2006/main">
+            <a:pPr algn="ctr">
+              <a:defRPr sz="1500" b="1">
+                <a:solidFill>
+                  <a:srgbClr val="6657E8"/>
+                </a:solidFill>
+              </a:defRPr>
+            </a:pPr>
+            <a:r>
+              <a:rPr sz="1500" b="1">
+                <a:solidFill>
+                  <a:srgbClr val="6657E8"/>
+                </a:solidFill>
+              </a:rPr>
+              <a:t>3</a:t>
+            </a:r>
+          </a:p>
+        </p:txBody>
+      </p:sp>
+      <p:sp>
+        <p:nvSpPr>
+          <p:cNvPr id="12" name="">
+            <a:extLst xmlns:a="http://schemas.openxmlformats.org/drawingml/2006/main">
+              <a:ext uri="{FF2B5EF4-FFF2-40B4-BE49-F238E27FC236}">
+                <a16:creationId xmlns:a16="http://schemas.microsoft.com/office/drawing/2014/main" id="{092B8933-E358-42B0-8EF5-3CFD22666AA8}"/>
+              </a:ext>
+            </a:extLst>
+          </p:cNvPr>
+          <p:cNvSpPr>
+            <a:spLocks xmlns:a="http://schemas.openxmlformats.org/drawingml/2006/main" noGrp="1"/>
+          </p:cNvSpPr>
+          <p:nvPr/>
+        </p:nvSpPr>
+        <p:spPr>
+          <a:xfrm xmlns:a="http://schemas.openxmlformats.org/drawingml/2006/main">
+            <a:off x="1485900" y="3362325"/>
+            <a:ext cx="9239250" cy="619125"/>
+          </a:xfrm>
+          <a:prstGeom xmlns:a="http://schemas.openxmlformats.org/drawingml/2006/main" prst="rect">
+            <a:avLst/>
+          </a:prstGeom>
+          <a:noFill xmlns:a="http://schemas.openxmlformats.org/drawingml/2006/main"/>
+          <a:ln xmlns:a="http://schemas.openxmlformats.org/drawingml/2006/main" w="0">
+            <a:noFill/>
+            <a:prstDash val="solid"/>
+          </a:ln>
+        </p:spPr>
+        <p:txBody>
+          <a:bodyPr xmlns:a="http://schemas.openxmlformats.org/drawingml/2006/main"/>
+          <a:lstStyle xmlns:a="http://schemas.openxmlformats.org/drawingml/2006/main"/>
+          <a:p xmlns:a="http://schemas.openxmlformats.org/drawingml/2006/main">
+            <a:pPr>
+              <a:defRPr sz="1800">
+                <a:solidFill>
+                  <a:srgbClr val="182235"/>
+                </a:solidFill>
+              </a:defRPr>
+            </a:pPr>
+            <a:r>
+              <a:rPr sz="1800">
+                <a:solidFill>
+                  <a:srgbClr val="182235"/>
+                </a:solidFill>
+              </a:rPr>
+              <a:t>기존 디자인을 유지하면서 반복 코드를 컴포넌트로 정리해줘.</a:t>
+            </a:r>
+          </a:p>
+        </p:txBody>
+      </p:sp>
+    </p:spTree>
+    <p:extLst>
+      <p:ext uri="{BB962C8B-B14F-4D97-AF65-F5344CB8AC3E}">
+        <p14:creationId xmlns:p14="http://schemas.microsoft.com/office/powerpoint/2010/main" val="1858225795"/>
+      </p:ext>
+    </p:extLst>
+  </p:cSld>
+</p:sld>
+</file>
+
+<file path=ppt/slides/slide14.xml><?xml version="1.0" encoding="utf-8"?>
+<p:sld xmlns:p="http://schemas.openxmlformats.org/presentationml/2006/main">
+  <p:cSld>
+    <p:bg>
+      <p:bgPr>
+        <a:solidFill xmlns:a="http://schemas.openxmlformats.org/drawingml/2006/main">
+          <a:srgbClr val="FFFCF8"/>
+        </a:solidFill>
+      </p:bgPr>
+    </p:bg>
+    <p:spTree>
+      <p:nvGrpSpPr>
+        <p:cNvPr id="1" name=""/>
+        <p:cNvGrpSpPr/>
+        <p:nvPr/>
+      </p:nvGrpSpPr>
+      <p:grpSpPr>
+        <a:xfrm xmlns:a="http://schemas.openxmlformats.org/drawingml/2006/main"/>
+      </p:grpSpPr>
+      <p:sp>
+        <p:nvSpPr>
+          <p:cNvPr id="7" name="">
+            <a:extLst xmlns:a="http://schemas.openxmlformats.org/drawingml/2006/main">
+              <a:ext uri="{FF2B5EF4-FFF2-40B4-BE49-F238E27FC236}">
+                <a16:creationId xmlns:a16="http://schemas.microsoft.com/office/drawing/2014/main" id="{E9915296-578F-4C0E-945B-B33FA85C8C99}"/>
+              </a:ext>
+            </a:extLst>
+          </p:cNvPr>
+          <p:cNvSpPr>
+            <a:spLocks xmlns:a="http://schemas.openxmlformats.org/drawingml/2006/main" noGrp="1"/>
+          </p:cNvSpPr>
+          <p:nvPr/>
+        </p:nvSpPr>
+        <p:spPr>
+          <a:xfrm xmlns:a="http://schemas.openxmlformats.org/drawingml/2006/main">
+            <a:off x="0" y="0"/>
+            <a:ext cx="171450" cy="6858000"/>
+          </a:xfrm>
+          <a:prstGeom xmlns:a="http://schemas.openxmlformats.org/drawingml/2006/main" prst="rect">
+            <a:avLst/>
+          </a:prstGeom>
+          <a:solidFill xmlns:a="http://schemas.openxmlformats.org/drawingml/2006/main">
+            <a:srgbClr val="6657E8"/>
+          </a:solidFill>
+          <a:ln xmlns:a="http://schemas.openxmlformats.org/drawingml/2006/main" w="0">
+            <a:noFill/>
+            <a:prstDash val="solid"/>
+          </a:ln>
+        </p:spPr>
+      </p:sp>
+      <p:sp>
+        <p:nvSpPr>
+          <p:cNvPr id="2" name="">
+            <a:extLst xmlns:a="http://schemas.openxmlformats.org/drawingml/2006/main">
+              <a:ext uri="{FF2B5EF4-FFF2-40B4-BE49-F238E27FC236}">
+                <a16:creationId xmlns:a16="http://schemas.microsoft.com/office/drawing/2014/main" id="{CE52A0F4-920C-4C56-B479-833284E8C296}"/>
+              </a:ext>
+            </a:extLst>
+          </p:cNvPr>
+          <p:cNvSpPr>
+            <a:spLocks xmlns:a="http://schemas.openxmlformats.org/drawingml/2006/main" noGrp="1"/>
+          </p:cNvSpPr>
+          <p:nvPr/>
+        </p:nvSpPr>
+        <p:spPr>
+          <a:xfrm xmlns:a="http://schemas.openxmlformats.org/drawingml/2006/main">
+            <a:off x="647700" y="457200"/>
+            <a:ext cx="10096500" cy="552450"/>
+          </a:xfrm>
+          <a:prstGeom xmlns:a="http://schemas.openxmlformats.org/drawingml/2006/main" prst="rect">
+            <a:avLst/>
+          </a:prstGeom>
+          <a:noFill xmlns:a="http://schemas.openxmlformats.org/drawingml/2006/main"/>
+          <a:ln xmlns:a="http://schemas.openxmlformats.org/drawingml/2006/main" w="0">
+            <a:noFill/>
+            <a:prstDash val="solid"/>
+          </a:ln>
+        </p:spPr>
+        <p:txBody>
+          <a:bodyPr xmlns:a="http://schemas.openxmlformats.org/drawingml/2006/main"/>
+          <a:lstStyle xmlns:a="http://schemas.openxmlformats.org/drawingml/2006/main"/>
+          <a:p xmlns:a="http://schemas.openxmlformats.org/drawingml/2006/main">
+            <a:pPr>
+              <a:defRPr sz="2700" b="1">
+                <a:solidFill>
+                  <a:srgbClr val="182235"/>
+                </a:solidFill>
+              </a:defRPr>
+            </a:pPr>
+            <a:r>
+              <a:rPr sz="2700" b="1">
+                <a:solidFill>
+                  <a:srgbClr val="182235"/>
+                </a:solidFill>
+              </a:rPr>
+              <a:t>작은 응용이 내 실력으로 바뀌는 순간입니다</a:t>
+            </a:r>
+          </a:p>
+        </p:txBody>
+      </p:sp>
+      <p:sp>
+        <p:nvSpPr>
+          <p:cNvPr id="3" name="">
+            <a:extLst xmlns:a="http://schemas.openxmlformats.org/drawingml/2006/main">
+              <a:ext uri="{FF2B5EF4-FFF2-40B4-BE49-F238E27FC236}">
+                <a16:creationId xmlns:a16="http://schemas.microsoft.com/office/drawing/2014/main" id="{9B6FA86B-0830-405F-A64A-8AF9CA5280E7}"/>
+              </a:ext>
+            </a:extLst>
+          </p:cNvPr>
+          <p:cNvSpPr>
+            <a:spLocks xmlns:a="http://schemas.openxmlformats.org/drawingml/2006/main" noGrp="1"/>
+          </p:cNvSpPr>
+          <p:nvPr/>
+        </p:nvSpPr>
+        <p:spPr>
+          <a:xfrm xmlns:a="http://schemas.openxmlformats.org/drawingml/2006/main">
+            <a:off x="666750" y="6419850"/>
+            <a:ext cx="10096500" cy="209550"/>
+          </a:xfrm>
+          <a:prstGeom xmlns:a="http://schemas.openxmlformats.org/drawingml/2006/main" prst="rect">
+            <a:avLst/>
+          </a:prstGeom>
+          <a:noFill xmlns:a="http://schemas.openxmlformats.org/drawingml/2006/main"/>
+          <a:ln xmlns:a="http://schemas.openxmlformats.org/drawingml/2006/main" w="0">
+            <a:noFill/>
+            <a:prstDash val="solid"/>
+          </a:ln>
+        </p:spPr>
+        <p:txBody>
+          <a:bodyPr xmlns:a="http://schemas.openxmlformats.org/drawingml/2006/main"/>
+          <a:lstStyle xmlns:a="http://schemas.openxmlformats.org/drawingml/2006/main"/>
+          <a:p xmlns:a="http://schemas.openxmlformats.org/drawingml/2006/main">
+            <a:pPr>
+              <a:defRPr sz="975">
+                <a:solidFill>
+                  <a:srgbClr val="657083"/>
+                </a:solidFill>
+              </a:defRPr>
+            </a:pPr>
+            <a:r>
+              <a:rPr sz="975">
+                <a:solidFill>
+                  <a:srgbClr val="657083"/>
+                </a:solidFill>
+              </a:rPr>
+              <a:t>EDU 웹개발 교육 플랫폼  ·  14</a:t>
+            </a:r>
+          </a:p>
+        </p:txBody>
+      </p:sp>
+      <p:sp>
+        <p:nvSpPr>
+          <p:cNvPr id="4" name="">
+            <a:extLst xmlns:a="http://schemas.openxmlformats.org/drawingml/2006/main">
+              <a:ext uri="{FF2B5EF4-FFF2-40B4-BE49-F238E27FC236}">
+                <a16:creationId xmlns:a16="http://schemas.microsoft.com/office/drawing/2014/main" id="{E0E25451-410C-4550-9EA5-800ED591A5AD}"/>
+              </a:ext>
+            </a:extLst>
+          </p:cNvPr>
+          <p:cNvSpPr>
+            <a:spLocks xmlns:a="http://schemas.openxmlformats.org/drawingml/2006/main" noGrp="1"/>
+          </p:cNvSpPr>
+          <p:nvPr/>
+        </p:nvSpPr>
+        <p:spPr>
+          <a:xfrm xmlns:a="http://schemas.openxmlformats.org/drawingml/2006/main">
+            <a:off x="685800" y="1524000"/>
+            <a:ext cx="10820400" cy="2381250"/>
+          </a:xfrm>
+          <a:prstGeom xmlns:a="http://schemas.openxmlformats.org/drawingml/2006/main" prst="roundRect">
+            <a:avLst>
+              <a:gd name="adj" fmla="val 4800"/>
+            </a:avLst>
+          </a:prstGeom>
+          <a:solidFill xmlns:a="http://schemas.openxmlformats.org/drawingml/2006/main">
+            <a:srgbClr val="EAF8F3"/>
+          </a:solidFill>
+          <a:ln xmlns:a="http://schemas.openxmlformats.org/drawingml/2006/main" w="0">
+            <a:noFill/>
+            <a:prstDash val="solid"/>
+          </a:ln>
+        </p:spPr>
+      </p:sp>
+      <p:sp>
+        <p:nvSpPr>
+          <p:cNvPr id="5" name="">
+            <a:extLst xmlns:a="http://schemas.openxmlformats.org/drawingml/2006/main">
+              <a:ext uri="{FF2B5EF4-FFF2-40B4-BE49-F238E27FC236}">
+                <a16:creationId xmlns:a16="http://schemas.microsoft.com/office/drawing/2014/main" id="{0C940821-5C2E-403C-80EE-D0DA13CD7798}"/>
+              </a:ext>
+            </a:extLst>
+          </p:cNvPr>
+          <p:cNvSpPr>
+            <a:spLocks xmlns:a="http://schemas.openxmlformats.org/drawingml/2006/main" noGrp="1"/>
+          </p:cNvSpPr>
+          <p:nvPr/>
+        </p:nvSpPr>
+        <p:spPr>
+          <a:xfrm xmlns:a="http://schemas.openxmlformats.org/drawingml/2006/main">
+            <a:off x="1123950" y="2076450"/>
+            <a:ext cx="9944100" cy="1238250"/>
+          </a:xfrm>
+          <a:prstGeom xmlns:a="http://schemas.openxmlformats.org/drawingml/2006/main" prst="rect">
+            <a:avLst/>
+          </a:prstGeom>
+          <a:noFill xmlns:a="http://schemas.openxmlformats.org/drawingml/2006/main"/>
+          <a:ln xmlns:a="http://schemas.openxmlformats.org/drawingml/2006/main" w="0">
+            <a:noFill/>
+            <a:prstDash val="solid"/>
+          </a:ln>
+        </p:spPr>
+        <p:txBody>
+          <a:bodyPr xmlns:a="http://schemas.openxmlformats.org/drawingml/2006/main"/>
+          <a:lstStyle xmlns:a="http://schemas.openxmlformats.org/drawingml/2006/main"/>
+          <a:p xmlns:a="http://schemas.openxmlformats.org/drawingml/2006/main">
+            <a:pPr>
+              <a:defRPr sz="2175" b="1">
+                <a:solidFill>
+                  <a:srgbClr val="182235"/>
+                </a:solidFill>
+              </a:defRPr>
+            </a:pPr>
+            <a:r>
+              <a:rPr sz="2175" b="1">
+                <a:solidFill>
+                  <a:srgbClr val="182235"/>
+                </a:solidFill>
+              </a:rPr>
+              <a:t>난이도 속성을 하나 더 받아 카드에 입문 또는 기초 표시를 추가하세요.</a:t>
+            </a:r>
+          </a:p>
+        </p:txBody>
+      </p:sp>
+      <p:sp>
+        <p:nvSpPr>
+          <p:cNvPr id="6" name="">
+            <a:extLst xmlns:a="http://schemas.openxmlformats.org/drawingml/2006/main">
+              <a:ext uri="{FF2B5EF4-FFF2-40B4-BE49-F238E27FC236}">
+                <a16:creationId xmlns:a16="http://schemas.microsoft.com/office/drawing/2014/main" id="{AE91CF84-62D0-49BF-9F2F-3AD4F3DA5CD5}"/>
+              </a:ext>
+            </a:extLst>
+          </p:cNvPr>
+          <p:cNvSpPr>
+            <a:spLocks xmlns:a="http://schemas.openxmlformats.org/drawingml/2006/main" noGrp="1"/>
+          </p:cNvSpPr>
+          <p:nvPr/>
+        </p:nvSpPr>
+        <p:spPr>
+          <a:xfrm xmlns:a="http://schemas.openxmlformats.org/drawingml/2006/main">
+            <a:off x="1143000" y="4524375"/>
+            <a:ext cx="9525000" cy="571500"/>
+          </a:xfrm>
+          <a:prstGeom xmlns:a="http://schemas.openxmlformats.org/drawingml/2006/main" prst="rect">
+            <a:avLst/>
+          </a:prstGeom>
+          <a:noFill xmlns:a="http://schemas.openxmlformats.org/drawingml/2006/main"/>
+          <a:ln xmlns:a="http://schemas.openxmlformats.org/drawingml/2006/main" w="0">
+            <a:noFill/>
+            <a:prstDash val="solid"/>
+          </a:ln>
+        </p:spPr>
+        <p:txBody>
+          <a:bodyPr xmlns:a="http://schemas.openxmlformats.org/drawingml/2006/main"/>
+          <a:lstStyle xmlns:a="http://schemas.openxmlformats.org/drawingml/2006/main"/>
+          <a:p xmlns:a="http://schemas.openxmlformats.org/drawingml/2006/main">
+            <a:pPr>
+              <a:defRPr sz="1650">
+                <a:solidFill>
+                  <a:srgbClr val="657083"/>
+                </a:solidFill>
+              </a:defRPr>
+            </a:pPr>
+            <a:r>
+              <a:rPr sz="1650">
+                <a:solidFill>
+                  <a:srgbClr val="657083"/>
+                </a:solidFill>
+              </a:rPr>
+              <a:t>완성한 뒤 원래 결과와 무엇이 달라졌는지 한 문장으로 설명해 보세요.</a:t>
+            </a:r>
+          </a:p>
+        </p:txBody>
+      </p:sp>
+    </p:spTree>
+    <p:extLst>
+      <p:ext uri="{BB962C8B-B14F-4D97-AF65-F5344CB8AC3E}">
+        <p14:creationId xmlns:p14="http://schemas.microsoft.com/office/powerpoint/2010/main" val="1233535423"/>
+      </p:ext>
+    </p:extLst>
+  </p:cSld>
+</p:sld>
+</file>
+
+<file path=ppt/slides/slide15.xml><?xml version="1.0" encoding="utf-8"?>
+<p:sld xmlns:p="http://schemas.openxmlformats.org/presentationml/2006/main">
+  <p:cSld>
+    <p:bg>
+      <p:bgPr>
+        <a:solidFill xmlns:a="http://schemas.openxmlformats.org/drawingml/2006/main">
+          <a:srgbClr val="FFFCF8"/>
+        </a:solidFill>
+      </p:bgPr>
+    </p:bg>
+    <p:spTree>
+      <p:nvGrpSpPr>
+        <p:cNvPr id="1" name=""/>
+        <p:cNvGrpSpPr/>
+        <p:nvPr/>
+      </p:nvGrpSpPr>
+      <p:grpSpPr>
+        <a:xfrm xmlns:a="http://schemas.openxmlformats.org/drawingml/2006/main"/>
+      </p:grpSpPr>
+      <p:sp>
+        <p:nvSpPr>
+          <p:cNvPr id="10" name="">
+            <a:extLst xmlns:a="http://schemas.openxmlformats.org/drawingml/2006/main">
+              <a:ext uri="{FF2B5EF4-FFF2-40B4-BE49-F238E27FC236}">
+                <a16:creationId xmlns:a16="http://schemas.microsoft.com/office/drawing/2014/main" id="{1D0D6F47-6577-44E1-BC9C-28995FDC050A}"/>
+              </a:ext>
+            </a:extLst>
+          </p:cNvPr>
+          <p:cNvSpPr>
+            <a:spLocks xmlns:a="http://schemas.openxmlformats.org/drawingml/2006/main" noGrp="1"/>
+          </p:cNvSpPr>
+          <p:nvPr/>
+        </p:nvSpPr>
+        <p:spPr>
+          <a:xfrm xmlns:a="http://schemas.openxmlformats.org/drawingml/2006/main">
+            <a:off x="0" y="0"/>
+            <a:ext cx="171450" cy="6858000"/>
+          </a:xfrm>
+          <a:prstGeom xmlns:a="http://schemas.openxmlformats.org/drawingml/2006/main" prst="rect">
+            <a:avLst/>
+          </a:prstGeom>
+          <a:solidFill xmlns:a="http://schemas.openxmlformats.org/drawingml/2006/main">
+            <a:srgbClr val="6657E8"/>
+          </a:solidFill>
+          <a:ln xmlns:a="http://schemas.openxmlformats.org/drawingml/2006/main" w="0">
+            <a:noFill/>
+            <a:prstDash val="solid"/>
+          </a:ln>
+        </p:spPr>
+      </p:sp>
+      <p:sp>
+        <p:nvSpPr>
+          <p:cNvPr id="2" name="">
+            <a:extLst xmlns:a="http://schemas.openxmlformats.org/drawingml/2006/main">
+              <a:ext uri="{FF2B5EF4-FFF2-40B4-BE49-F238E27FC236}">
+                <a16:creationId xmlns:a16="http://schemas.microsoft.com/office/drawing/2014/main" id="{4D295ADF-691F-4016-B7A1-36F66E07751B}"/>
+              </a:ext>
+            </a:extLst>
+          </p:cNvPr>
+          <p:cNvSpPr>
+            <a:spLocks xmlns:a="http://schemas.openxmlformats.org/drawingml/2006/main" noGrp="1"/>
+          </p:cNvSpPr>
+          <p:nvPr/>
+        </p:nvSpPr>
+        <p:spPr>
+          <a:xfrm xmlns:a="http://schemas.openxmlformats.org/drawingml/2006/main">
+            <a:off x="647700" y="457200"/>
+            <a:ext cx="10096500" cy="552450"/>
+          </a:xfrm>
+          <a:prstGeom xmlns:a="http://schemas.openxmlformats.org/drawingml/2006/main" prst="rect">
+            <a:avLst/>
+          </a:prstGeom>
+          <a:noFill xmlns:a="http://schemas.openxmlformats.org/drawingml/2006/main"/>
+          <a:ln xmlns:a="http://schemas.openxmlformats.org/drawingml/2006/main" w="0">
+            <a:noFill/>
+            <a:prstDash val="solid"/>
+          </a:ln>
+        </p:spPr>
+        <p:txBody>
+          <a:bodyPr xmlns:a="http://schemas.openxmlformats.org/drawingml/2006/main"/>
+          <a:lstStyle xmlns:a="http://schemas.openxmlformats.org/drawingml/2006/main"/>
+          <a:p xmlns:a="http://schemas.openxmlformats.org/drawingml/2006/main">
+            <a:pPr>
+              <a:defRPr sz="2700" b="1">
+                <a:solidFill>
+                  <a:srgbClr val="182235"/>
+                </a:solidFill>
+              </a:defRPr>
+            </a:pPr>
+            <a:r>
+              <a:rPr sz="2700" b="1">
+                <a:solidFill>
+                  <a:srgbClr val="182235"/>
+                </a:solidFill>
+              </a:rPr>
+              <a:t>다섯 문제로 오늘 배운 내용을 확인하세요</a:t>
+            </a:r>
+          </a:p>
+        </p:txBody>
+      </p:sp>
+      <p:sp>
+        <p:nvSpPr>
+          <p:cNvPr id="3" name="">
+            <a:extLst xmlns:a="http://schemas.openxmlformats.org/drawingml/2006/main">
+              <a:ext uri="{FF2B5EF4-FFF2-40B4-BE49-F238E27FC236}">
+                <a16:creationId xmlns:a16="http://schemas.microsoft.com/office/drawing/2014/main" id="{6C2B2ED3-DB4F-45A6-B6CD-BC1512038F36}"/>
+              </a:ext>
+            </a:extLst>
+          </p:cNvPr>
+          <p:cNvSpPr>
+            <a:spLocks xmlns:a="http://schemas.openxmlformats.org/drawingml/2006/main" noGrp="1"/>
+          </p:cNvSpPr>
+          <p:nvPr/>
+        </p:nvSpPr>
+        <p:spPr>
+          <a:xfrm xmlns:a="http://schemas.openxmlformats.org/drawingml/2006/main">
+            <a:off x="666750" y="6419850"/>
+            <a:ext cx="10096500" cy="209550"/>
+          </a:xfrm>
+          <a:prstGeom xmlns:a="http://schemas.openxmlformats.org/drawingml/2006/main" prst="rect">
+            <a:avLst/>
+          </a:prstGeom>
+          <a:noFill xmlns:a="http://schemas.openxmlformats.org/drawingml/2006/main"/>
+          <a:ln xmlns:a="http://schemas.openxmlformats.org/drawingml/2006/main" w="0">
+            <a:noFill/>
+            <a:prstDash val="solid"/>
+          </a:ln>
+        </p:spPr>
+        <p:txBody>
+          <a:bodyPr xmlns:a="http://schemas.openxmlformats.org/drawingml/2006/main"/>
+          <a:lstStyle xmlns:a="http://schemas.openxmlformats.org/drawingml/2006/main"/>
+          <a:p xmlns:a="http://schemas.openxmlformats.org/drawingml/2006/main">
+            <a:pPr>
+              <a:defRPr sz="975">
+                <a:solidFill>
+                  <a:srgbClr val="657083"/>
+                </a:solidFill>
+              </a:defRPr>
+            </a:pPr>
+            <a:r>
+              <a:rPr sz="975">
+                <a:solidFill>
+                  <a:srgbClr val="657083"/>
+                </a:solidFill>
+              </a:rPr>
+              <a:t>EDU 웹개발 교육 플랫폼  ·  15</a:t>
+            </a:r>
+          </a:p>
+        </p:txBody>
+      </p:sp>
+      <p:sp>
+        <p:nvSpPr>
+          <p:cNvPr id="4" name="">
+            <a:extLst xmlns:a="http://schemas.openxmlformats.org/drawingml/2006/main">
+              <a:ext uri="{FF2B5EF4-FFF2-40B4-BE49-F238E27FC236}">
+                <a16:creationId xmlns:a16="http://schemas.microsoft.com/office/drawing/2014/main" id="{25BCB313-7742-4826-BFDC-B5FE51290C82}"/>
+              </a:ext>
+            </a:extLst>
+          </p:cNvPr>
+          <p:cNvSpPr>
+            <a:spLocks xmlns:a="http://schemas.openxmlformats.org/drawingml/2006/main" noGrp="1"/>
+          </p:cNvSpPr>
+          <p:nvPr/>
+        </p:nvSpPr>
+        <p:spPr>
+          <a:xfrm xmlns:a="http://schemas.openxmlformats.org/drawingml/2006/main">
+            <a:off x="857250" y="1285875"/>
+            <a:ext cx="10287000" cy="552450"/>
+          </a:xfrm>
+          <a:prstGeom xmlns:a="http://schemas.openxmlformats.org/drawingml/2006/main" prst="rect">
+            <a:avLst/>
+          </a:prstGeom>
+          <a:noFill xmlns:a="http://schemas.openxmlformats.org/drawingml/2006/main"/>
+          <a:ln xmlns:a="http://schemas.openxmlformats.org/drawingml/2006/main" w="0">
+            <a:noFill/>
+            <a:prstDash val="solid"/>
+          </a:ln>
+        </p:spPr>
+        <p:txBody>
+          <a:bodyPr xmlns:a="http://schemas.openxmlformats.org/drawingml/2006/main"/>
+          <a:lstStyle xmlns:a="http://schemas.openxmlformats.org/drawingml/2006/main"/>
+          <a:p xmlns:a="http://schemas.openxmlformats.org/drawingml/2006/main">
+            <a:pPr>
+              <a:defRPr sz="1650" b="0">
+                <a:solidFill>
+                  <a:srgbClr val="182235"/>
+                </a:solidFill>
+              </a:defRPr>
+            </a:pPr>
+            <a:r>
+              <a:rPr sz="1650" b="0">
+                <a:solidFill>
+                  <a:srgbClr val="182235"/>
+                </a:solidFill>
+              </a:rPr>
+              <a:t>1. 컴포넌트는 무엇과 비슷한가요?</a:t>
+            </a:r>
+          </a:p>
+        </p:txBody>
+      </p:sp>
+      <p:sp>
+        <p:nvSpPr>
+          <p:cNvPr id="5" name="">
+            <a:extLst xmlns:a="http://schemas.openxmlformats.org/drawingml/2006/main">
+              <a:ext uri="{FF2B5EF4-FFF2-40B4-BE49-F238E27FC236}">
+                <a16:creationId xmlns:a16="http://schemas.microsoft.com/office/drawing/2014/main" id="{B31E042F-901B-44CF-BDC9-677A8ED87CDF}"/>
+              </a:ext>
+            </a:extLst>
+          </p:cNvPr>
+          <p:cNvSpPr>
+            <a:spLocks xmlns:a="http://schemas.openxmlformats.org/drawingml/2006/main" noGrp="1"/>
+          </p:cNvSpPr>
+          <p:nvPr/>
+        </p:nvSpPr>
+        <p:spPr>
+          <a:xfrm xmlns:a="http://schemas.openxmlformats.org/drawingml/2006/main">
+            <a:off x="857250" y="2162175"/>
+            <a:ext cx="10287000" cy="552450"/>
+          </a:xfrm>
+          <a:prstGeom xmlns:a="http://schemas.openxmlformats.org/drawingml/2006/main" prst="rect">
+            <a:avLst/>
+          </a:prstGeom>
+          <a:noFill xmlns:a="http://schemas.openxmlformats.org/drawingml/2006/main"/>
+          <a:ln xmlns:a="http://schemas.openxmlformats.org/drawingml/2006/main" w="0">
+            <a:noFill/>
+            <a:prstDash val="solid"/>
+          </a:ln>
+        </p:spPr>
+        <p:txBody>
+          <a:bodyPr xmlns:a="http://schemas.openxmlformats.org/drawingml/2006/main"/>
+          <a:lstStyle xmlns:a="http://schemas.openxmlformats.org/drawingml/2006/main"/>
+          <a:p xmlns:a="http://schemas.openxmlformats.org/drawingml/2006/main">
+            <a:pPr>
+              <a:defRPr sz="1650" b="0">
+                <a:solidFill>
+                  <a:srgbClr val="182235"/>
+                </a:solidFill>
+              </a:defRPr>
+            </a:pPr>
+            <a:r>
+              <a:rPr sz="1650" b="0">
+                <a:solidFill>
+                  <a:srgbClr val="182235"/>
+                </a:solidFill>
+              </a:rPr>
+              <a:t>2. props의 역할은?</a:t>
+            </a:r>
+          </a:p>
+        </p:txBody>
+      </p:sp>
+      <p:sp>
+        <p:nvSpPr>
+          <p:cNvPr id="6" name="">
+            <a:extLst xmlns:a="http://schemas.openxmlformats.org/drawingml/2006/main">
+              <a:ext uri="{FF2B5EF4-FFF2-40B4-BE49-F238E27FC236}">
+                <a16:creationId xmlns:a16="http://schemas.microsoft.com/office/drawing/2014/main" id="{712D7CAD-242A-4823-B868-96A58D7143DE}"/>
+              </a:ext>
+            </a:extLst>
+          </p:cNvPr>
+          <p:cNvSpPr>
+            <a:spLocks xmlns:a="http://schemas.openxmlformats.org/drawingml/2006/main" noGrp="1"/>
+          </p:cNvSpPr>
+          <p:nvPr/>
+        </p:nvSpPr>
+        <p:spPr>
+          <a:xfrm xmlns:a="http://schemas.openxmlformats.org/drawingml/2006/main">
+            <a:off x="857250" y="3038475"/>
+            <a:ext cx="10287000" cy="552450"/>
+          </a:xfrm>
+          <a:prstGeom xmlns:a="http://schemas.openxmlformats.org/drawingml/2006/main" prst="rect">
+            <a:avLst/>
+          </a:prstGeom>
+          <a:noFill xmlns:a="http://schemas.openxmlformats.org/drawingml/2006/main"/>
+          <a:ln xmlns:a="http://schemas.openxmlformats.org/drawingml/2006/main" w="0">
+            <a:noFill/>
+            <a:prstDash val="solid"/>
+          </a:ln>
+        </p:spPr>
+        <p:txBody>
+          <a:bodyPr xmlns:a="http://schemas.openxmlformats.org/drawingml/2006/main"/>
+          <a:lstStyle xmlns:a="http://schemas.openxmlformats.org/drawingml/2006/main"/>
+          <a:p xmlns:a="http://schemas.openxmlformats.org/drawingml/2006/main">
+            <a:pPr>
+              <a:defRPr sz="1650" b="0">
+                <a:solidFill>
+                  <a:srgbClr val="182235"/>
+                </a:solidFill>
+              </a:defRPr>
+            </a:pPr>
+            <a:r>
+              <a:rPr sz="1650" b="0">
+                <a:solidFill>
+                  <a:srgbClr val="182235"/>
+                </a:solidFill>
+              </a:rPr>
+              <a:t>3. 컴포넌트 이름 첫 글자는?</a:t>
+            </a:r>
+          </a:p>
+        </p:txBody>
+      </p:sp>
+      <p:sp>
+        <p:nvSpPr>
+          <p:cNvPr id="7" name="">
+            <a:extLst xmlns:a="http://schemas.openxmlformats.org/drawingml/2006/main">
+              <a:ext uri="{FF2B5EF4-FFF2-40B4-BE49-F238E27FC236}">
+                <a16:creationId xmlns:a16="http://schemas.microsoft.com/office/drawing/2014/main" id="{AF3DADE1-D272-4EDA-B4CC-F32E434437D2}"/>
+              </a:ext>
+            </a:extLst>
+          </p:cNvPr>
+          <p:cNvSpPr>
+            <a:spLocks xmlns:a="http://schemas.openxmlformats.org/drawingml/2006/main" noGrp="1"/>
+          </p:cNvSpPr>
+          <p:nvPr/>
+        </p:nvSpPr>
+        <p:spPr>
+          <a:xfrm xmlns:a="http://schemas.openxmlformats.org/drawingml/2006/main">
+            <a:off x="857250" y="3914775"/>
+            <a:ext cx="10287000" cy="552450"/>
+          </a:xfrm>
+          <a:prstGeom xmlns:a="http://schemas.openxmlformats.org/drawingml/2006/main" prst="rect">
+            <a:avLst/>
+          </a:prstGeom>
+          <a:noFill xmlns:a="http://schemas.openxmlformats.org/drawingml/2006/main"/>
+          <a:ln xmlns:a="http://schemas.openxmlformats.org/drawingml/2006/main" w="0">
+            <a:noFill/>
+            <a:prstDash val="solid"/>
+          </a:ln>
+        </p:spPr>
+        <p:txBody>
+          <a:bodyPr xmlns:a="http://schemas.openxmlformats.org/drawingml/2006/main"/>
+          <a:lstStyle xmlns:a="http://schemas.openxmlformats.org/drawingml/2006/main"/>
+          <a:p xmlns:a="http://schemas.openxmlformats.org/drawingml/2006/main">
+            <a:pPr>
+              <a:defRPr sz="1650" b="0">
+                <a:solidFill>
+                  <a:srgbClr val="182235"/>
+                </a:solidFill>
+              </a:defRPr>
+            </a:pPr>
+            <a:r>
+              <a:rPr sz="1650" b="0">
+                <a:solidFill>
+                  <a:srgbClr val="182235"/>
+                </a:solidFill>
+              </a:rPr>
+              <a:t>4. 반복 목록의 key는 왜 필요한가요?</a:t>
+            </a:r>
+          </a:p>
+        </p:txBody>
+      </p:sp>
+      <p:sp>
+        <p:nvSpPr>
+          <p:cNvPr id="8" name="">
+            <a:extLst xmlns:a="http://schemas.openxmlformats.org/drawingml/2006/main">
+              <a:ext uri="{FF2B5EF4-FFF2-40B4-BE49-F238E27FC236}">
+                <a16:creationId xmlns:a16="http://schemas.microsoft.com/office/drawing/2014/main" id="{B5099664-AEFB-4BD6-A925-8C8B1D1D5C4F}"/>
+              </a:ext>
+            </a:extLst>
+          </p:cNvPr>
+          <p:cNvSpPr>
+            <a:spLocks xmlns:a="http://schemas.openxmlformats.org/drawingml/2006/main" noGrp="1"/>
+          </p:cNvSpPr>
+          <p:nvPr/>
+        </p:nvSpPr>
+        <p:spPr>
+          <a:xfrm xmlns:a="http://schemas.openxmlformats.org/drawingml/2006/main">
+            <a:off x="857250" y="4791075"/>
+            <a:ext cx="10287000" cy="552450"/>
+          </a:xfrm>
+          <a:prstGeom xmlns:a="http://schemas.openxmlformats.org/drawingml/2006/main" prst="rect">
+            <a:avLst/>
+          </a:prstGeom>
+          <a:noFill xmlns:a="http://schemas.openxmlformats.org/drawingml/2006/main"/>
+          <a:ln xmlns:a="http://schemas.openxmlformats.org/drawingml/2006/main" w="0">
+            <a:noFill/>
+            <a:prstDash val="solid"/>
+          </a:ln>
+        </p:spPr>
+        <p:txBody>
+          <a:bodyPr xmlns:a="http://schemas.openxmlformats.org/drawingml/2006/main"/>
+          <a:lstStyle xmlns:a="http://schemas.openxmlformats.org/drawingml/2006/main"/>
+          <a:p xmlns:a="http://schemas.openxmlformats.org/drawingml/2006/main">
+            <a:pPr>
+              <a:defRPr sz="1650" b="1">
+                <a:solidFill>
+                  <a:srgbClr val="182235"/>
+                </a:solidFill>
+              </a:defRPr>
+            </a:pPr>
+            <a:r>
+              <a:rPr sz="1650" b="1">
+                <a:solidFill>
+                  <a:srgbClr val="182235"/>
+                </a:solidFill>
+              </a:rPr>
+              <a:t>5. 완료 기준은?</a:t>
+            </a:r>
+          </a:p>
+        </p:txBody>
+      </p:sp>
+      <p:sp>
+        <p:nvSpPr>
+          <p:cNvPr id="9" name="">
+            <a:extLst xmlns:a="http://schemas.openxmlformats.org/drawingml/2006/main">
+              <a:ext uri="{FF2B5EF4-FFF2-40B4-BE49-F238E27FC236}">
+                <a16:creationId xmlns:a16="http://schemas.microsoft.com/office/drawing/2014/main" id="{8F699AC1-9002-47E2-8B00-16DB88350F25}"/>
+              </a:ext>
+            </a:extLst>
+          </p:cNvPr>
+          <p:cNvSpPr>
+            <a:spLocks xmlns:a="http://schemas.openxmlformats.org/drawingml/2006/main" noGrp="1"/>
+          </p:cNvSpPr>
+          <p:nvPr/>
+        </p:nvSpPr>
+        <p:spPr>
+          <a:xfrm xmlns:a="http://schemas.openxmlformats.org/drawingml/2006/main">
+            <a:off x="857250" y="5857875"/>
+            <a:ext cx="10001250" cy="304800"/>
+          </a:xfrm>
+          <a:prstGeom xmlns:a="http://schemas.openxmlformats.org/drawingml/2006/main" prst="rect">
+            <a:avLst/>
+          </a:prstGeom>
+          <a:noFill xmlns:a="http://schemas.openxmlformats.org/drawingml/2006/main"/>
+          <a:ln xmlns:a="http://schemas.openxmlformats.org/drawingml/2006/main" w="0">
+            <a:noFill/>
+            <a:prstDash val="solid"/>
+          </a:ln>
+        </p:spPr>
+        <p:txBody>
+          <a:bodyPr xmlns:a="http://schemas.openxmlformats.org/drawingml/2006/main"/>
+          <a:lstStyle xmlns:a="http://schemas.openxmlformats.org/drawingml/2006/main"/>
+          <a:p xmlns:a="http://schemas.openxmlformats.org/drawingml/2006/main">
+            <a:pPr>
+              <a:defRPr sz="1350" b="1">
+                <a:solidFill>
+                  <a:srgbClr val="6657E8"/>
+                </a:solidFill>
+              </a:defRPr>
+            </a:pPr>
+            <a:r>
+              <a:rPr sz="1350" b="1">
+                <a:solidFill>
+                  <a:srgbClr val="6657E8"/>
+                </a:solidFill>
+              </a:rPr>
+              <a:t>정답과 해설은 EDU 홈페이지 상세 자료에서 확인할 수 있습니다.</a:t>
+            </a:r>
+          </a:p>
+        </p:txBody>
+      </p:sp>
+    </p:spTree>
+    <p:extLst>
+      <p:ext uri="{BB962C8B-B14F-4D97-AF65-F5344CB8AC3E}">
+        <p14:creationId xmlns:p14="http://schemas.microsoft.com/office/powerpoint/2010/main" val="485503863"/>
       </p:ext>
     </p:extLst>
   </p:cSld>
@@ -1896,7 +5255,7 @@
           <p:cNvPr id="12" name="">
             <a:extLst xmlns:a="http://schemas.openxmlformats.org/drawingml/2006/main">
               <a:ext uri="{FF2B5EF4-FFF2-40B4-BE49-F238E27FC236}">
-                <a16:creationId xmlns:a16="http://schemas.microsoft.com/office/drawing/2014/main" id="{BB7CB91F-8E1A-4F5D-BFEC-1D751CDD2F28}"/>
+                <a16:creationId xmlns:a16="http://schemas.microsoft.com/office/drawing/2014/main" id="{CAFB207D-1284-40E4-87D9-26BAE77AD6E6}"/>
               </a:ext>
             </a:extLst>
           </p:cNvPr>
@@ -1927,7 +5286,7 @@
           <p:cNvPr id="2" name="">
             <a:extLst xmlns:a="http://schemas.openxmlformats.org/drawingml/2006/main">
               <a:ext uri="{FF2B5EF4-FFF2-40B4-BE49-F238E27FC236}">
-                <a16:creationId xmlns:a16="http://schemas.microsoft.com/office/drawing/2014/main" id="{1D6AAA19-81A0-4B08-8C13-480778D51CCB}"/>
+                <a16:creationId xmlns:a16="http://schemas.microsoft.com/office/drawing/2014/main" id="{33838CB2-92C8-45AF-BE63-0881C02143B1}"/>
               </a:ext>
             </a:extLst>
           </p:cNvPr>
@@ -1977,7 +5336,7 @@
           <p:cNvPr id="3" name="">
             <a:extLst xmlns:a="http://schemas.openxmlformats.org/drawingml/2006/main">
               <a:ext uri="{FF2B5EF4-FFF2-40B4-BE49-F238E27FC236}">
-                <a16:creationId xmlns:a16="http://schemas.microsoft.com/office/drawing/2014/main" id="{0C7035C6-A7C0-415D-8A35-B4BC0A5875F1}"/>
+                <a16:creationId xmlns:a16="http://schemas.microsoft.com/office/drawing/2014/main" id="{468245C6-AB80-4C65-96FC-73EB42675618}"/>
               </a:ext>
             </a:extLst>
           </p:cNvPr>
@@ -2027,7 +5386,7 @@
           <p:cNvPr id="4" name="">
             <a:extLst xmlns:a="http://schemas.openxmlformats.org/drawingml/2006/main">
               <a:ext uri="{FF2B5EF4-FFF2-40B4-BE49-F238E27FC236}">
-                <a16:creationId xmlns:a16="http://schemas.microsoft.com/office/drawing/2014/main" id="{AA6558B2-5C5B-4946-802D-2795FCDE37A7}"/>
+                <a16:creationId xmlns:a16="http://schemas.microsoft.com/office/drawing/2014/main" id="{33FE6786-DA53-4AF8-9A54-748381DC86A8}"/>
               </a:ext>
             </a:extLst>
           </p:cNvPr>
@@ -2060,7 +5419,7 @@
           <p:cNvPr id="5" name="">
             <a:extLst xmlns:a="http://schemas.openxmlformats.org/drawingml/2006/main">
               <a:ext uri="{FF2B5EF4-FFF2-40B4-BE49-F238E27FC236}">
-                <a16:creationId xmlns:a16="http://schemas.microsoft.com/office/drawing/2014/main" id="{BD56B486-0E7D-42DE-828F-85C7AD1BE983}"/>
+                <a16:creationId xmlns:a16="http://schemas.microsoft.com/office/drawing/2014/main" id="{9369CFA0-3797-4A22-AB1F-E6EE3C4B209E}"/>
               </a:ext>
             </a:extLst>
           </p:cNvPr>
@@ -2110,7 +5469,7 @@
           <p:cNvPr id="6" name="">
             <a:extLst xmlns:a="http://schemas.openxmlformats.org/drawingml/2006/main">
               <a:ext uri="{FF2B5EF4-FFF2-40B4-BE49-F238E27FC236}">
-                <a16:creationId xmlns:a16="http://schemas.microsoft.com/office/drawing/2014/main" id="{C3E683CB-1BCE-4D00-BF49-186441EDF2C7}"/>
+                <a16:creationId xmlns:a16="http://schemas.microsoft.com/office/drawing/2014/main" id="{8DA0A281-7EEC-4BC8-82C9-EF626B85F8B1}"/>
               </a:ext>
             </a:extLst>
           </p:cNvPr>
@@ -2160,7 +5519,7 @@
           <p:cNvPr id="7" name="">
             <a:extLst xmlns:a="http://schemas.openxmlformats.org/drawingml/2006/main">
               <a:ext uri="{FF2B5EF4-FFF2-40B4-BE49-F238E27FC236}">
-                <a16:creationId xmlns:a16="http://schemas.microsoft.com/office/drawing/2014/main" id="{245A6A49-AB3A-4B81-B2A8-12CDB95768D2}"/>
+                <a16:creationId xmlns:a16="http://schemas.microsoft.com/office/drawing/2014/main" id="{4DB4AE8D-C480-4D62-A6F7-977610AB37C2}"/>
               </a:ext>
             </a:extLst>
           </p:cNvPr>
@@ -2193,7 +5552,7 @@
           <p:cNvPr id="8" name="">
             <a:extLst xmlns:a="http://schemas.openxmlformats.org/drawingml/2006/main">
               <a:ext uri="{FF2B5EF4-FFF2-40B4-BE49-F238E27FC236}">
-                <a16:creationId xmlns:a16="http://schemas.microsoft.com/office/drawing/2014/main" id="{26D2F2D1-C7CD-45E5-9E83-D784B4B9CE62}"/>
+                <a16:creationId xmlns:a16="http://schemas.microsoft.com/office/drawing/2014/main" id="{D37423B0-E4BA-497E-AC17-E011DFF184A1}"/>
               </a:ext>
             </a:extLst>
           </p:cNvPr>
@@ -2243,7 +5602,7 @@
           <p:cNvPr id="9" name="">
             <a:extLst xmlns:a="http://schemas.openxmlformats.org/drawingml/2006/main">
               <a:ext uri="{FF2B5EF4-FFF2-40B4-BE49-F238E27FC236}">
-                <a16:creationId xmlns:a16="http://schemas.microsoft.com/office/drawing/2014/main" id="{EFE9592E-4795-4C76-ABFD-16AB03A53388}"/>
+                <a16:creationId xmlns:a16="http://schemas.microsoft.com/office/drawing/2014/main" id="{A72DC7C2-92EB-4528-AA5C-B336A64B2A2E}"/>
               </a:ext>
             </a:extLst>
           </p:cNvPr>
@@ -2293,7 +5652,7 @@
           <p:cNvPr id="10" name="">
             <a:extLst xmlns:a="http://schemas.openxmlformats.org/drawingml/2006/main">
               <a:ext uri="{FF2B5EF4-FFF2-40B4-BE49-F238E27FC236}">
-                <a16:creationId xmlns:a16="http://schemas.microsoft.com/office/drawing/2014/main" id="{2A99A038-0E99-47D8-82D7-CA73B515332F}"/>
+                <a16:creationId xmlns:a16="http://schemas.microsoft.com/office/drawing/2014/main" id="{6B3852BD-7E60-4AA7-8811-D87728135D7A}"/>
               </a:ext>
             </a:extLst>
           </p:cNvPr>
@@ -2326,7 +5685,7 @@
           <p:cNvPr id="11" name="">
             <a:extLst xmlns:a="http://schemas.openxmlformats.org/drawingml/2006/main">
               <a:ext uri="{FF2B5EF4-FFF2-40B4-BE49-F238E27FC236}">
-                <a16:creationId xmlns:a16="http://schemas.microsoft.com/office/drawing/2014/main" id="{51AB7216-EA4E-4182-B1D7-40508EF136DB}"/>
+                <a16:creationId xmlns:a16="http://schemas.microsoft.com/office/drawing/2014/main" id="{607DA82C-09E4-4DD1-B185-D9AC3B0634FC}"/>
               </a:ext>
             </a:extLst>
           </p:cNvPr>
@@ -2391,7 +5750,7 @@
     </p:spTree>
     <p:extLst>
       <p:ext uri="{BB962C8B-B14F-4D97-AF65-F5344CB8AC3E}">
-        <p14:creationId xmlns:p14="http://schemas.microsoft.com/office/powerpoint/2010/main" val="363865217"/>
+        <p14:creationId xmlns:p14="http://schemas.microsoft.com/office/powerpoint/2010/main" val="1777945957"/>
       </p:ext>
     </p:extLst>
   </p:cSld>
@@ -2422,7 +5781,7 @@
           <p:cNvPr id="8" name="">
             <a:extLst xmlns:a="http://schemas.openxmlformats.org/drawingml/2006/main">
               <a:ext uri="{FF2B5EF4-FFF2-40B4-BE49-F238E27FC236}">
-                <a16:creationId xmlns:a16="http://schemas.microsoft.com/office/drawing/2014/main" id="{CE849228-DC8F-41C1-82E8-8F6E82A88F9A}"/>
+                <a16:creationId xmlns:a16="http://schemas.microsoft.com/office/drawing/2014/main" id="{53A80033-A7EB-4684-AAFB-938850B1CF29}"/>
               </a:ext>
             </a:extLst>
           </p:cNvPr>
@@ -2453,7 +5812,7 @@
           <p:cNvPr id="2" name="">
             <a:extLst xmlns:a="http://schemas.openxmlformats.org/drawingml/2006/main">
               <a:ext uri="{FF2B5EF4-FFF2-40B4-BE49-F238E27FC236}">
-                <a16:creationId xmlns:a16="http://schemas.microsoft.com/office/drawing/2014/main" id="{48D13D55-49B4-48C6-AF1E-3B2E13E37A68}"/>
+                <a16:creationId xmlns:a16="http://schemas.microsoft.com/office/drawing/2014/main" id="{B6031EF2-FD9D-487D-8998-E88CE5F685FF}"/>
               </a:ext>
             </a:extLst>
           </p:cNvPr>
@@ -2503,7 +5862,7 @@
           <p:cNvPr id="3" name="">
             <a:extLst xmlns:a="http://schemas.openxmlformats.org/drawingml/2006/main">
               <a:ext uri="{FF2B5EF4-FFF2-40B4-BE49-F238E27FC236}">
-                <a16:creationId xmlns:a16="http://schemas.microsoft.com/office/drawing/2014/main" id="{7F877095-8F10-45A1-A08A-0E0E67D0653B}"/>
+                <a16:creationId xmlns:a16="http://schemas.microsoft.com/office/drawing/2014/main" id="{4C5D7341-8F70-4F68-B94D-D53BD3E3B28A}"/>
               </a:ext>
             </a:extLst>
           </p:cNvPr>
@@ -2553,7 +5912,7 @@
           <p:cNvPr id="4" name="">
             <a:extLst xmlns:a="http://schemas.openxmlformats.org/drawingml/2006/main">
               <a:ext uri="{FF2B5EF4-FFF2-40B4-BE49-F238E27FC236}">
-                <a16:creationId xmlns:a16="http://schemas.microsoft.com/office/drawing/2014/main" id="{6344DC79-7DB3-4FF5-B0AF-46193018E899}"/>
+                <a16:creationId xmlns:a16="http://schemas.microsoft.com/office/drawing/2014/main" id="{BC250AE3-FDA0-4B9D-8347-679F8E502E49}"/>
               </a:ext>
             </a:extLst>
           </p:cNvPr>
@@ -2586,7 +5945,7 @@
           <p:cNvPr id="5" name="">
             <a:extLst xmlns:a="http://schemas.openxmlformats.org/drawingml/2006/main">
               <a:ext uri="{FF2B5EF4-FFF2-40B4-BE49-F238E27FC236}">
-                <a16:creationId xmlns:a16="http://schemas.microsoft.com/office/drawing/2014/main" id="{CEBFE5DA-CE79-4986-BAE2-D4C5834FDA9C}"/>
+                <a16:creationId xmlns:a16="http://schemas.microsoft.com/office/drawing/2014/main" id="{9911B145-F686-47C6-AE69-442C2B12B52A}"/>
               </a:ext>
             </a:extLst>
           </p:cNvPr>
@@ -2636,7 +5995,7 @@
           <p:cNvPr id="6" name="">
             <a:extLst xmlns:a="http://schemas.openxmlformats.org/drawingml/2006/main">
               <a:ext uri="{FF2B5EF4-FFF2-40B4-BE49-F238E27FC236}">
-                <a16:creationId xmlns:a16="http://schemas.microsoft.com/office/drawing/2014/main" id="{A0355BCB-6589-4512-9B2B-912E0665C5F8}"/>
+                <a16:creationId xmlns:a16="http://schemas.microsoft.com/office/drawing/2014/main" id="{F9D6FF65-9D6F-41BE-819E-D9B6E8FD7A03}"/>
               </a:ext>
             </a:extLst>
           </p:cNvPr>
@@ -2686,7 +6045,7 @@
           <p:cNvPr id="7" name="">
             <a:extLst xmlns:a="http://schemas.openxmlformats.org/drawingml/2006/main">
               <a:ext uri="{FF2B5EF4-FFF2-40B4-BE49-F238E27FC236}">
-                <a16:creationId xmlns:a16="http://schemas.microsoft.com/office/drawing/2014/main" id="{15A89089-9B5E-4F16-95CB-6619A26C9E7D}"/>
+                <a16:creationId xmlns:a16="http://schemas.microsoft.com/office/drawing/2014/main" id="{FCD03EE8-5AA3-4DBF-ACDA-232A6353F908}"/>
               </a:ext>
             </a:extLst>
           </p:cNvPr>
@@ -2734,7 +6093,7 @@
     </p:spTree>
     <p:extLst>
       <p:ext uri="{BB962C8B-B14F-4D97-AF65-F5344CB8AC3E}">
-        <p14:creationId xmlns:p14="http://schemas.microsoft.com/office/powerpoint/2010/main" val="1157267477"/>
+        <p14:creationId xmlns:p14="http://schemas.microsoft.com/office/powerpoint/2010/main" val="493436525"/>
       </p:ext>
     </p:extLst>
   </p:cSld>
@@ -2765,7 +6124,7 @@
           <p:cNvPr id="16" name="">
             <a:extLst xmlns:a="http://schemas.openxmlformats.org/drawingml/2006/main">
               <a:ext uri="{FF2B5EF4-FFF2-40B4-BE49-F238E27FC236}">
-                <a16:creationId xmlns:a16="http://schemas.microsoft.com/office/drawing/2014/main" id="{AD70D57F-068B-4CA1-AB2E-F1F19E4CAFCE}"/>
+                <a16:creationId xmlns:a16="http://schemas.microsoft.com/office/drawing/2014/main" id="{8DF737A3-AA66-4B8B-8CFC-C83AF5D8DF6B}"/>
               </a:ext>
             </a:extLst>
           </p:cNvPr>
@@ -2796,7 +6155,7 @@
           <p:cNvPr id="2" name="">
             <a:extLst xmlns:a="http://schemas.openxmlformats.org/drawingml/2006/main">
               <a:ext uri="{FF2B5EF4-FFF2-40B4-BE49-F238E27FC236}">
-                <a16:creationId xmlns:a16="http://schemas.microsoft.com/office/drawing/2014/main" id="{A2FF71F3-9C66-460E-A36E-2226477DE94C}"/>
+                <a16:creationId xmlns:a16="http://schemas.microsoft.com/office/drawing/2014/main" id="{1956A5E8-9548-4198-B473-49B8B156C223}"/>
               </a:ext>
             </a:extLst>
           </p:cNvPr>
@@ -2846,7 +6205,7 @@
           <p:cNvPr id="3" name="">
             <a:extLst xmlns:a="http://schemas.openxmlformats.org/drawingml/2006/main">
               <a:ext uri="{FF2B5EF4-FFF2-40B4-BE49-F238E27FC236}">
-                <a16:creationId xmlns:a16="http://schemas.microsoft.com/office/drawing/2014/main" id="{28C03362-AFFA-4158-AACA-DF8EC9B42280}"/>
+                <a16:creationId xmlns:a16="http://schemas.microsoft.com/office/drawing/2014/main" id="{2C172732-8B9D-413F-B4CF-30E9832A7697}"/>
               </a:ext>
             </a:extLst>
           </p:cNvPr>
@@ -2896,7 +6255,7 @@
           <p:cNvPr id="4" name="">
             <a:extLst xmlns:a="http://schemas.openxmlformats.org/drawingml/2006/main">
               <a:ext uri="{FF2B5EF4-FFF2-40B4-BE49-F238E27FC236}">
-                <a16:creationId xmlns:a16="http://schemas.microsoft.com/office/drawing/2014/main" id="{3FE89D92-FB14-4CB1-8B48-1DB25BFBB04A}"/>
+                <a16:creationId xmlns:a16="http://schemas.microsoft.com/office/drawing/2014/main" id="{CFCCD556-0B73-47FE-9E5F-9BE3DF679988}"/>
               </a:ext>
             </a:extLst>
           </p:cNvPr>
@@ -2929,7 +6288,7 @@
           <p:cNvPr id="5" name="">
             <a:extLst xmlns:a="http://schemas.openxmlformats.org/drawingml/2006/main">
               <a:ext uri="{FF2B5EF4-FFF2-40B4-BE49-F238E27FC236}">
-                <a16:creationId xmlns:a16="http://schemas.microsoft.com/office/drawing/2014/main" id="{E9BDEACB-932D-4D0A-A17E-D073A012034C}"/>
+                <a16:creationId xmlns:a16="http://schemas.microsoft.com/office/drawing/2014/main" id="{85298473-EA9B-4876-A5B0-FE9F50EB3293}"/>
               </a:ext>
             </a:extLst>
           </p:cNvPr>
@@ -2979,7 +6338,7 @@
           <p:cNvPr id="6" name="">
             <a:extLst xmlns:a="http://schemas.openxmlformats.org/drawingml/2006/main">
               <a:ext uri="{FF2B5EF4-FFF2-40B4-BE49-F238E27FC236}">
-                <a16:creationId xmlns:a16="http://schemas.microsoft.com/office/drawing/2014/main" id="{E14B4F05-FD24-41A0-8047-C59D5F9A4DBE}"/>
+                <a16:creationId xmlns:a16="http://schemas.microsoft.com/office/drawing/2014/main" id="{FC6896C3-8A57-414C-9E7B-6014345F2A65}"/>
               </a:ext>
             </a:extLst>
           </p:cNvPr>
@@ -3029,7 +6388,7 @@
           <p:cNvPr id="7" name="">
             <a:extLst xmlns:a="http://schemas.openxmlformats.org/drawingml/2006/main">
               <a:ext uri="{FF2B5EF4-FFF2-40B4-BE49-F238E27FC236}">
-                <a16:creationId xmlns:a16="http://schemas.microsoft.com/office/drawing/2014/main" id="{6E3677B2-4820-470D-8F63-D8BD070CA74E}"/>
+                <a16:creationId xmlns:a16="http://schemas.microsoft.com/office/drawing/2014/main" id="{15C21941-8F77-45B3-BBF6-75907657A8D3}"/>
               </a:ext>
             </a:extLst>
           </p:cNvPr>
@@ -3062,7 +6421,7 @@
           <p:cNvPr id="8" name="">
             <a:extLst xmlns:a="http://schemas.openxmlformats.org/drawingml/2006/main">
               <a:ext uri="{FF2B5EF4-FFF2-40B4-BE49-F238E27FC236}">
-                <a16:creationId xmlns:a16="http://schemas.microsoft.com/office/drawing/2014/main" id="{01CCA5CA-A58C-4ACE-B905-048AD7CF4401}"/>
+                <a16:creationId xmlns:a16="http://schemas.microsoft.com/office/drawing/2014/main" id="{6624A379-CAB4-465D-9AD8-F140A209C840}"/>
               </a:ext>
             </a:extLst>
           </p:cNvPr>
@@ -3112,7 +6471,7 @@
           <p:cNvPr id="9" name="">
             <a:extLst xmlns:a="http://schemas.openxmlformats.org/drawingml/2006/main">
               <a:ext uri="{FF2B5EF4-FFF2-40B4-BE49-F238E27FC236}">
-                <a16:creationId xmlns:a16="http://schemas.microsoft.com/office/drawing/2014/main" id="{BA1DCBAE-AF82-4930-B9A7-7FFA692B1E33}"/>
+                <a16:creationId xmlns:a16="http://schemas.microsoft.com/office/drawing/2014/main" id="{3477E778-15BD-46F8-B174-6C09975C9552}"/>
               </a:ext>
             </a:extLst>
           </p:cNvPr>
@@ -3162,7 +6521,7 @@
           <p:cNvPr id="10" name="">
             <a:extLst xmlns:a="http://schemas.openxmlformats.org/drawingml/2006/main">
               <a:ext uri="{FF2B5EF4-FFF2-40B4-BE49-F238E27FC236}">
-                <a16:creationId xmlns:a16="http://schemas.microsoft.com/office/drawing/2014/main" id="{4552170E-F7C1-416B-B826-D23A60923835}"/>
+                <a16:creationId xmlns:a16="http://schemas.microsoft.com/office/drawing/2014/main" id="{A0398348-8B9E-419C-B7AF-4A5F531F6756}"/>
               </a:ext>
             </a:extLst>
           </p:cNvPr>
@@ -3195,7 +6554,7 @@
           <p:cNvPr id="11" name="">
             <a:extLst xmlns:a="http://schemas.openxmlformats.org/drawingml/2006/main">
               <a:ext uri="{FF2B5EF4-FFF2-40B4-BE49-F238E27FC236}">
-                <a16:creationId xmlns:a16="http://schemas.microsoft.com/office/drawing/2014/main" id="{01428F9F-0152-42BB-B6E8-041CD987FE3E}"/>
+                <a16:creationId xmlns:a16="http://schemas.microsoft.com/office/drawing/2014/main" id="{4DBEEE6C-BDB8-47DE-8214-6AB6AA49B940}"/>
               </a:ext>
             </a:extLst>
           </p:cNvPr>
@@ -3245,7 +6604,7 @@
           <p:cNvPr id="12" name="">
             <a:extLst xmlns:a="http://schemas.openxmlformats.org/drawingml/2006/main">
               <a:ext uri="{FF2B5EF4-FFF2-40B4-BE49-F238E27FC236}">
-                <a16:creationId xmlns:a16="http://schemas.microsoft.com/office/drawing/2014/main" id="{F23CB60B-ACA8-436A-93DA-9590BC9EC97C}"/>
+                <a16:creationId xmlns:a16="http://schemas.microsoft.com/office/drawing/2014/main" id="{F2E634A7-F201-4BFC-B6B2-477DB9F5845F}"/>
               </a:ext>
             </a:extLst>
           </p:cNvPr>
@@ -3295,7 +6654,7 @@
           <p:cNvPr id="13" name="">
             <a:extLst xmlns:a="http://schemas.openxmlformats.org/drawingml/2006/main">
               <a:ext uri="{FF2B5EF4-FFF2-40B4-BE49-F238E27FC236}">
-                <a16:creationId xmlns:a16="http://schemas.microsoft.com/office/drawing/2014/main" id="{4B24C2A6-F705-4325-BBD0-6D303B504956}"/>
+                <a16:creationId xmlns:a16="http://schemas.microsoft.com/office/drawing/2014/main" id="{3C4B038F-3611-496F-86B7-0D1D37FEB92C}"/>
               </a:ext>
             </a:extLst>
           </p:cNvPr>
@@ -3328,7 +6687,7 @@
           <p:cNvPr id="14" name="">
             <a:extLst xmlns:a="http://schemas.openxmlformats.org/drawingml/2006/main">
               <a:ext uri="{FF2B5EF4-FFF2-40B4-BE49-F238E27FC236}">
-                <a16:creationId xmlns:a16="http://schemas.microsoft.com/office/drawing/2014/main" id="{BF9A1D42-8A5B-4426-959A-7C46B5AE0DEA}"/>
+                <a16:creationId xmlns:a16="http://schemas.microsoft.com/office/drawing/2014/main" id="{BB666B7E-78CB-4DFC-957E-D44C22D230EF}"/>
               </a:ext>
             </a:extLst>
           </p:cNvPr>
@@ -3378,7 +6737,7 @@
           <p:cNvPr id="15" name="">
             <a:extLst xmlns:a="http://schemas.openxmlformats.org/drawingml/2006/main">
               <a:ext uri="{FF2B5EF4-FFF2-40B4-BE49-F238E27FC236}">
-                <a16:creationId xmlns:a16="http://schemas.microsoft.com/office/drawing/2014/main" id="{143EFA1F-43F5-49A9-B2DE-6E052BA308D0}"/>
+                <a16:creationId xmlns:a16="http://schemas.microsoft.com/office/drawing/2014/main" id="{42DA8EA6-DA40-4F71-82D7-79FC0A329AB0}"/>
               </a:ext>
             </a:extLst>
           </p:cNvPr>
@@ -3426,7 +6785,7 @@
     </p:spTree>
     <p:extLst>
       <p:ext uri="{BB962C8B-B14F-4D97-AF65-F5344CB8AC3E}">
-        <p14:creationId xmlns:p14="http://schemas.microsoft.com/office/powerpoint/2010/main" val="560886240"/>
+        <p14:creationId xmlns:p14="http://schemas.microsoft.com/office/powerpoint/2010/main" val="3794665"/>
       </p:ext>
     </p:extLst>
   </p:cSld>
@@ -3457,7 +6816,7 @@
           <p:cNvPr id="8" name="">
             <a:extLst xmlns:a="http://schemas.openxmlformats.org/drawingml/2006/main">
               <a:ext uri="{FF2B5EF4-FFF2-40B4-BE49-F238E27FC236}">
-                <a16:creationId xmlns:a16="http://schemas.microsoft.com/office/drawing/2014/main" id="{E686A8D9-740E-4319-924E-B2196B71F01B}"/>
+                <a16:creationId xmlns:a16="http://schemas.microsoft.com/office/drawing/2014/main" id="{BF75F3BB-9AF2-486E-9C32-856D246D8386}"/>
               </a:ext>
             </a:extLst>
           </p:cNvPr>
@@ -3488,7 +6847,7 @@
           <p:cNvPr id="2" name="">
             <a:extLst xmlns:a="http://schemas.openxmlformats.org/drawingml/2006/main">
               <a:ext uri="{FF2B5EF4-FFF2-40B4-BE49-F238E27FC236}">
-                <a16:creationId xmlns:a16="http://schemas.microsoft.com/office/drawing/2014/main" id="{66672F0E-CE06-4477-8A22-F4E57AF6AE07}"/>
+                <a16:creationId xmlns:a16="http://schemas.microsoft.com/office/drawing/2014/main" id="{B79653FA-FFE1-405A-822F-6ABF178230BB}"/>
               </a:ext>
             </a:extLst>
           </p:cNvPr>
@@ -3538,7 +6897,7 @@
           <p:cNvPr id="3" name="">
             <a:extLst xmlns:a="http://schemas.openxmlformats.org/drawingml/2006/main">
               <a:ext uri="{FF2B5EF4-FFF2-40B4-BE49-F238E27FC236}">
-                <a16:creationId xmlns:a16="http://schemas.microsoft.com/office/drawing/2014/main" id="{BE721465-170F-4E46-8441-8723AF11C9CC}"/>
+                <a16:creationId xmlns:a16="http://schemas.microsoft.com/office/drawing/2014/main" id="{D5E7AEA5-1F82-495D-BA33-A2181DCC0FD1}"/>
               </a:ext>
             </a:extLst>
           </p:cNvPr>
@@ -3588,7 +6947,7 @@
           <p:cNvPr id="4" name="">
             <a:extLst xmlns:a="http://schemas.openxmlformats.org/drawingml/2006/main">
               <a:ext uri="{FF2B5EF4-FFF2-40B4-BE49-F238E27FC236}">
-                <a16:creationId xmlns:a16="http://schemas.microsoft.com/office/drawing/2014/main" id="{DD29C851-875A-4D4E-B40C-CBC7063730CE}"/>
+                <a16:creationId xmlns:a16="http://schemas.microsoft.com/office/drawing/2014/main" id="{9AA23CC0-0CE0-4D4C-8569-198A2B7F780A}"/>
               </a:ext>
             </a:extLst>
           </p:cNvPr>
@@ -3623,7 +6982,7 @@
           <p:cNvPr id="5" name="">
             <a:extLst xmlns:a="http://schemas.openxmlformats.org/drawingml/2006/main">
               <a:ext uri="{FF2B5EF4-FFF2-40B4-BE49-F238E27FC236}">
-                <a16:creationId xmlns:a16="http://schemas.microsoft.com/office/drawing/2014/main" id="{CBF0CABF-5C2F-4CD7-BAA1-CECECAFD353A}"/>
+                <a16:creationId xmlns:a16="http://schemas.microsoft.com/office/drawing/2014/main" id="{0E4651A9-869D-425E-AB8C-F6AA4221D925}"/>
               </a:ext>
             </a:extLst>
           </p:cNvPr>
@@ -3673,7 +7032,7 @@
           <p:cNvPr id="6" name="">
             <a:extLst xmlns:a="http://schemas.openxmlformats.org/drawingml/2006/main">
               <a:ext uri="{FF2B5EF4-FFF2-40B4-BE49-F238E27FC236}">
-                <a16:creationId xmlns:a16="http://schemas.microsoft.com/office/drawing/2014/main" id="{130F4BEC-2FCA-4A4E-93CE-54A4F7890EA9}"/>
+                <a16:creationId xmlns:a16="http://schemas.microsoft.com/office/drawing/2014/main" id="{BD6F6EE0-7332-4F2E-9523-806BFD95AFC2}"/>
               </a:ext>
             </a:extLst>
           </p:cNvPr>
@@ -3757,7 +7116,7 @@
           <p:cNvPr id="7" name="">
             <a:extLst xmlns:a="http://schemas.openxmlformats.org/drawingml/2006/main">
               <a:ext uri="{FF2B5EF4-FFF2-40B4-BE49-F238E27FC236}">
-                <a16:creationId xmlns:a16="http://schemas.microsoft.com/office/drawing/2014/main" id="{E6189661-A739-40D6-A770-0C1736254B66}"/>
+                <a16:creationId xmlns:a16="http://schemas.microsoft.com/office/drawing/2014/main" id="{04295DFD-6F8E-409B-A1E5-E72F37152019}"/>
               </a:ext>
             </a:extLst>
           </p:cNvPr>
@@ -3805,7 +7164,7 @@
     </p:spTree>
     <p:extLst>
       <p:ext uri="{BB962C8B-B14F-4D97-AF65-F5344CB8AC3E}">
-        <p14:creationId xmlns:p14="http://schemas.microsoft.com/office/powerpoint/2010/main" val="604299906"/>
+        <p14:creationId xmlns:p14="http://schemas.microsoft.com/office/powerpoint/2010/main" val="1994847702"/>
       </p:ext>
     </p:extLst>
   </p:cSld>
@@ -3836,7 +7195,7 @@
           <p:cNvPr id="18" name="">
             <a:extLst xmlns:a="http://schemas.openxmlformats.org/drawingml/2006/main">
               <a:ext uri="{FF2B5EF4-FFF2-40B4-BE49-F238E27FC236}">
-                <a16:creationId xmlns:a16="http://schemas.microsoft.com/office/drawing/2014/main" id="{C3908DB2-59B9-469D-88F2-BE8A95746ACD}"/>
+                <a16:creationId xmlns:a16="http://schemas.microsoft.com/office/drawing/2014/main" id="{BADB1509-F852-4E5F-89CC-ABFACCA27583}"/>
               </a:ext>
             </a:extLst>
           </p:cNvPr>
@@ -3867,7 +7226,7 @@
           <p:cNvPr id="2" name="">
             <a:extLst xmlns:a="http://schemas.openxmlformats.org/drawingml/2006/main">
               <a:ext uri="{FF2B5EF4-FFF2-40B4-BE49-F238E27FC236}">
-                <a16:creationId xmlns:a16="http://schemas.microsoft.com/office/drawing/2014/main" id="{0430BB5C-9133-4166-9BE5-B55FF5E2A1B2}"/>
+                <a16:creationId xmlns:a16="http://schemas.microsoft.com/office/drawing/2014/main" id="{B014F1A5-1BC9-4191-ADA1-E92AC13896B6}"/>
               </a:ext>
             </a:extLst>
           </p:cNvPr>
@@ -3917,7 +7276,7 @@
           <p:cNvPr id="3" name="">
             <a:extLst xmlns:a="http://schemas.openxmlformats.org/drawingml/2006/main">
               <a:ext uri="{FF2B5EF4-FFF2-40B4-BE49-F238E27FC236}">
-                <a16:creationId xmlns:a16="http://schemas.microsoft.com/office/drawing/2014/main" id="{1953FF00-DE3F-4AA3-B70B-8D8542B1D402}"/>
+                <a16:creationId xmlns:a16="http://schemas.microsoft.com/office/drawing/2014/main" id="{5AB52247-2308-4EA4-9196-989A7C06F2FB}"/>
               </a:ext>
             </a:extLst>
           </p:cNvPr>
@@ -3967,7 +7326,7 @@
           <p:cNvPr id="4" name="">
             <a:extLst xmlns:a="http://schemas.openxmlformats.org/drawingml/2006/main">
               <a:ext uri="{FF2B5EF4-FFF2-40B4-BE49-F238E27FC236}">
-                <a16:creationId xmlns:a16="http://schemas.microsoft.com/office/drawing/2014/main" id="{335928DF-977B-4DF2-874C-1FFF975F5282}"/>
+                <a16:creationId xmlns:a16="http://schemas.microsoft.com/office/drawing/2014/main" id="{7ED06E14-6830-49FF-8889-379193D2F9E8}"/>
               </a:ext>
             </a:extLst>
           </p:cNvPr>
@@ -4000,7 +7359,7 @@
           <p:cNvPr id="5" name="">
             <a:extLst xmlns:a="http://schemas.openxmlformats.org/drawingml/2006/main">
               <a:ext uri="{FF2B5EF4-FFF2-40B4-BE49-F238E27FC236}">
-                <a16:creationId xmlns:a16="http://schemas.microsoft.com/office/drawing/2014/main" id="{0BCE28CB-C147-478D-BA2E-646A1F5FA222}"/>
+                <a16:creationId xmlns:a16="http://schemas.microsoft.com/office/drawing/2014/main" id="{DC520A54-1140-46DA-9497-922CDFEA8264}"/>
               </a:ext>
             </a:extLst>
           </p:cNvPr>
@@ -4050,7 +7409,7 @@
           <p:cNvPr id="6" name="">
             <a:extLst xmlns:a="http://schemas.openxmlformats.org/drawingml/2006/main">
               <a:ext uri="{FF2B5EF4-FFF2-40B4-BE49-F238E27FC236}">
-                <a16:creationId xmlns:a16="http://schemas.microsoft.com/office/drawing/2014/main" id="{53944A76-A28A-4E45-9F1A-735EF9C3207F}"/>
+                <a16:creationId xmlns:a16="http://schemas.microsoft.com/office/drawing/2014/main" id="{F708E1F5-9ED3-4B87-8E8C-E832593F1920}"/>
               </a:ext>
             </a:extLst>
           </p:cNvPr>
@@ -4100,7 +7459,7 @@
           <p:cNvPr id="7" name="">
             <a:extLst xmlns:a="http://schemas.openxmlformats.org/drawingml/2006/main">
               <a:ext uri="{FF2B5EF4-FFF2-40B4-BE49-F238E27FC236}">
-                <a16:creationId xmlns:a16="http://schemas.microsoft.com/office/drawing/2014/main" id="{85771B9C-A1A5-4133-A7E4-C879D7050910}"/>
+                <a16:creationId xmlns:a16="http://schemas.microsoft.com/office/drawing/2014/main" id="{26AD0630-E692-4DC3-83E1-BAA307104028}"/>
               </a:ext>
             </a:extLst>
           </p:cNvPr>
@@ -4133,7 +7492,7 @@
           <p:cNvPr id="8" name="">
             <a:extLst xmlns:a="http://schemas.openxmlformats.org/drawingml/2006/main">
               <a:ext uri="{FF2B5EF4-FFF2-40B4-BE49-F238E27FC236}">
-                <a16:creationId xmlns:a16="http://schemas.microsoft.com/office/drawing/2014/main" id="{9872E420-DF68-421D-B98E-E793AE7D5874}"/>
+                <a16:creationId xmlns:a16="http://schemas.microsoft.com/office/drawing/2014/main" id="{E4914B45-E88B-4122-8D8F-9428D4FB30D5}"/>
               </a:ext>
             </a:extLst>
           </p:cNvPr>
@@ -4183,7 +7542,7 @@
           <p:cNvPr id="9" name="">
             <a:extLst xmlns:a="http://schemas.openxmlformats.org/drawingml/2006/main">
               <a:ext uri="{FF2B5EF4-FFF2-40B4-BE49-F238E27FC236}">
-                <a16:creationId xmlns:a16="http://schemas.microsoft.com/office/drawing/2014/main" id="{FDC4122D-BDA1-44A0-9AC5-656A77683959}"/>
+                <a16:creationId xmlns:a16="http://schemas.microsoft.com/office/drawing/2014/main" id="{A772EBB3-C434-481E-B4FE-8EEC8AE15D93}"/>
               </a:ext>
             </a:extLst>
           </p:cNvPr>
@@ -4233,7 +7592,7 @@
           <p:cNvPr id="10" name="">
             <a:extLst xmlns:a="http://schemas.openxmlformats.org/drawingml/2006/main">
               <a:ext uri="{FF2B5EF4-FFF2-40B4-BE49-F238E27FC236}">
-                <a16:creationId xmlns:a16="http://schemas.microsoft.com/office/drawing/2014/main" id="{D051E907-4244-4C36-857C-15A389454569}"/>
+                <a16:creationId xmlns:a16="http://schemas.microsoft.com/office/drawing/2014/main" id="{F03B2731-D9D2-4ED0-80E3-18C9FF2E2048}"/>
               </a:ext>
             </a:extLst>
           </p:cNvPr>
@@ -4266,7 +7625,7 @@
           <p:cNvPr id="11" name="">
             <a:extLst xmlns:a="http://schemas.openxmlformats.org/drawingml/2006/main">
               <a:ext uri="{FF2B5EF4-FFF2-40B4-BE49-F238E27FC236}">
-                <a16:creationId xmlns:a16="http://schemas.microsoft.com/office/drawing/2014/main" id="{03B68626-37BD-4BBB-8D35-7312BB9602F5}"/>
+                <a16:creationId xmlns:a16="http://schemas.microsoft.com/office/drawing/2014/main" id="{F6345D2E-108A-43B1-BA96-312796498965}"/>
               </a:ext>
             </a:extLst>
           </p:cNvPr>
@@ -4316,7 +7675,7 @@
           <p:cNvPr id="12" name="">
             <a:extLst xmlns:a="http://schemas.openxmlformats.org/drawingml/2006/main">
               <a:ext uri="{FF2B5EF4-FFF2-40B4-BE49-F238E27FC236}">
-                <a16:creationId xmlns:a16="http://schemas.microsoft.com/office/drawing/2014/main" id="{09A713F5-8BD4-4F8C-B68F-AD17177CFCF8}"/>
+                <a16:creationId xmlns:a16="http://schemas.microsoft.com/office/drawing/2014/main" id="{54F9F27D-9BD1-4ED0-AF0B-ABE7F4CD2B4C}"/>
               </a:ext>
             </a:extLst>
           </p:cNvPr>
@@ -4366,7 +7725,7 @@
           <p:cNvPr id="13" name="">
             <a:extLst xmlns:a="http://schemas.openxmlformats.org/drawingml/2006/main">
               <a:ext uri="{FF2B5EF4-FFF2-40B4-BE49-F238E27FC236}">
-                <a16:creationId xmlns:a16="http://schemas.microsoft.com/office/drawing/2014/main" id="{20464C81-33C5-46A6-A1B3-D33371E9C670}"/>
+                <a16:creationId xmlns:a16="http://schemas.microsoft.com/office/drawing/2014/main" id="{B2A88F7A-626B-4DE4-8270-DB6049AC017A}"/>
               </a:ext>
             </a:extLst>
           </p:cNvPr>
@@ -4399,7 +7758,7 @@
           <p:cNvPr id="14" name="">
             <a:extLst xmlns:a="http://schemas.openxmlformats.org/drawingml/2006/main">
               <a:ext uri="{FF2B5EF4-FFF2-40B4-BE49-F238E27FC236}">
-                <a16:creationId xmlns:a16="http://schemas.microsoft.com/office/drawing/2014/main" id="{D00332EF-6AE9-4856-84EA-84EBF0AEE4C5}"/>
+                <a16:creationId xmlns:a16="http://schemas.microsoft.com/office/drawing/2014/main" id="{2D0EA5E7-EAC7-4CF1-ADBC-A855A7157779}"/>
               </a:ext>
             </a:extLst>
           </p:cNvPr>
@@ -4449,7 +7808,7 @@
           <p:cNvPr id="15" name="">
             <a:extLst xmlns:a="http://schemas.openxmlformats.org/drawingml/2006/main">
               <a:ext uri="{FF2B5EF4-FFF2-40B4-BE49-F238E27FC236}">
-                <a16:creationId xmlns:a16="http://schemas.microsoft.com/office/drawing/2014/main" id="{49617D8D-B216-4DF0-A3AE-6EF4CF9C355B}"/>
+                <a16:creationId xmlns:a16="http://schemas.microsoft.com/office/drawing/2014/main" id="{D1B68FFC-F916-4287-B333-74A9D4B519EA}"/>
               </a:ext>
             </a:extLst>
           </p:cNvPr>
@@ -4499,7 +7858,7 @@
           <p:cNvPr id="16" name="">
             <a:extLst xmlns:a="http://schemas.openxmlformats.org/drawingml/2006/main">
               <a:ext uri="{FF2B5EF4-FFF2-40B4-BE49-F238E27FC236}">
-                <a16:creationId xmlns:a16="http://schemas.microsoft.com/office/drawing/2014/main" id="{40A70098-739A-4589-BC09-ACD5B9887616}"/>
+                <a16:creationId xmlns:a16="http://schemas.microsoft.com/office/drawing/2014/main" id="{82691199-C9FF-412D-A635-699335D4BA90}"/>
               </a:ext>
             </a:extLst>
           </p:cNvPr>
@@ -4532,7 +7891,7 @@
           <p:cNvPr id="17" name="">
             <a:extLst xmlns:a="http://schemas.openxmlformats.org/drawingml/2006/main">
               <a:ext uri="{FF2B5EF4-FFF2-40B4-BE49-F238E27FC236}">
-                <a16:creationId xmlns:a16="http://schemas.microsoft.com/office/drawing/2014/main" id="{1830FAE7-F831-47DF-9085-359FDC95DB36}"/>
+                <a16:creationId xmlns:a16="http://schemas.microsoft.com/office/drawing/2014/main" id="{5D69E625-DE28-4B36-B19F-1E9F3353287C}"/>
               </a:ext>
             </a:extLst>
           </p:cNvPr>
@@ -4580,7 +7939,7 @@
     </p:spTree>
     <p:extLst>
       <p:ext uri="{BB962C8B-B14F-4D97-AF65-F5344CB8AC3E}">
-        <p14:creationId xmlns:p14="http://schemas.microsoft.com/office/powerpoint/2010/main" val="484976178"/>
+        <p14:creationId xmlns:p14="http://schemas.microsoft.com/office/powerpoint/2010/main" val="617220515"/>
       </p:ext>
     </p:extLst>
   </p:cSld>
@@ -4611,7 +7970,7 @@
           <p:cNvPr id="8" name="">
             <a:extLst xmlns:a="http://schemas.openxmlformats.org/drawingml/2006/main">
               <a:ext uri="{FF2B5EF4-FFF2-40B4-BE49-F238E27FC236}">
-                <a16:creationId xmlns:a16="http://schemas.microsoft.com/office/drawing/2014/main" id="{3601089B-6EAC-4AF0-9FC2-029DAF9828BB}"/>
+                <a16:creationId xmlns:a16="http://schemas.microsoft.com/office/drawing/2014/main" id="{BD823B8F-1489-4DCA-948E-67AF5009CCB8}"/>
               </a:ext>
             </a:extLst>
           </p:cNvPr>
@@ -4642,7 +8001,7 @@
           <p:cNvPr id="2" name="">
             <a:extLst xmlns:a="http://schemas.openxmlformats.org/drawingml/2006/main">
               <a:ext uri="{FF2B5EF4-FFF2-40B4-BE49-F238E27FC236}">
-                <a16:creationId xmlns:a16="http://schemas.microsoft.com/office/drawing/2014/main" id="{1A88BEBE-3DD3-431A-AB94-48C5DCF9EF89}"/>
+                <a16:creationId xmlns:a16="http://schemas.microsoft.com/office/drawing/2014/main" id="{45C122AF-AC38-4623-B79B-8F6C7B4F4F18}"/>
               </a:ext>
             </a:extLst>
           </p:cNvPr>
@@ -4692,7 +8051,7 @@
           <p:cNvPr id="3" name="">
             <a:extLst xmlns:a="http://schemas.openxmlformats.org/drawingml/2006/main">
               <a:ext uri="{FF2B5EF4-FFF2-40B4-BE49-F238E27FC236}">
-                <a16:creationId xmlns:a16="http://schemas.microsoft.com/office/drawing/2014/main" id="{EFC0C40D-807E-489B-9641-3032029BE650}"/>
+                <a16:creationId xmlns:a16="http://schemas.microsoft.com/office/drawing/2014/main" id="{F7586CDC-9F90-4008-815C-D853F7A255D2}"/>
               </a:ext>
             </a:extLst>
           </p:cNvPr>
@@ -4742,7 +8101,7 @@
           <p:cNvPr id="4" name="">
             <a:extLst xmlns:a="http://schemas.openxmlformats.org/drawingml/2006/main">
               <a:ext uri="{FF2B5EF4-FFF2-40B4-BE49-F238E27FC236}">
-                <a16:creationId xmlns:a16="http://schemas.microsoft.com/office/drawing/2014/main" id="{BB7829FC-E8E0-4D62-989A-4A23F319DDB3}"/>
+                <a16:creationId xmlns:a16="http://schemas.microsoft.com/office/drawing/2014/main" id="{13BD68BB-4D48-43F9-89A7-1AE8ECF6DA50}"/>
               </a:ext>
             </a:extLst>
           </p:cNvPr>
@@ -4775,7 +8134,7 @@
           <p:cNvPr id="5" name="">
             <a:extLst xmlns:a="http://schemas.openxmlformats.org/drawingml/2006/main">
               <a:ext uri="{FF2B5EF4-FFF2-40B4-BE49-F238E27FC236}">
-                <a16:creationId xmlns:a16="http://schemas.microsoft.com/office/drawing/2014/main" id="{B718F333-AA35-4D78-BAC8-7BF4FE9A0000}"/>
+                <a16:creationId xmlns:a16="http://schemas.microsoft.com/office/drawing/2014/main" id="{06ACB9C5-3EEE-47C1-92E3-7C7549696C24}"/>
               </a:ext>
             </a:extLst>
           </p:cNvPr>
@@ -4825,7 +8184,7 @@
           <p:cNvPr id="6" name="">
             <a:extLst xmlns:a="http://schemas.openxmlformats.org/drawingml/2006/main">
               <a:ext uri="{FF2B5EF4-FFF2-40B4-BE49-F238E27FC236}">
-                <a16:creationId xmlns:a16="http://schemas.microsoft.com/office/drawing/2014/main" id="{233EE013-CA6E-4431-9DA9-2DF0EC00F32B}"/>
+                <a16:creationId xmlns:a16="http://schemas.microsoft.com/office/drawing/2014/main" id="{5734394B-D759-4C77-999B-2D4DB5D40BBE}"/>
               </a:ext>
             </a:extLst>
           </p:cNvPr>
@@ -4875,7 +8234,7 @@
           <p:cNvPr id="7" name="">
             <a:extLst xmlns:a="http://schemas.openxmlformats.org/drawingml/2006/main">
               <a:ext uri="{FF2B5EF4-FFF2-40B4-BE49-F238E27FC236}">
-                <a16:creationId xmlns:a16="http://schemas.microsoft.com/office/drawing/2014/main" id="{E7B8E249-D5BD-4782-BBB0-8B1754E121F5}"/>
+                <a16:creationId xmlns:a16="http://schemas.microsoft.com/office/drawing/2014/main" id="{728665DA-68F8-4EDE-8A3A-8051B21B060F}"/>
               </a:ext>
             </a:extLst>
           </p:cNvPr>
@@ -4923,7 +8282,7 @@
     </p:spTree>
     <p:extLst>
       <p:ext uri="{BB962C8B-B14F-4D97-AF65-F5344CB8AC3E}">
-        <p14:creationId xmlns:p14="http://schemas.microsoft.com/office/powerpoint/2010/main" val="962705922"/>
+        <p14:creationId xmlns:p14="http://schemas.microsoft.com/office/powerpoint/2010/main" val="1950289227"/>
       </p:ext>
     </p:extLst>
   </p:cSld>
@@ -4954,7 +8313,7 @@
           <p:cNvPr id="14" name="">
             <a:extLst xmlns:a="http://schemas.openxmlformats.org/drawingml/2006/main">
               <a:ext uri="{FF2B5EF4-FFF2-40B4-BE49-F238E27FC236}">
-                <a16:creationId xmlns:a16="http://schemas.microsoft.com/office/drawing/2014/main" id="{88ADB321-B90C-4AE4-A740-9DE4116D9C56}"/>
+                <a16:creationId xmlns:a16="http://schemas.microsoft.com/office/drawing/2014/main" id="{FFFE8C41-6BB8-48B9-8049-493BD72F229A}"/>
               </a:ext>
             </a:extLst>
           </p:cNvPr>
@@ -4985,7 +8344,7 @@
           <p:cNvPr id="2" name="">
             <a:extLst xmlns:a="http://schemas.openxmlformats.org/drawingml/2006/main">
               <a:ext uri="{FF2B5EF4-FFF2-40B4-BE49-F238E27FC236}">
-                <a16:creationId xmlns:a16="http://schemas.microsoft.com/office/drawing/2014/main" id="{F89D5077-74B1-4E00-9FAC-66C8216A5BB6}"/>
+                <a16:creationId xmlns:a16="http://schemas.microsoft.com/office/drawing/2014/main" id="{CE724B99-AC92-48FE-AADA-994648F1F439}"/>
               </a:ext>
             </a:extLst>
           </p:cNvPr>
@@ -5035,7 +8394,7 @@
           <p:cNvPr id="3" name="">
             <a:extLst xmlns:a="http://schemas.openxmlformats.org/drawingml/2006/main">
               <a:ext uri="{FF2B5EF4-FFF2-40B4-BE49-F238E27FC236}">
-                <a16:creationId xmlns:a16="http://schemas.microsoft.com/office/drawing/2014/main" id="{8E0DE820-1AD3-4121-B2EC-FCD89CC803DA}"/>
+                <a16:creationId xmlns:a16="http://schemas.microsoft.com/office/drawing/2014/main" id="{96B1F016-CBA3-417B-80A2-99FE3EEE27F5}"/>
               </a:ext>
             </a:extLst>
           </p:cNvPr>
@@ -5085,7 +8444,7 @@
           <p:cNvPr id="4" name="">
             <a:extLst xmlns:a="http://schemas.openxmlformats.org/drawingml/2006/main">
               <a:ext uri="{FF2B5EF4-FFF2-40B4-BE49-F238E27FC236}">
-                <a16:creationId xmlns:a16="http://schemas.microsoft.com/office/drawing/2014/main" id="{DD36C055-41BF-4B1F-8A76-764F82B15E80}"/>
+                <a16:creationId xmlns:a16="http://schemas.microsoft.com/office/drawing/2014/main" id="{815E20F1-AFDC-44A6-8039-6A09A2EBEB3C}"/>
               </a:ext>
             </a:extLst>
           </p:cNvPr>
@@ -5118,7 +8477,7 @@
           <p:cNvPr id="5" name="">
             <a:extLst xmlns:a="http://schemas.openxmlformats.org/drawingml/2006/main">
               <a:ext uri="{FF2B5EF4-FFF2-40B4-BE49-F238E27FC236}">
-                <a16:creationId xmlns:a16="http://schemas.microsoft.com/office/drawing/2014/main" id="{FF2654F9-1A10-42A0-AD7D-24FC80A8A93C}"/>
+                <a16:creationId xmlns:a16="http://schemas.microsoft.com/office/drawing/2014/main" id="{89874BAF-3FFD-4A2E-BF94-5DA5C6DF8EDB}"/>
               </a:ext>
             </a:extLst>
           </p:cNvPr>
@@ -5168,7 +8527,7 @@
           <p:cNvPr id="6" name="">
             <a:extLst xmlns:a="http://schemas.openxmlformats.org/drawingml/2006/main">
               <a:ext uri="{FF2B5EF4-FFF2-40B4-BE49-F238E27FC236}">
-                <a16:creationId xmlns:a16="http://schemas.microsoft.com/office/drawing/2014/main" id="{68906EEE-0DD1-4B06-B9C7-DB7A9BCD11C8}"/>
+                <a16:creationId xmlns:a16="http://schemas.microsoft.com/office/drawing/2014/main" id="{9E2C9BC2-1A35-49C6-84E8-12D4467F3B23}"/>
               </a:ext>
             </a:extLst>
           </p:cNvPr>
@@ -5218,7 +8577,7 @@
           <p:cNvPr id="7" name="">
             <a:extLst xmlns:a="http://schemas.openxmlformats.org/drawingml/2006/main">
               <a:ext uri="{FF2B5EF4-FFF2-40B4-BE49-F238E27FC236}">
-                <a16:creationId xmlns:a16="http://schemas.microsoft.com/office/drawing/2014/main" id="{5EF0309C-4A19-43AC-A596-FABE56A252D2}"/>
+                <a16:creationId xmlns:a16="http://schemas.microsoft.com/office/drawing/2014/main" id="{81E4A35C-1880-4D4A-875F-A6C0F0A1D5EE}"/>
               </a:ext>
             </a:extLst>
           </p:cNvPr>
@@ -5251,7 +8610,7 @@
           <p:cNvPr id="8" name="">
             <a:extLst xmlns:a="http://schemas.openxmlformats.org/drawingml/2006/main">
               <a:ext uri="{FF2B5EF4-FFF2-40B4-BE49-F238E27FC236}">
-                <a16:creationId xmlns:a16="http://schemas.microsoft.com/office/drawing/2014/main" id="{232317A4-26CC-48B3-98A1-24ED84C5AC53}"/>
+                <a16:creationId xmlns:a16="http://schemas.microsoft.com/office/drawing/2014/main" id="{E659A0A8-41CE-4CC7-BEAF-9985F72B7813}"/>
               </a:ext>
             </a:extLst>
           </p:cNvPr>
@@ -5301,7 +8660,7 @@
           <p:cNvPr id="9" name="">
             <a:extLst xmlns:a="http://schemas.openxmlformats.org/drawingml/2006/main">
               <a:ext uri="{FF2B5EF4-FFF2-40B4-BE49-F238E27FC236}">
-                <a16:creationId xmlns:a16="http://schemas.microsoft.com/office/drawing/2014/main" id="{A6E68EC0-41F5-44AC-A8B0-393E4DD0E8BA}"/>
+                <a16:creationId xmlns:a16="http://schemas.microsoft.com/office/drawing/2014/main" id="{76D8047B-9D86-4E06-B574-2FFF99E92913}"/>
               </a:ext>
             </a:extLst>
           </p:cNvPr>
@@ -5351,7 +8710,7 @@
           <p:cNvPr id="10" name="">
             <a:extLst xmlns:a="http://schemas.openxmlformats.org/drawingml/2006/main">
               <a:ext uri="{FF2B5EF4-FFF2-40B4-BE49-F238E27FC236}">
-                <a16:creationId xmlns:a16="http://schemas.microsoft.com/office/drawing/2014/main" id="{FA4E3BF4-1D6D-4D73-9C15-7E165CC46443}"/>
+                <a16:creationId xmlns:a16="http://schemas.microsoft.com/office/drawing/2014/main" id="{9DC30F13-7D7C-43B9-8546-68480F33AF62}"/>
               </a:ext>
             </a:extLst>
           </p:cNvPr>
@@ -5384,7 +8743,7 @@
           <p:cNvPr id="11" name="">
             <a:extLst xmlns:a="http://schemas.openxmlformats.org/drawingml/2006/main">
               <a:ext uri="{FF2B5EF4-FFF2-40B4-BE49-F238E27FC236}">
-                <a16:creationId xmlns:a16="http://schemas.microsoft.com/office/drawing/2014/main" id="{45D866A3-C6A1-4205-A5C0-CC81BA51D35B}"/>
+                <a16:creationId xmlns:a16="http://schemas.microsoft.com/office/drawing/2014/main" id="{25A07486-AB6A-40F2-8F34-3D218D2CB648}"/>
               </a:ext>
             </a:extLst>
           </p:cNvPr>
@@ -5434,7 +8793,7 @@
           <p:cNvPr id="12" name="">
             <a:extLst xmlns:a="http://schemas.openxmlformats.org/drawingml/2006/main">
               <a:ext uri="{FF2B5EF4-FFF2-40B4-BE49-F238E27FC236}">
-                <a16:creationId xmlns:a16="http://schemas.microsoft.com/office/drawing/2014/main" id="{4C3AACA4-4889-4053-813D-82A83B3DA249}"/>
+                <a16:creationId xmlns:a16="http://schemas.microsoft.com/office/drawing/2014/main" id="{397B70A4-5BD5-477C-9449-10C38BA99414}"/>
               </a:ext>
             </a:extLst>
           </p:cNvPr>
@@ -5484,7 +8843,7 @@
           <p:cNvPr id="13" name="">
             <a:extLst xmlns:a="http://schemas.openxmlformats.org/drawingml/2006/main">
               <a:ext uri="{FF2B5EF4-FFF2-40B4-BE49-F238E27FC236}">
-                <a16:creationId xmlns:a16="http://schemas.microsoft.com/office/drawing/2014/main" id="{64A25CB1-05DF-481B-98C0-F4C4A03F2087}"/>
+                <a16:creationId xmlns:a16="http://schemas.microsoft.com/office/drawing/2014/main" id="{D1B45068-996B-4C85-95C2-FE5F8A61433E}"/>
               </a:ext>
             </a:extLst>
           </p:cNvPr>
@@ -5532,7 +8891,350 @@
     </p:spTree>
     <p:extLst>
       <p:ext uri="{BB962C8B-B14F-4D97-AF65-F5344CB8AC3E}">
-        <p14:creationId xmlns:p14="http://schemas.microsoft.com/office/powerpoint/2010/main" val="1070142004"/>
+        <p14:creationId xmlns:p14="http://schemas.microsoft.com/office/powerpoint/2010/main" val="1433614090"/>
+      </p:ext>
+    </p:extLst>
+  </p:cSld>
+</p:sld>
+</file>
+
+<file path=ppt/slides/slide9.xml><?xml version="1.0" encoding="utf-8"?>
+<p:sld xmlns:p="http://schemas.openxmlformats.org/presentationml/2006/main">
+  <p:cSld>
+    <p:bg>
+      <p:bgPr>
+        <a:solidFill xmlns:a="http://schemas.openxmlformats.org/drawingml/2006/main">
+          <a:srgbClr val="FFFCF8"/>
+        </a:solidFill>
+      </p:bgPr>
+    </p:bg>
+    <p:spTree>
+      <p:nvGrpSpPr>
+        <p:cNvPr id="1" name=""/>
+        <p:cNvGrpSpPr/>
+        <p:nvPr/>
+      </p:nvGrpSpPr>
+      <p:grpSpPr>
+        <a:xfrm xmlns:a="http://schemas.openxmlformats.org/drawingml/2006/main"/>
+      </p:grpSpPr>
+      <p:sp>
+        <p:nvSpPr>
+          <p:cNvPr id="8" name="">
+            <a:extLst xmlns:a="http://schemas.openxmlformats.org/drawingml/2006/main">
+              <a:ext uri="{FF2B5EF4-FFF2-40B4-BE49-F238E27FC236}">
+                <a16:creationId xmlns:a16="http://schemas.microsoft.com/office/drawing/2014/main" id="{458A9387-673F-4250-943D-B7CCD61A3D80}"/>
+              </a:ext>
+            </a:extLst>
+          </p:cNvPr>
+          <p:cNvSpPr>
+            <a:spLocks xmlns:a="http://schemas.openxmlformats.org/drawingml/2006/main" noGrp="1"/>
+          </p:cNvSpPr>
+          <p:nvPr/>
+        </p:nvSpPr>
+        <p:spPr>
+          <a:xfrm xmlns:a="http://schemas.openxmlformats.org/drawingml/2006/main">
+            <a:off x="0" y="0"/>
+            <a:ext cx="171450" cy="6858000"/>
+          </a:xfrm>
+          <a:prstGeom xmlns:a="http://schemas.openxmlformats.org/drawingml/2006/main" prst="rect">
+            <a:avLst/>
+          </a:prstGeom>
+          <a:solidFill xmlns:a="http://schemas.openxmlformats.org/drawingml/2006/main">
+            <a:srgbClr val="6657E8"/>
+          </a:solidFill>
+          <a:ln xmlns:a="http://schemas.openxmlformats.org/drawingml/2006/main" w="0">
+            <a:noFill/>
+            <a:prstDash val="solid"/>
+          </a:ln>
+        </p:spPr>
+      </p:sp>
+      <p:sp>
+        <p:nvSpPr>
+          <p:cNvPr id="2" name="">
+            <a:extLst xmlns:a="http://schemas.openxmlformats.org/drawingml/2006/main">
+              <a:ext uri="{FF2B5EF4-FFF2-40B4-BE49-F238E27FC236}">
+                <a16:creationId xmlns:a16="http://schemas.microsoft.com/office/drawing/2014/main" id="{80F22635-9040-41DE-86BB-0FA5BD733229}"/>
+              </a:ext>
+            </a:extLst>
+          </p:cNvPr>
+          <p:cNvSpPr>
+            <a:spLocks xmlns:a="http://schemas.openxmlformats.org/drawingml/2006/main" noGrp="1"/>
+          </p:cNvSpPr>
+          <p:nvPr/>
+        </p:nvSpPr>
+        <p:spPr>
+          <a:xfrm xmlns:a="http://schemas.openxmlformats.org/drawingml/2006/main">
+            <a:off x="647700" y="457200"/>
+            <a:ext cx="10096500" cy="552450"/>
+          </a:xfrm>
+          <a:prstGeom xmlns:a="http://schemas.openxmlformats.org/drawingml/2006/main" prst="rect">
+            <a:avLst/>
+          </a:prstGeom>
+          <a:noFill xmlns:a="http://schemas.openxmlformats.org/drawingml/2006/main"/>
+          <a:ln xmlns:a="http://schemas.openxmlformats.org/drawingml/2006/main" w="0">
+            <a:noFill/>
+            <a:prstDash val="solid"/>
+          </a:ln>
+        </p:spPr>
+        <p:txBody>
+          <a:bodyPr xmlns:a="http://schemas.openxmlformats.org/drawingml/2006/main"/>
+          <a:lstStyle xmlns:a="http://schemas.openxmlformats.org/drawingml/2006/main"/>
+          <a:p xmlns:a="http://schemas.openxmlformats.org/drawingml/2006/main">
+            <a:pPr>
+              <a:defRPr sz="2700" b="1">
+                <a:solidFill>
+                  <a:srgbClr val="182235"/>
+                </a:solidFill>
+              </a:defRPr>
+            </a:pPr>
+            <a:r>
+              <a:rPr sz="2700" b="1">
+                <a:solidFill>
+                  <a:srgbClr val="182235"/>
+                </a:solidFill>
+              </a:rPr>
+              <a:t>왜 배우는지 알면 실습 방향이 보입니다</a:t>
+            </a:r>
+          </a:p>
+        </p:txBody>
+      </p:sp>
+      <p:sp>
+        <p:nvSpPr>
+          <p:cNvPr id="3" name="">
+            <a:extLst xmlns:a="http://schemas.openxmlformats.org/drawingml/2006/main">
+              <a:ext uri="{FF2B5EF4-FFF2-40B4-BE49-F238E27FC236}">
+                <a16:creationId xmlns:a16="http://schemas.microsoft.com/office/drawing/2014/main" id="{56BF65C6-F986-4E32-BA07-CD8D97831C58}"/>
+              </a:ext>
+            </a:extLst>
+          </p:cNvPr>
+          <p:cNvSpPr>
+            <a:spLocks xmlns:a="http://schemas.openxmlformats.org/drawingml/2006/main" noGrp="1"/>
+          </p:cNvSpPr>
+          <p:nvPr/>
+        </p:nvSpPr>
+        <p:spPr>
+          <a:xfrm xmlns:a="http://schemas.openxmlformats.org/drawingml/2006/main">
+            <a:off x="666750" y="6419850"/>
+            <a:ext cx="10096500" cy="209550"/>
+          </a:xfrm>
+          <a:prstGeom xmlns:a="http://schemas.openxmlformats.org/drawingml/2006/main" prst="rect">
+            <a:avLst/>
+          </a:prstGeom>
+          <a:noFill xmlns:a="http://schemas.openxmlformats.org/drawingml/2006/main"/>
+          <a:ln xmlns:a="http://schemas.openxmlformats.org/drawingml/2006/main" w="0">
+            <a:noFill/>
+            <a:prstDash val="solid"/>
+          </a:ln>
+        </p:spPr>
+        <p:txBody>
+          <a:bodyPr xmlns:a="http://schemas.openxmlformats.org/drawingml/2006/main"/>
+          <a:lstStyle xmlns:a="http://schemas.openxmlformats.org/drawingml/2006/main"/>
+          <a:p xmlns:a="http://schemas.openxmlformats.org/drawingml/2006/main">
+            <a:pPr>
+              <a:defRPr sz="975">
+                <a:solidFill>
+                  <a:srgbClr val="657083"/>
+                </a:solidFill>
+              </a:defRPr>
+            </a:pPr>
+            <a:r>
+              <a:rPr sz="975">
+                <a:solidFill>
+                  <a:srgbClr val="657083"/>
+                </a:solidFill>
+              </a:rPr>
+              <a:t>EDU 웹개발 교육 플랫폼  ·  09</a:t>
+            </a:r>
+          </a:p>
+        </p:txBody>
+      </p:sp>
+      <p:sp>
+        <p:nvSpPr>
+          <p:cNvPr id="4" name="">
+            <a:extLst xmlns:a="http://schemas.openxmlformats.org/drawingml/2006/main">
+              <a:ext uri="{FF2B5EF4-FFF2-40B4-BE49-F238E27FC236}">
+                <a16:creationId xmlns:a16="http://schemas.microsoft.com/office/drawing/2014/main" id="{6F097AC8-1618-45A1-A64A-12D7FCD4C6F6}"/>
+              </a:ext>
+            </a:extLst>
+          </p:cNvPr>
+          <p:cNvSpPr>
+            <a:spLocks xmlns:a="http://schemas.openxmlformats.org/drawingml/2006/main" noGrp="1"/>
+          </p:cNvSpPr>
+          <p:nvPr/>
+        </p:nvSpPr>
+        <p:spPr>
+          <a:xfrm xmlns:a="http://schemas.openxmlformats.org/drawingml/2006/main">
+            <a:off x="685800" y="1381125"/>
+            <a:ext cx="10820400" cy="1809750"/>
+          </a:xfrm>
+          <a:prstGeom xmlns:a="http://schemas.openxmlformats.org/drawingml/2006/main" prst="roundRect">
+            <a:avLst>
+              <a:gd name="adj" fmla="val 6316"/>
+            </a:avLst>
+          </a:prstGeom>
+          <a:solidFill xmlns:a="http://schemas.openxmlformats.org/drawingml/2006/main">
+            <a:srgbClr val="EEEAFE"/>
+          </a:solidFill>
+          <a:ln xmlns:a="http://schemas.openxmlformats.org/drawingml/2006/main" w="0">
+            <a:noFill/>
+            <a:prstDash val="solid"/>
+          </a:ln>
+        </p:spPr>
+      </p:sp>
+      <p:sp>
+        <p:nvSpPr>
+          <p:cNvPr id="5" name="">
+            <a:extLst xmlns:a="http://schemas.openxmlformats.org/drawingml/2006/main">
+              <a:ext uri="{FF2B5EF4-FFF2-40B4-BE49-F238E27FC236}">
+                <a16:creationId xmlns:a16="http://schemas.microsoft.com/office/drawing/2014/main" id="{B2B71113-A78C-41EB-9E37-7C522B19EBDB}"/>
+              </a:ext>
+            </a:extLst>
+          </p:cNvPr>
+          <p:cNvSpPr>
+            <a:spLocks xmlns:a="http://schemas.openxmlformats.org/drawingml/2006/main" noGrp="1"/>
+          </p:cNvSpPr>
+          <p:nvPr/>
+        </p:nvSpPr>
+        <p:spPr>
+          <a:xfrm xmlns:a="http://schemas.openxmlformats.org/drawingml/2006/main">
+            <a:off x="1066800" y="1762125"/>
+            <a:ext cx="10058400" cy="1143000"/>
+          </a:xfrm>
+          <a:prstGeom xmlns:a="http://schemas.openxmlformats.org/drawingml/2006/main" prst="rect">
+            <a:avLst/>
+          </a:prstGeom>
+          <a:noFill xmlns:a="http://schemas.openxmlformats.org/drawingml/2006/main"/>
+          <a:ln xmlns:a="http://schemas.openxmlformats.org/drawingml/2006/main" w="0">
+            <a:noFill/>
+            <a:prstDash val="solid"/>
+          </a:ln>
+        </p:spPr>
+        <p:txBody>
+          <a:bodyPr xmlns:a="http://schemas.openxmlformats.org/drawingml/2006/main"/>
+          <a:lstStyle xmlns:a="http://schemas.openxmlformats.org/drawingml/2006/main"/>
+          <a:p xmlns:a="http://schemas.openxmlformats.org/drawingml/2006/main">
+            <a:pPr>
+              <a:defRPr sz="1875">
+                <a:solidFill>
+                  <a:srgbClr val="182235"/>
+                </a:solidFill>
+              </a:defRPr>
+            </a:pPr>
+            <a:r>
+              <a:rPr sz="1875">
+                <a:solidFill>
+                  <a:srgbClr val="182235"/>
+                </a:solidFill>
+              </a:rPr>
+              <a:t>화면을 작은 부품으로 나누면 같은 디자인을 반복해서 만들지 않아도 되고, 수정할 곳도 쉽게 찾을 수 있습니다.</a:t>
+            </a:r>
+          </a:p>
+        </p:txBody>
+      </p:sp>
+      <p:sp>
+        <p:nvSpPr>
+          <p:cNvPr id="6" name="">
+            <a:extLst xmlns:a="http://schemas.openxmlformats.org/drawingml/2006/main">
+              <a:ext uri="{FF2B5EF4-FFF2-40B4-BE49-F238E27FC236}">
+                <a16:creationId xmlns:a16="http://schemas.microsoft.com/office/drawing/2014/main" id="{BC4D6A66-EA92-4983-A969-9975DC66BB7F}"/>
+              </a:ext>
+            </a:extLst>
+          </p:cNvPr>
+          <p:cNvSpPr>
+            <a:spLocks xmlns:a="http://schemas.openxmlformats.org/drawingml/2006/main" noGrp="1"/>
+          </p:cNvSpPr>
+          <p:nvPr/>
+        </p:nvSpPr>
+        <p:spPr>
+          <a:xfrm xmlns:a="http://schemas.openxmlformats.org/drawingml/2006/main">
+            <a:off x="838200" y="3714750"/>
+            <a:ext cx="2476500" cy="323850"/>
+          </a:xfrm>
+          <a:prstGeom xmlns:a="http://schemas.openxmlformats.org/drawingml/2006/main" prst="rect">
+            <a:avLst/>
+          </a:prstGeom>
+          <a:noFill xmlns:a="http://schemas.openxmlformats.org/drawingml/2006/main"/>
+          <a:ln xmlns:a="http://schemas.openxmlformats.org/drawingml/2006/main" w="0">
+            <a:noFill/>
+            <a:prstDash val="solid"/>
+          </a:ln>
+        </p:spPr>
+        <p:txBody>
+          <a:bodyPr xmlns:a="http://schemas.openxmlformats.org/drawingml/2006/main"/>
+          <a:lstStyle xmlns:a="http://schemas.openxmlformats.org/drawingml/2006/main"/>
+          <a:p xmlns:a="http://schemas.openxmlformats.org/drawingml/2006/main">
+            <a:pPr>
+              <a:defRPr sz="1575" b="1">
+                <a:solidFill>
+                  <a:srgbClr val="6657E8"/>
+                </a:solidFill>
+              </a:defRPr>
+            </a:pPr>
+            <a:r>
+              <a:rPr sz="1575" b="1">
+                <a:solidFill>
+                  <a:srgbClr val="6657E8"/>
+                </a:solidFill>
+              </a:rPr>
+              <a:t>오늘 완성할 결과</a:t>
+            </a:r>
+          </a:p>
+        </p:txBody>
+      </p:sp>
+      <p:sp>
+        <p:nvSpPr>
+          <p:cNvPr id="7" name="">
+            <a:extLst xmlns:a="http://schemas.openxmlformats.org/drawingml/2006/main">
+              <a:ext uri="{FF2B5EF4-FFF2-40B4-BE49-F238E27FC236}">
+                <a16:creationId xmlns:a16="http://schemas.microsoft.com/office/drawing/2014/main" id="{9ECBB870-F98B-4DDF-B948-3225D92EC546}"/>
+              </a:ext>
+            </a:extLst>
+          </p:cNvPr>
+          <p:cNvSpPr>
+            <a:spLocks xmlns:a="http://schemas.openxmlformats.org/drawingml/2006/main" noGrp="1"/>
+          </p:cNvSpPr>
+          <p:nvPr/>
+        </p:nvSpPr>
+        <p:spPr>
+          <a:xfrm xmlns:a="http://schemas.openxmlformats.org/drawingml/2006/main">
+            <a:off x="838200" y="4191000"/>
+            <a:ext cx="10096500" cy="857250"/>
+          </a:xfrm>
+          <a:prstGeom xmlns:a="http://schemas.openxmlformats.org/drawingml/2006/main" prst="rect">
+            <a:avLst/>
+          </a:prstGeom>
+          <a:noFill xmlns:a="http://schemas.openxmlformats.org/drawingml/2006/main"/>
+          <a:ln xmlns:a="http://schemas.openxmlformats.org/drawingml/2006/main" w="0">
+            <a:noFill/>
+            <a:prstDash val="solid"/>
+          </a:ln>
+        </p:spPr>
+        <p:txBody>
+          <a:bodyPr xmlns:a="http://schemas.openxmlformats.org/drawingml/2006/main"/>
+          <a:lstStyle xmlns:a="http://schemas.openxmlformats.org/drawingml/2006/main"/>
+          <a:p xmlns:a="http://schemas.openxmlformats.org/drawingml/2006/main">
+            <a:pPr>
+              <a:defRPr sz="2025" b="1">
+                <a:solidFill>
+                  <a:srgbClr val="182235"/>
+                </a:solidFill>
+              </a:defRPr>
+            </a:pPr>
+            <a:r>
+              <a:rPr sz="2025" b="1">
+                <a:solidFill>
+                  <a:srgbClr val="182235"/>
+                </a:solidFill>
+              </a:rPr>
+              <a:t>제목과 설명이 서로 다른 교육자료 카드 세 개를 하나의 컴포넌트로 표시합니다.</a:t>
+            </a:r>
+          </a:p>
+        </p:txBody>
+      </p:sp>
+    </p:spTree>
+    <p:extLst>
+      <p:ext uri="{BB962C8B-B14F-4D97-AF65-F5344CB8AC3E}">
+        <p14:creationId xmlns:p14="http://schemas.microsoft.com/office/powerpoint/2010/main" val="1977291432"/>
       </p:ext>
     </p:extLst>
   </p:cSld>
